--- a/Rate Filing Platform - Case Study.pptx
+++ b/Rate Filing Platform - Case Study.pptx
@@ -7,6 +7,7 @@
   <p:sldIdLst>
     <p:sldId id="256" r:id="rId7"/>
     <p:sldId id="257" r:id="rId8"/>
+    <p:sldId id="258" r:id="rId9"/>
   </p:sldIdLst>
   <p:sldSz cx="12191695" cy="6858000" type="screen4x3"/>
   <p:notesSz cx="6858000" cy="9144000"/>
@@ -3147,8 +3148,8 @@
         </p:nvSpPr>
         <p:spPr>
           <a:xfrm>
-            <a:off x="502920" y="292608"/>
-            <a:ext cx="8961120" cy="566928"/>
+            <a:off x="502920" y="274320"/>
+            <a:ext cx="9692640" cy="548640"/>
           </a:xfrm>
           <a:prstGeom prst="rect">
             <a:avLst/>
@@ -3170,7 +3171,7 @@
               </a:spcAft>
             </a:pPr>
             <a:r>
-              <a:rPr sz="3000" b="1" i="1">
+              <a:rPr sz="2800" b="1" i="1">
                 <a:solidFill>
                   <a:srgbClr val="A8451B"/>
                 </a:solidFill>
@@ -3189,8 +3190,8 @@
         </p:nvSpPr>
         <p:spPr>
           <a:xfrm>
-            <a:off x="502920" y="896112"/>
-            <a:ext cx="10881360" cy="566928"/>
+            <a:off x="502920" y="859536"/>
+            <a:ext cx="11155680" cy="502920"/>
           </a:xfrm>
           <a:prstGeom prst="rect">
             <a:avLst/>
@@ -3212,7 +3213,7 @@
               </a:spcAft>
             </a:pPr>
             <a:r>
-              <a:rPr sz="1350" b="0" i="0">
+              <a:rPr sz="1300" b="0" i="0">
                 <a:solidFill>
                   <a:srgbClr val="4C5A70"/>
                 </a:solidFill>
@@ -3221,7 +3222,7 @@
               <a:t>Replaced slow, manual, spreadsheet-based rate filing work with </a:t>
             </a:r>
             <a:r>
-              <a:rPr sz="1350" b="1" i="0">
+              <a:rPr sz="1300" b="1" i="0">
                 <a:solidFill>
                   <a:srgbClr val="22334F"/>
                 </a:solidFill>
@@ -3230,13 +3231,13 @@
               <a:t>one automated platform</a:t>
             </a:r>
             <a:r>
-              <a:rPr sz="1350" b="0" i="0">
+              <a:rPr sz="1300" b="0" i="0">
                 <a:solidFill>
                   <a:srgbClr val="4C5A70"/>
                 </a:solidFill>
                 <a:latin typeface="Segoe UI"/>
               </a:rPr>
-              <a:t> that builds state insurance filings for our Property (BOP), Auto, and Farm lines — faster, more consistent, and far less prone to human error.</a:t>
+              <a:t> that builds state insurance filings for our Property (BOP), Auto, and Farm lines.</a:t>
             </a:r>
           </a:p>
         </p:txBody>
@@ -3249,8 +3250,8 @@
         </p:nvSpPr>
         <p:spPr>
           <a:xfrm>
-            <a:off x="502920" y="1627632"/>
-            <a:ext cx="11183112" cy="329184"/>
+            <a:off x="502920" y="1481328"/>
+            <a:ext cx="5518404" cy="292608"/>
           </a:xfrm>
           <a:prstGeom prst="rect">
             <a:avLst/>
@@ -3289,34 +3290,30 @@
                 </a:solidFill>
                 <a:latin typeface="Segoe UI"/>
               </a:rPr>
-              <a:t>BUSINESS IMPACT</a:t>
-            </a:r>
-          </a:p>
-        </p:txBody>
-      </p:sp>
-      <p:sp>
-        <p:nvSpPr>
-          <p:cNvPr id="6" name="Rounded Rectangle 5"/>
+              <a:t>BACKGROUND</a:t>
+            </a:r>
+          </a:p>
+        </p:txBody>
+      </p:sp>
+      <p:sp>
+        <p:nvSpPr>
+          <p:cNvPr id="6" name="Rectangle 5"/>
           <p:cNvSpPr/>
           <p:nvPr/>
         </p:nvSpPr>
         <p:spPr>
           <a:xfrm>
-            <a:off x="502920" y="2084831"/>
-            <a:ext cx="2670048" cy="1298448"/>
-          </a:xfrm>
-          <a:prstGeom prst="roundRect">
-            <a:avLst>
-              <a:gd name="adj" fmla="val 7000"/>
-            </a:avLst>
+            <a:off x="6167628" y="1481328"/>
+            <a:ext cx="5518404" cy="292608"/>
+          </a:xfrm>
+          <a:prstGeom prst="rect">
+            <a:avLst/>
           </a:prstGeom>
           <a:solidFill>
-            <a:srgbClr val="FFFFFF"/>
+            <a:srgbClr val="101B2D"/>
           </a:solidFill>
-          <a:ln w="12700">
-            <a:solidFill>
-              <a:srgbClr val="D8DFE9"/>
-            </a:solidFill>
+          <a:ln>
+            <a:noFill/>
           </a:ln>
           <a:effectLst/>
         </p:spPr>
@@ -3335,10 +3332,19 @@
           </a:fontRef>
         </p:style>
         <p:txBody>
-          <a:bodyPr rtlCol="0" anchor="ctr"/>
+          <a:bodyPr rtlCol="0" anchor="ctr" lIns="128016" tIns="0" bIns="0"/>
           <a:lstStyle/>
           <a:p>
             <a:pPr algn="ctr"/>
+            <a:r>
+              <a:rPr sz="1250" b="1">
+                <a:solidFill>
+                  <a:srgbClr val="F2F5FA"/>
+                </a:solidFill>
+                <a:latin typeface="Segoe UI"/>
+              </a:rPr>
+              <a:t>OBJECTIVE</a:t>
+            </a:r>
           </a:p>
         </p:txBody>
       </p:sp>
@@ -3350,8 +3356,8 @@
         </p:nvSpPr>
         <p:spPr>
           <a:xfrm>
-            <a:off x="649224" y="2212847"/>
-            <a:ext cx="2377440" cy="329184"/>
+            <a:off x="502920" y="1847088"/>
+            <a:ext cx="5518404" cy="1600200"/>
           </a:xfrm>
           <a:prstGeom prst="rect">
             <a:avLst/>
@@ -3359,7 +3365,1140 @@
           <a:noFill/>
         </p:spPr>
         <p:txBody>
+          <a:bodyPr wrap="square" lIns="0" rIns="0" tIns="0" bIns="0">
+            <a:spAutoFit/>
+          </a:bodyPr>
+          <a:lstStyle/>
+          <a:p>
+            <a:pPr>
+              <a:lnSpc>
+                <a:spcPct val="118000"/>
+              </a:lnSpc>
+              <a:spcAft>
+                <a:spcPts val="600"/>
+              </a:spcAft>
+            </a:pPr>
+            <a:r>
+              <a:rPr sz="1010" b="1">
+                <a:solidFill>
+                  <a:srgbClr val="A8451B"/>
+                </a:solidFill>
+                <a:latin typeface="Segoe UI"/>
+              </a:rPr>
+              <a:t>•  </a:t>
+            </a:r>
+            <a:r>
+              <a:rPr sz="1010" b="1">
+                <a:solidFill>
+                  <a:srgbClr val="101B2D"/>
+                </a:solidFill>
+                <a:latin typeface="Segoe UI"/>
+              </a:rPr>
+              <a:t>Three ways, one job. </a:t>
+            </a:r>
+            <a:r>
+              <a:rPr sz="1010" b="0">
+                <a:solidFill>
+                  <a:srgbClr val="4C5A70"/>
+                </a:solidFill>
+                <a:latin typeface="Segoe UI"/>
+              </a:rPr>
+              <a:t>Property (BOP), Auto, and Farm each built and updated their own rate filings by hand, in separate spreadsheets, with separate rules to maintain.</a:t>
+            </a:r>
+          </a:p>
+          <a:p>
+            <a:pPr>
+              <a:lnSpc>
+                <a:spcPct val="118000"/>
+              </a:lnSpc>
+              <a:spcAft>
+                <a:spcPts val="600"/>
+              </a:spcAft>
+            </a:pPr>
+            <a:r>
+              <a:rPr sz="1010" b="1">
+                <a:solidFill>
+                  <a:srgbClr val="A8451B"/>
+                </a:solidFill>
+                <a:latin typeface="Segoe UI"/>
+              </a:rPr>
+              <a:t>•  </a:t>
+            </a:r>
+            <a:r>
+              <a:rPr sz="1010" b="1">
+                <a:solidFill>
+                  <a:srgbClr val="101B2D"/>
+                </a:solidFill>
+                <a:latin typeface="Segoe UI"/>
+              </a:rPr>
+              <a:t>A hidden mistake, repeated. </a:t>
+            </a:r>
+            <a:r>
+              <a:rPr sz="1010" b="0">
+                <a:solidFill>
+                  <a:srgbClr val="4C5A70"/>
+                </a:solidFill>
+                <a:latin typeface="Segoe UI"/>
+              </a:rPr>
+              <a:t>The same data-ordering error — letting a generic, state-wide rate silently override a company’s own rate — crept into more than one system independently.</a:t>
+            </a:r>
+          </a:p>
+          <a:p>
+            <a:pPr>
+              <a:lnSpc>
+                <a:spcPct val="118000"/>
+              </a:lnSpc>
+              <a:spcAft>
+                <a:spcPts val="600"/>
+              </a:spcAft>
+            </a:pPr>
+            <a:r>
+              <a:rPr sz="1010" b="1">
+                <a:solidFill>
+                  <a:srgbClr val="A8451B"/>
+                </a:solidFill>
+                <a:latin typeface="Segoe UI"/>
+              </a:rPr>
+              <a:t>•  </a:t>
+            </a:r>
+            <a:r>
+              <a:rPr sz="1010" b="1">
+                <a:solidFill>
+                  <a:srgbClr val="101B2D"/>
+                </a:solidFill>
+                <a:latin typeface="Segoe UI"/>
+              </a:rPr>
+              <a:t>Slow, oversized output. </a:t>
+            </a:r>
+            <a:r>
+              <a:rPr sz="1010" b="0">
+                <a:solidFill>
+                  <a:srgbClr val="4C5A70"/>
+                </a:solidFill>
+                <a:latin typeface="Segoe UI"/>
+              </a:rPr>
+              <a:t>The biggest reports took several minutes to produce, and finished filings could be too large to easily share.</a:t>
+            </a:r>
+          </a:p>
+          <a:p>
+            <a:pPr>
+              <a:lnSpc>
+                <a:spcPct val="118000"/>
+              </a:lnSpc>
+              <a:spcAft>
+                <a:spcPts val="600"/>
+              </a:spcAft>
+            </a:pPr>
+            <a:r>
+              <a:rPr sz="1010" b="1">
+                <a:solidFill>
+                  <a:srgbClr val="A8451B"/>
+                </a:solidFill>
+                <a:latin typeface="Segoe UI"/>
+              </a:rPr>
+              <a:t>•  </a:t>
+            </a:r>
+            <a:r>
+              <a:rPr sz="1010" b="1">
+                <a:solidFill>
+                  <a:srgbClr val="101B2D"/>
+                </a:solidFill>
+                <a:latin typeface="Segoe UI"/>
+              </a:rPr>
+              <a:t>Every new filing type, a rebuild. </a:t>
+            </a:r>
+            <a:r>
+              <a:rPr sz="1010" b="0">
+                <a:solidFill>
+                  <a:srgbClr val="4C5A70"/>
+                </a:solidFill>
+                <a:latin typeface="Segoe UI"/>
+              </a:rPr>
+              <a:t>Adding a filing type or business line meant rewriting the process, not just updating a setting.</a:t>
+            </a:r>
+          </a:p>
+        </p:txBody>
+      </p:sp>
+      <p:sp>
+        <p:nvSpPr>
+          <p:cNvPr id="8" name="TextBox 7"/>
+          <p:cNvSpPr txBox="1"/>
+          <p:nvPr/>
+        </p:nvSpPr>
+        <p:spPr>
+          <a:xfrm>
+            <a:off x="6167628" y="1847088"/>
+            <a:ext cx="5518404" cy="1600200"/>
+          </a:xfrm>
+          <a:prstGeom prst="rect">
+            <a:avLst/>
+          </a:prstGeom>
+          <a:noFill/>
+        </p:spPr>
+        <p:txBody>
+          <a:bodyPr wrap="square" lIns="0" rIns="0" tIns="0" bIns="0">
+            <a:spAutoFit/>
+          </a:bodyPr>
+          <a:lstStyle/>
+          <a:p>
+            <a:pPr>
+              <a:lnSpc>
+                <a:spcPct val="118000"/>
+              </a:lnSpc>
+              <a:spcAft>
+                <a:spcPts val="600"/>
+              </a:spcAft>
+            </a:pPr>
+            <a:r>
+              <a:rPr sz="1010" b="1">
+                <a:solidFill>
+                  <a:srgbClr val="A8451B"/>
+                </a:solidFill>
+                <a:latin typeface="Segoe UI"/>
+              </a:rPr>
+              <a:t>•  </a:t>
+            </a:r>
+            <a:r>
+              <a:rPr sz="1010" b="1">
+                <a:solidFill>
+                  <a:srgbClr val="101B2D"/>
+                </a:solidFill>
+                <a:latin typeface="Segoe UI"/>
+              </a:rPr>
+              <a:t>One system, every line. </a:t>
+            </a:r>
+            <a:r>
+              <a:rPr sz="1010" b="0">
+                <a:solidFill>
+                  <a:srgbClr val="4C5A70"/>
+                </a:solidFill>
+                <a:latin typeface="Segoe UI"/>
+              </a:rPr>
+              <a:t>Replace manual, error-prone spreadsheet work with a single automated platform that works the same way for Property, Auto, and Farm.</a:t>
+            </a:r>
+          </a:p>
+          <a:p>
+            <a:pPr>
+              <a:lnSpc>
+                <a:spcPct val="118000"/>
+              </a:lnSpc>
+              <a:spcAft>
+                <a:spcPts val="600"/>
+              </a:spcAft>
+            </a:pPr>
+            <a:r>
+              <a:rPr sz="1010" b="1">
+                <a:solidFill>
+                  <a:srgbClr val="A8451B"/>
+                </a:solidFill>
+                <a:latin typeface="Segoe UI"/>
+              </a:rPr>
+              <a:t>•  </a:t>
+            </a:r>
+            <a:r>
+              <a:rPr sz="1010" b="1">
+                <a:solidFill>
+                  <a:srgbClr val="101B2D"/>
+                </a:solidFill>
+                <a:latin typeface="Segoe UI"/>
+              </a:rPr>
+              <a:t>Catch mistakes early. </a:t>
+            </a:r>
+            <a:r>
+              <a:rPr sz="1010" b="0">
+                <a:solidFill>
+                  <a:srgbClr val="4C5A70"/>
+                </a:solidFill>
+                <a:latin typeface="Segoe UI"/>
+              </a:rPr>
+              <a:t>Check every filing automatically, before it ever reaches a regulator.</a:t>
+            </a:r>
+          </a:p>
+          <a:p>
+            <a:pPr>
+              <a:lnSpc>
+                <a:spcPct val="118000"/>
+              </a:lnSpc>
+              <a:spcAft>
+                <a:spcPts val="600"/>
+              </a:spcAft>
+            </a:pPr>
+            <a:r>
+              <a:rPr sz="1010" b="1">
+                <a:solidFill>
+                  <a:srgbClr val="A8451B"/>
+                </a:solidFill>
+                <a:latin typeface="Segoe UI"/>
+              </a:rPr>
+              <a:t>•  </a:t>
+            </a:r>
+            <a:r>
+              <a:rPr sz="1010" b="1">
+                <a:solidFill>
+                  <a:srgbClr val="101B2D"/>
+                </a:solidFill>
+                <a:latin typeface="Segoe UI"/>
+              </a:rPr>
+              <a:t>Cut time and size. </a:t>
+            </a:r>
+            <a:r>
+              <a:rPr sz="1010" b="0">
+                <a:solidFill>
+                  <a:srgbClr val="4C5A70"/>
+                </a:solidFill>
+                <a:latin typeface="Segoe UI"/>
+              </a:rPr>
+              <a:t>Reduce how long the biggest filings take to produce, and how large the finished files are — with no loss of information.</a:t>
+            </a:r>
+          </a:p>
+          <a:p>
+            <a:pPr>
+              <a:lnSpc>
+                <a:spcPct val="118000"/>
+              </a:lnSpc>
+              <a:spcAft>
+                <a:spcPts val="600"/>
+              </a:spcAft>
+            </a:pPr>
+            <a:r>
+              <a:rPr sz="1010" b="1">
+                <a:solidFill>
+                  <a:srgbClr val="A8451B"/>
+                </a:solidFill>
+                <a:latin typeface="Segoe UI"/>
+              </a:rPr>
+              <a:t>•  </a:t>
+            </a:r>
+            <a:r>
+              <a:rPr sz="1010" b="1">
+                <a:solidFill>
+                  <a:srgbClr val="101B2D"/>
+                </a:solidFill>
+                <a:latin typeface="Segoe UI"/>
+              </a:rPr>
+              <a:t>Make growth easy. </a:t>
+            </a:r>
+            <a:r>
+              <a:rPr sz="1010" b="0">
+                <a:solidFill>
+                  <a:srgbClr val="4C5A70"/>
+                </a:solidFill>
+                <a:latin typeface="Segoe UI"/>
+              </a:rPr>
+              <a:t>Let the next filing type or business line be added as a configuration change, not a rebuild.</a:t>
+            </a:r>
+          </a:p>
+        </p:txBody>
+      </p:sp>
+      <p:sp>
+        <p:nvSpPr>
+          <p:cNvPr id="9" name="Rectangle 8"/>
+          <p:cNvSpPr/>
+          <p:nvPr/>
+        </p:nvSpPr>
+        <p:spPr>
+          <a:xfrm>
+            <a:off x="502920" y="3602736"/>
+            <a:ext cx="11183112" cy="292608"/>
+          </a:xfrm>
+          <a:prstGeom prst="rect">
+            <a:avLst/>
+          </a:prstGeom>
+          <a:solidFill>
+            <a:srgbClr val="101B2D"/>
+          </a:solidFill>
+          <a:ln>
+            <a:noFill/>
+          </a:ln>
+          <a:effectLst/>
+        </p:spPr>
+        <p:style>
+          <a:lnRef idx="1">
+            <a:schemeClr val="accent1"/>
+          </a:lnRef>
+          <a:fillRef idx="3">
+            <a:schemeClr val="accent1"/>
+          </a:fillRef>
+          <a:effectRef idx="2">
+            <a:schemeClr val="accent1"/>
+          </a:effectRef>
+          <a:fontRef idx="minor">
+            <a:schemeClr val="lt1"/>
+          </a:fontRef>
+        </p:style>
+        <p:txBody>
+          <a:bodyPr rtlCol="0" anchor="ctr" lIns="128016" tIns="0" bIns="0"/>
+          <a:lstStyle/>
+          <a:p>
+            <a:pPr algn="ctr"/>
+            <a:r>
+              <a:rPr sz="1250" b="1">
+                <a:solidFill>
+                  <a:srgbClr val="F2F5FA"/>
+                </a:solidFill>
+                <a:latin typeface="Segoe UI"/>
+              </a:rPr>
+              <a:t>SOLUTION DESIGN  —  THE PROCESS, EVERY TIME</a:t>
+            </a:r>
+          </a:p>
+        </p:txBody>
+      </p:sp>
+      <p:sp>
+        <p:nvSpPr>
+          <p:cNvPr id="10" name="Rounded Rectangle 9"/>
+          <p:cNvSpPr/>
+          <p:nvPr/>
+        </p:nvSpPr>
+        <p:spPr>
+          <a:xfrm>
+            <a:off x="502920" y="3931920"/>
+            <a:ext cx="11183112" cy="2450592"/>
+          </a:xfrm>
+          <a:prstGeom prst="roundRect">
+            <a:avLst>
+              <a:gd name="adj" fmla="val 3500"/>
+            </a:avLst>
+          </a:prstGeom>
+          <a:solidFill>
+            <a:srgbClr val="FFFFFF"/>
+          </a:solidFill>
+          <a:ln w="15875">
+            <a:solidFill>
+              <a:srgbClr val="D8DFE9"/>
+            </a:solidFill>
+            <a:prstDash val="dash"/>
+          </a:ln>
+          <a:effectLst/>
+        </p:spPr>
+        <p:style>
+          <a:lnRef idx="1">
+            <a:schemeClr val="accent1"/>
+          </a:lnRef>
+          <a:fillRef idx="3">
+            <a:schemeClr val="accent1"/>
+          </a:fillRef>
+          <a:effectRef idx="2">
+            <a:schemeClr val="accent1"/>
+          </a:effectRef>
+          <a:fontRef idx="minor">
+            <a:schemeClr val="lt1"/>
+          </a:fontRef>
+        </p:style>
+        <p:txBody>
+          <a:bodyPr rtlCol="0" anchor="ctr"/>
+          <a:lstStyle/>
+          <a:p>
+            <a:pPr algn="ctr"/>
+          </a:p>
+        </p:txBody>
+      </p:sp>
+      <p:sp>
+        <p:nvSpPr>
+          <p:cNvPr id="11" name="Oval 10"/>
+          <p:cNvSpPr/>
+          <p:nvPr/>
+        </p:nvSpPr>
+        <p:spPr>
+          <a:xfrm>
+            <a:off x="800100" y="4206240"/>
+            <a:ext cx="420624" cy="420624"/>
+          </a:xfrm>
+          <a:prstGeom prst="ellipse">
+            <a:avLst/>
+          </a:prstGeom>
+          <a:solidFill>
+            <a:srgbClr val="101B2D"/>
+          </a:solidFill>
+          <a:ln>
+            <a:noFill/>
+          </a:ln>
+          <a:effectLst/>
+        </p:spPr>
+        <p:style>
+          <a:lnRef idx="1">
+            <a:schemeClr val="accent1"/>
+          </a:lnRef>
+          <a:fillRef idx="3">
+            <a:schemeClr val="accent1"/>
+          </a:fillRef>
+          <a:effectRef idx="2">
+            <a:schemeClr val="accent1"/>
+          </a:effectRef>
+          <a:fontRef idx="minor">
+            <a:schemeClr val="lt1"/>
+          </a:fontRef>
+        </p:style>
+        <p:txBody>
+          <a:bodyPr rtlCol="0" anchor="ctr" lIns="0" rIns="0" tIns="0" bIns="0"/>
+          <a:lstStyle/>
+          <a:p>
+            <a:pPr algn="ctr"/>
+            <a:r>
+              <a:rPr sz="1500" b="1">
+                <a:solidFill>
+                  <a:srgbClr val="F3E2D3"/>
+                </a:solidFill>
+                <a:latin typeface="Consolas"/>
+              </a:rPr>
+              <a:t>1</a:t>
+            </a:r>
+          </a:p>
+        </p:txBody>
+      </p:sp>
+      <p:sp>
+        <p:nvSpPr>
+          <p:cNvPr id="12" name="TextBox 11"/>
+          <p:cNvSpPr txBox="1"/>
+          <p:nvPr/>
+        </p:nvSpPr>
+        <p:spPr>
+          <a:xfrm>
+            <a:off x="800100" y="4754880"/>
+            <a:ext cx="2331720" cy="292608"/>
+          </a:xfrm>
+          <a:prstGeom prst="rect">
+            <a:avLst/>
+          </a:prstGeom>
+          <a:noFill/>
+        </p:spPr>
+        <p:txBody>
           <a:bodyPr wrap="none" anchor="t" lIns="0" rIns="0" tIns="0" bIns="0">
+            <a:spAutoFit/>
+          </a:bodyPr>
+          <a:lstStyle/>
+          <a:p>
+            <a:pPr algn="l">
+              <a:lnSpc>
+                <a:spcPct val="105000"/>
+              </a:lnSpc>
+              <a:spcAft>
+                <a:spcPts val="0"/>
+              </a:spcAft>
+            </a:pPr>
+            <a:r>
+              <a:rPr sz="1200" b="1" i="0">
+                <a:solidFill>
+                  <a:srgbClr val="101B2D"/>
+                </a:solidFill>
+                <a:latin typeface="Segoe UI"/>
+              </a:rPr>
+              <a:t>Gather the data</a:t>
+            </a:r>
+          </a:p>
+        </p:txBody>
+      </p:sp>
+      <p:sp>
+        <p:nvSpPr>
+          <p:cNvPr id="13" name="TextBox 12"/>
+          <p:cNvSpPr txBox="1"/>
+          <p:nvPr/>
+        </p:nvSpPr>
+        <p:spPr>
+          <a:xfrm>
+            <a:off x="800100" y="5065776"/>
+            <a:ext cx="2331720" cy="1051560"/>
+          </a:xfrm>
+          <a:prstGeom prst="rect">
+            <a:avLst/>
+          </a:prstGeom>
+          <a:noFill/>
+        </p:spPr>
+        <p:txBody>
+          <a:bodyPr wrap="square" anchor="t" lIns="0" rIns="0" tIns="0" bIns="0">
+            <a:spAutoFit/>
+          </a:bodyPr>
+          <a:lstStyle/>
+          <a:p>
+            <a:pPr algn="l">
+              <a:lnSpc>
+                <a:spcPct val="124000"/>
+              </a:lnSpc>
+              <a:spcAft>
+                <a:spcPts val="0"/>
+              </a:spcAft>
+            </a:pPr>
+            <a:r>
+              <a:rPr sz="980" b="0" i="0">
+                <a:solidFill>
+                  <a:srgbClr val="4C5A70"/>
+                </a:solidFill>
+                <a:latin typeface="Segoe UI"/>
+              </a:rPr>
+              <a:t>Pulls together every underwriting company's rates for a state, in the right order of priority, automatically.</a:t>
+            </a:r>
+          </a:p>
+        </p:txBody>
+      </p:sp>
+      <p:sp>
+        <p:nvSpPr>
+          <p:cNvPr id="14" name="Right Arrow 13"/>
+          <p:cNvSpPr/>
+          <p:nvPr/>
+        </p:nvSpPr>
+        <p:spPr>
+          <a:xfrm>
+            <a:off x="3131820" y="4297680"/>
+            <a:ext cx="420624" cy="237744"/>
+          </a:xfrm>
+          <a:prstGeom prst="rightArrow">
+            <a:avLst>
+              <a:gd name="adj1" fmla="val 60000"/>
+              <a:gd name="adj2" fmla="val 55000"/>
+            </a:avLst>
+          </a:prstGeom>
+          <a:solidFill>
+            <a:srgbClr val="D8DFE9"/>
+          </a:solidFill>
+          <a:ln>
+            <a:noFill/>
+          </a:ln>
+          <a:effectLst/>
+        </p:spPr>
+        <p:style>
+          <a:lnRef idx="1">
+            <a:schemeClr val="accent1"/>
+          </a:lnRef>
+          <a:fillRef idx="3">
+            <a:schemeClr val="accent1"/>
+          </a:fillRef>
+          <a:effectRef idx="2">
+            <a:schemeClr val="accent1"/>
+          </a:effectRef>
+          <a:fontRef idx="minor">
+            <a:schemeClr val="lt1"/>
+          </a:fontRef>
+        </p:style>
+        <p:txBody>
+          <a:bodyPr rtlCol="0" anchor="ctr"/>
+          <a:lstStyle/>
+          <a:p>
+            <a:pPr algn="ctr"/>
+          </a:p>
+        </p:txBody>
+      </p:sp>
+      <p:sp>
+        <p:nvSpPr>
+          <p:cNvPr id="15" name="Oval 14"/>
+          <p:cNvSpPr/>
+          <p:nvPr/>
+        </p:nvSpPr>
+        <p:spPr>
+          <a:xfrm>
+            <a:off x="3552444" y="4206240"/>
+            <a:ext cx="420624" cy="420624"/>
+          </a:xfrm>
+          <a:prstGeom prst="ellipse">
+            <a:avLst/>
+          </a:prstGeom>
+          <a:solidFill>
+            <a:srgbClr val="101B2D"/>
+          </a:solidFill>
+          <a:ln>
+            <a:noFill/>
+          </a:ln>
+          <a:effectLst/>
+        </p:spPr>
+        <p:style>
+          <a:lnRef idx="1">
+            <a:schemeClr val="accent1"/>
+          </a:lnRef>
+          <a:fillRef idx="3">
+            <a:schemeClr val="accent1"/>
+          </a:fillRef>
+          <a:effectRef idx="2">
+            <a:schemeClr val="accent1"/>
+          </a:effectRef>
+          <a:fontRef idx="minor">
+            <a:schemeClr val="lt1"/>
+          </a:fontRef>
+        </p:style>
+        <p:txBody>
+          <a:bodyPr rtlCol="0" anchor="ctr" lIns="0" rIns="0" tIns="0" bIns="0"/>
+          <a:lstStyle/>
+          <a:p>
+            <a:pPr algn="ctr"/>
+            <a:r>
+              <a:rPr sz="1500" b="1">
+                <a:solidFill>
+                  <a:srgbClr val="F3E2D3"/>
+                </a:solidFill>
+                <a:latin typeface="Consolas"/>
+              </a:rPr>
+              <a:t>2</a:t>
+            </a:r>
+          </a:p>
+        </p:txBody>
+      </p:sp>
+      <p:sp>
+        <p:nvSpPr>
+          <p:cNvPr id="16" name="TextBox 15"/>
+          <p:cNvSpPr txBox="1"/>
+          <p:nvPr/>
+        </p:nvSpPr>
+        <p:spPr>
+          <a:xfrm>
+            <a:off x="3552444" y="4754880"/>
+            <a:ext cx="2331720" cy="292608"/>
+          </a:xfrm>
+          <a:prstGeom prst="rect">
+            <a:avLst/>
+          </a:prstGeom>
+          <a:noFill/>
+        </p:spPr>
+        <p:txBody>
+          <a:bodyPr wrap="none" anchor="t" lIns="0" rIns="0" tIns="0" bIns="0">
+            <a:spAutoFit/>
+          </a:bodyPr>
+          <a:lstStyle/>
+          <a:p>
+            <a:pPr algn="l">
+              <a:lnSpc>
+                <a:spcPct val="105000"/>
+              </a:lnSpc>
+              <a:spcAft>
+                <a:spcPts val="0"/>
+              </a:spcAft>
+            </a:pPr>
+            <a:r>
+              <a:rPr sz="1200" b="1" i="0">
+                <a:solidFill>
+                  <a:srgbClr val="101B2D"/>
+                </a:solidFill>
+                <a:latin typeface="Segoe UI"/>
+              </a:rPr>
+              <a:t>Build the filing</a:t>
+            </a:r>
+          </a:p>
+        </p:txBody>
+      </p:sp>
+      <p:sp>
+        <p:nvSpPr>
+          <p:cNvPr id="17" name="TextBox 16"/>
+          <p:cNvSpPr txBox="1"/>
+          <p:nvPr/>
+        </p:nvSpPr>
+        <p:spPr>
+          <a:xfrm>
+            <a:off x="3552444" y="5065776"/>
+            <a:ext cx="2331720" cy="1051560"/>
+          </a:xfrm>
+          <a:prstGeom prst="rect">
+            <a:avLst/>
+          </a:prstGeom>
+          <a:noFill/>
+        </p:spPr>
+        <p:txBody>
+          <a:bodyPr wrap="square" anchor="t" lIns="0" rIns="0" tIns="0" bIns="0">
+            <a:spAutoFit/>
+          </a:bodyPr>
+          <a:lstStyle/>
+          <a:p>
+            <a:pPr algn="l">
+              <a:lnSpc>
+                <a:spcPct val="124000"/>
+              </a:lnSpc>
+              <a:spcAft>
+                <a:spcPts val="0"/>
+              </a:spcAft>
+            </a:pPr>
+            <a:r>
+              <a:rPr sz="980" b="0" i="0">
+                <a:solidFill>
+                  <a:srgbClr val="4C5A70"/>
+                </a:solidFill>
+                <a:latin typeface="Segoe UI"/>
+              </a:rPr>
+              <a:t>Formats it the way it needs to look, using one shared set of rules instead of separate code per business line.</a:t>
+            </a:r>
+          </a:p>
+        </p:txBody>
+      </p:sp>
+      <p:sp>
+        <p:nvSpPr>
+          <p:cNvPr id="18" name="Right Arrow 17"/>
+          <p:cNvSpPr/>
+          <p:nvPr/>
+        </p:nvSpPr>
+        <p:spPr>
+          <a:xfrm>
+            <a:off x="5884164" y="4297680"/>
+            <a:ext cx="420624" cy="237744"/>
+          </a:xfrm>
+          <a:prstGeom prst="rightArrow">
+            <a:avLst>
+              <a:gd name="adj1" fmla="val 60000"/>
+              <a:gd name="adj2" fmla="val 55000"/>
+            </a:avLst>
+          </a:prstGeom>
+          <a:solidFill>
+            <a:srgbClr val="D8DFE9"/>
+          </a:solidFill>
+          <a:ln>
+            <a:noFill/>
+          </a:ln>
+          <a:effectLst/>
+        </p:spPr>
+        <p:style>
+          <a:lnRef idx="1">
+            <a:schemeClr val="accent1"/>
+          </a:lnRef>
+          <a:fillRef idx="3">
+            <a:schemeClr val="accent1"/>
+          </a:fillRef>
+          <a:effectRef idx="2">
+            <a:schemeClr val="accent1"/>
+          </a:effectRef>
+          <a:fontRef idx="minor">
+            <a:schemeClr val="lt1"/>
+          </a:fontRef>
+        </p:style>
+        <p:txBody>
+          <a:bodyPr rtlCol="0" anchor="ctr"/>
+          <a:lstStyle/>
+          <a:p>
+            <a:pPr algn="ctr"/>
+          </a:p>
+        </p:txBody>
+      </p:sp>
+      <p:sp>
+        <p:nvSpPr>
+          <p:cNvPr id="19" name="Oval 18"/>
+          <p:cNvSpPr/>
+          <p:nvPr/>
+        </p:nvSpPr>
+        <p:spPr>
+          <a:xfrm>
+            <a:off x="6304788" y="4206240"/>
+            <a:ext cx="420624" cy="420624"/>
+          </a:xfrm>
+          <a:prstGeom prst="ellipse">
+            <a:avLst/>
+          </a:prstGeom>
+          <a:solidFill>
+            <a:srgbClr val="101B2D"/>
+          </a:solidFill>
+          <a:ln>
+            <a:noFill/>
+          </a:ln>
+          <a:effectLst/>
+        </p:spPr>
+        <p:style>
+          <a:lnRef idx="1">
+            <a:schemeClr val="accent1"/>
+          </a:lnRef>
+          <a:fillRef idx="3">
+            <a:schemeClr val="accent1"/>
+          </a:fillRef>
+          <a:effectRef idx="2">
+            <a:schemeClr val="accent1"/>
+          </a:effectRef>
+          <a:fontRef idx="minor">
+            <a:schemeClr val="lt1"/>
+          </a:fontRef>
+        </p:style>
+        <p:txBody>
+          <a:bodyPr rtlCol="0" anchor="ctr" lIns="0" rIns="0" tIns="0" bIns="0"/>
+          <a:lstStyle/>
+          <a:p>
+            <a:pPr algn="ctr"/>
+            <a:r>
+              <a:rPr sz="1500" b="1">
+                <a:solidFill>
+                  <a:srgbClr val="F3E2D3"/>
+                </a:solidFill>
+                <a:latin typeface="Consolas"/>
+              </a:rPr>
+              <a:t>3</a:t>
+            </a:r>
+          </a:p>
+        </p:txBody>
+      </p:sp>
+      <p:sp>
+        <p:nvSpPr>
+          <p:cNvPr id="20" name="TextBox 19"/>
+          <p:cNvSpPr txBox="1"/>
+          <p:nvPr/>
+        </p:nvSpPr>
+        <p:spPr>
+          <a:xfrm>
+            <a:off x="6304788" y="4754880"/>
+            <a:ext cx="2331720" cy="292608"/>
+          </a:xfrm>
+          <a:prstGeom prst="rect">
+            <a:avLst/>
+          </a:prstGeom>
+          <a:noFill/>
+        </p:spPr>
+        <p:txBody>
+          <a:bodyPr wrap="none" anchor="t" lIns="0" rIns="0" tIns="0" bIns="0">
+            <a:spAutoFit/>
+          </a:bodyPr>
+          <a:lstStyle/>
+          <a:p>
+            <a:pPr algn="l">
+              <a:lnSpc>
+                <a:spcPct val="105000"/>
+              </a:lnSpc>
+              <a:spcAft>
+                <a:spcPts val="0"/>
+              </a:spcAft>
+            </a:pPr>
+            <a:r>
+              <a:rPr sz="1200" b="1" i="0">
+                <a:solidFill>
+                  <a:srgbClr val="101B2D"/>
+                </a:solidFill>
+                <a:latin typeface="Segoe UI"/>
+              </a:rPr>
+              <a:t>Lay out the pages</a:t>
+            </a:r>
+          </a:p>
+        </p:txBody>
+      </p:sp>
+      <p:sp>
+        <p:nvSpPr>
+          <p:cNvPr id="21" name="TextBox 20"/>
+          <p:cNvSpPr txBox="1"/>
+          <p:nvPr/>
+        </p:nvSpPr>
+        <p:spPr>
+          <a:xfrm>
+            <a:off x="6304788" y="5065776"/>
+            <a:ext cx="2331720" cy="1051560"/>
+          </a:xfrm>
+          <a:prstGeom prst="rect">
+            <a:avLst/>
+          </a:prstGeom>
+          <a:noFill/>
+        </p:spPr>
+        <p:txBody>
+          <a:bodyPr wrap="square" anchor="t" lIns="0" rIns="0" tIns="0" bIns="0">
+            <a:spAutoFit/>
+          </a:bodyPr>
+          <a:lstStyle/>
+          <a:p>
+            <a:pPr algn="l">
+              <a:lnSpc>
+                <a:spcPct val="124000"/>
+              </a:lnSpc>
+              <a:spcAft>
+                <a:spcPts val="0"/>
+              </a:spcAft>
+            </a:pPr>
+            <a:r>
+              <a:rPr sz="980" b="0" i="0">
+                <a:solidFill>
+                  <a:srgbClr val="4C5A70"/>
+                </a:solidFill>
+                <a:latin typeface="Segoe UI"/>
+              </a:rPr>
+              <a:t>Automatically decides where each page breaks so the filing prints and reads correctly — no manual adjustment.</a:t>
+            </a:r>
+          </a:p>
+        </p:txBody>
+      </p:sp>
+      <p:sp>
+        <p:nvSpPr>
+          <p:cNvPr id="22" name="Right Arrow 21"/>
+          <p:cNvSpPr/>
+          <p:nvPr/>
+        </p:nvSpPr>
+        <p:spPr>
+          <a:xfrm>
+            <a:off x="8636508" y="4297680"/>
+            <a:ext cx="420624" cy="237744"/>
+          </a:xfrm>
+          <a:prstGeom prst="rightArrow">
+            <a:avLst>
+              <a:gd name="adj1" fmla="val 60000"/>
+              <a:gd name="adj2" fmla="val 55000"/>
+            </a:avLst>
+          </a:prstGeom>
+          <a:solidFill>
+            <a:srgbClr val="D8DFE9"/>
+          </a:solidFill>
+          <a:ln>
+            <a:noFill/>
+          </a:ln>
+          <a:effectLst/>
+        </p:spPr>
+        <p:style>
+          <a:lnRef idx="1">
+            <a:schemeClr val="accent1"/>
+          </a:lnRef>
+          <a:fillRef idx="3">
+            <a:schemeClr val="accent1"/>
+          </a:fillRef>
+          <a:effectRef idx="2">
+            <a:schemeClr val="accent1"/>
+          </a:effectRef>
+          <a:fontRef idx="minor">
+            <a:schemeClr val="lt1"/>
+          </a:fontRef>
+        </p:style>
+        <p:txBody>
+          <a:bodyPr rtlCol="0" anchor="ctr"/>
+          <a:lstStyle/>
+          <a:p>
+            <a:pPr algn="ctr"/>
+          </a:p>
+        </p:txBody>
+      </p:sp>
+      <p:sp>
+        <p:nvSpPr>
+          <p:cNvPr id="23" name="Oval 22"/>
+          <p:cNvSpPr/>
+          <p:nvPr/>
+        </p:nvSpPr>
+        <p:spPr>
+          <a:xfrm>
+            <a:off x="9057132" y="4206240"/>
+            <a:ext cx="420624" cy="420624"/>
+          </a:xfrm>
+          <a:prstGeom prst="ellipse">
+            <a:avLst/>
+          </a:prstGeom>
+          <a:solidFill>
+            <a:srgbClr val="101B2D"/>
+          </a:solidFill>
+          <a:ln>
+            <a:noFill/>
+          </a:ln>
+          <a:effectLst/>
+        </p:spPr>
+        <p:style>
+          <a:lnRef idx="1">
+            <a:schemeClr val="accent1"/>
+          </a:lnRef>
+          <a:fillRef idx="3">
+            <a:schemeClr val="accent1"/>
+          </a:fillRef>
+          <a:effectRef idx="2">
+            <a:schemeClr val="accent1"/>
+          </a:effectRef>
+          <a:fontRef idx="minor">
+            <a:schemeClr val="lt1"/>
+          </a:fontRef>
+        </p:style>
+        <p:txBody>
+          <a:bodyPr rtlCol="0" anchor="ctr" lIns="0" rIns="0" tIns="0" bIns="0"/>
+          <a:lstStyle/>
+          <a:p>
+            <a:pPr algn="ctr"/>
+            <a:r>
+              <a:rPr sz="1500" b="1">
+                <a:solidFill>
+                  <a:srgbClr val="F3E2D3"/>
+                </a:solidFill>
+                <a:latin typeface="Consolas"/>
+              </a:rPr>
+              <a:t>4</a:t>
+            </a:r>
+          </a:p>
+        </p:txBody>
+      </p:sp>
+      <p:sp>
+        <p:nvSpPr>
+          <p:cNvPr id="24" name="TextBox 23"/>
+          <p:cNvSpPr txBox="1"/>
+          <p:nvPr/>
+        </p:nvSpPr>
+        <p:spPr>
+          <a:xfrm>
+            <a:off x="9057132" y="4754880"/>
+            <a:ext cx="2331720" cy="292608"/>
+          </a:xfrm>
+          <a:prstGeom prst="rect">
+            <a:avLst/>
+          </a:prstGeom>
+          <a:noFill/>
+        </p:spPr>
+        <p:txBody>
+          <a:bodyPr wrap="none" anchor="t" lIns="0" rIns="0" tIns="0" bIns="0">
+            <a:spAutoFit/>
+          </a:bodyPr>
+          <a:lstStyle/>
+          <a:p>
+            <a:pPr algn="l">
+              <a:lnSpc>
+                <a:spcPct val="105000"/>
+              </a:lnSpc>
+              <a:spcAft>
+                <a:spcPts val="0"/>
+              </a:spcAft>
+            </a:pPr>
+            <a:r>
+              <a:rPr sz="1200" b="1" i="0">
+                <a:solidFill>
+                  <a:srgbClr val="101B2D"/>
+                </a:solidFill>
+                <a:latin typeface="Segoe UI"/>
+              </a:rPr>
+              <a:t>Check it, send it</a:t>
+            </a:r>
+          </a:p>
+        </p:txBody>
+      </p:sp>
+      <p:sp>
+        <p:nvSpPr>
+          <p:cNvPr id="25" name="TextBox 24"/>
+          <p:cNvSpPr txBox="1"/>
+          <p:nvPr/>
+        </p:nvSpPr>
+        <p:spPr>
+          <a:xfrm>
+            <a:off x="9057132" y="5065776"/>
+            <a:ext cx="2331720" cy="1051560"/>
+          </a:xfrm>
+          <a:prstGeom prst="rect">
+            <a:avLst/>
+          </a:prstGeom>
+          <a:noFill/>
+        </p:spPr>
+        <p:txBody>
+          <a:bodyPr wrap="square" anchor="t" lIns="0" rIns="0" tIns="0" bIns="0">
+            <a:spAutoFit/>
+          </a:bodyPr>
+          <a:lstStyle/>
+          <a:p>
+            <a:pPr algn="l">
+              <a:lnSpc>
+                <a:spcPct val="124000"/>
+              </a:lnSpc>
+              <a:spcAft>
+                <a:spcPts val="0"/>
+              </a:spcAft>
+            </a:pPr>
+            <a:r>
+              <a:rPr sz="980" b="0" i="0">
+                <a:solidFill>
+                  <a:srgbClr val="4C5A70"/>
+                </a:solidFill>
+                <a:latin typeface="Segoe UI"/>
+              </a:rPr>
+              <a:t>Compares the finished filing to the last approved version, flags anything that changed, then produces the final PDF.</a:t>
+            </a:r>
+          </a:p>
+        </p:txBody>
+      </p:sp>
+      <p:sp>
+        <p:nvSpPr>
+          <p:cNvPr id="26" name="TextBox 25"/>
+          <p:cNvSpPr txBox="1"/>
+          <p:nvPr/>
+        </p:nvSpPr>
+        <p:spPr>
+          <a:xfrm>
+            <a:off x="502920" y="6528816"/>
+            <a:ext cx="7315200" cy="256032"/>
+          </a:xfrm>
+          <a:prstGeom prst="rect">
+            <a:avLst/>
+          </a:prstGeom>
+          <a:noFill/>
+        </p:spPr>
+        <p:txBody>
+          <a:bodyPr wrap="square" anchor="t" lIns="0" rIns="0" tIns="0" bIns="0">
             <a:spAutoFit/>
           </a:bodyPr>
           <a:lstStyle/>
@@ -3373,928 +4512,13 @@
               </a:spcAft>
             </a:pPr>
             <a:r>
-              <a:rPr sz="2000" b="1" i="0">
-                <a:solidFill>
-                  <a:srgbClr val="A8451B"/>
+              <a:rPr sz="900" b="0" i="0">
+                <a:solidFill>
+                  <a:srgbClr val="6B7A90"/>
                 </a:solidFill>
                 <a:latin typeface="Consolas"/>
               </a:rPr>
-              <a:t>~6× Faster</a:t>
-            </a:r>
-          </a:p>
-        </p:txBody>
-      </p:sp>
-      <p:sp>
-        <p:nvSpPr>
-          <p:cNvPr id="8" name="TextBox 7"/>
-          <p:cNvSpPr txBox="1"/>
-          <p:nvPr/>
-        </p:nvSpPr>
-        <p:spPr>
-          <a:xfrm>
-            <a:off x="649224" y="2651759"/>
-            <a:ext cx="2377440" cy="658368"/>
-          </a:xfrm>
-          <a:prstGeom prst="rect">
-            <a:avLst/>
-          </a:prstGeom>
-          <a:noFill/>
-        </p:spPr>
-        <p:txBody>
-          <a:bodyPr wrap="square" anchor="t" lIns="0" rIns="0" tIns="0" bIns="0">
-            <a:spAutoFit/>
-          </a:bodyPr>
-          <a:lstStyle/>
-          <a:p>
-            <a:pPr algn="l">
-              <a:lnSpc>
-                <a:spcPct val="118000"/>
-              </a:lnSpc>
-              <a:spcAft>
-                <a:spcPts val="0"/>
-              </a:spcAft>
-            </a:pPr>
-            <a:r>
-              <a:rPr sz="1050" b="0" i="0">
-                <a:solidFill>
-                  <a:srgbClr val="4C5A70"/>
-                </a:solidFill>
-                <a:latin typeface="Segoe UI"/>
-              </a:rPr>
-              <a:t>Our biggest reports used to take minutes</a:t>
-            </a:r>
-          </a:p>
-          <a:p>
-            <a:pPr algn="l">
-              <a:lnSpc>
-                <a:spcPct val="118000"/>
-              </a:lnSpc>
-              <a:spcAft>
-                <a:spcPts val="0"/>
-              </a:spcAft>
-            </a:pPr>
-            <a:r>
-              <a:rPr sz="1050" b="0" i="0">
-                <a:solidFill>
-                  <a:srgbClr val="4C5A70"/>
-                </a:solidFill>
-                <a:latin typeface="Segoe UI"/>
-              </a:rPr>
-              <a:t>to produce. They now finish in seconds.</a:t>
-            </a:r>
-          </a:p>
-        </p:txBody>
-      </p:sp>
-      <p:sp>
-        <p:nvSpPr>
-          <p:cNvPr id="9" name="Rounded Rectangle 8"/>
-          <p:cNvSpPr/>
-          <p:nvPr/>
-        </p:nvSpPr>
-        <p:spPr>
-          <a:xfrm>
-            <a:off x="3296412" y="2084831"/>
-            <a:ext cx="2670048" cy="1298448"/>
-          </a:xfrm>
-          <a:prstGeom prst="roundRect">
-            <a:avLst>
-              <a:gd name="adj" fmla="val 7000"/>
-            </a:avLst>
-          </a:prstGeom>
-          <a:solidFill>
-            <a:srgbClr val="FFFFFF"/>
-          </a:solidFill>
-          <a:ln w="12700">
-            <a:solidFill>
-              <a:srgbClr val="D8DFE9"/>
-            </a:solidFill>
-          </a:ln>
-          <a:effectLst/>
-        </p:spPr>
-        <p:style>
-          <a:lnRef idx="1">
-            <a:schemeClr val="accent1"/>
-          </a:lnRef>
-          <a:fillRef idx="3">
-            <a:schemeClr val="accent1"/>
-          </a:fillRef>
-          <a:effectRef idx="2">
-            <a:schemeClr val="accent1"/>
-          </a:effectRef>
-          <a:fontRef idx="minor">
-            <a:schemeClr val="lt1"/>
-          </a:fontRef>
-        </p:style>
-        <p:txBody>
-          <a:bodyPr rtlCol="0" anchor="ctr"/>
-          <a:lstStyle/>
-          <a:p>
-            <a:pPr algn="ctr"/>
-          </a:p>
-        </p:txBody>
-      </p:sp>
-      <p:sp>
-        <p:nvSpPr>
-          <p:cNvPr id="10" name="TextBox 9"/>
-          <p:cNvSpPr txBox="1"/>
-          <p:nvPr/>
-        </p:nvSpPr>
-        <p:spPr>
-          <a:xfrm>
-            <a:off x="3442716" y="2212847"/>
-            <a:ext cx="2377440" cy="329184"/>
-          </a:xfrm>
-          <a:prstGeom prst="rect">
-            <a:avLst/>
-          </a:prstGeom>
-          <a:noFill/>
-        </p:spPr>
-        <p:txBody>
-          <a:bodyPr wrap="none" anchor="t" lIns="0" rIns="0" tIns="0" bIns="0">
-            <a:spAutoFit/>
-          </a:bodyPr>
-          <a:lstStyle/>
-          <a:p>
-            <a:pPr algn="l">
-              <a:lnSpc>
-                <a:spcPct val="100000"/>
-              </a:lnSpc>
-              <a:spcAft>
-                <a:spcPts val="0"/>
-              </a:spcAft>
-            </a:pPr>
-            <a:r>
-              <a:rPr sz="2000" b="1" i="0">
-                <a:solidFill>
-                  <a:srgbClr val="A8451B"/>
-                </a:solidFill>
-                <a:latin typeface="Consolas"/>
-              </a:rPr>
-              <a:t>~80% Smaller</a:t>
-            </a:r>
-          </a:p>
-        </p:txBody>
-      </p:sp>
-      <p:sp>
-        <p:nvSpPr>
-          <p:cNvPr id="11" name="TextBox 10"/>
-          <p:cNvSpPr txBox="1"/>
-          <p:nvPr/>
-        </p:nvSpPr>
-        <p:spPr>
-          <a:xfrm>
-            <a:off x="3442716" y="2651759"/>
-            <a:ext cx="2377440" cy="658368"/>
-          </a:xfrm>
-          <a:prstGeom prst="rect">
-            <a:avLst/>
-          </a:prstGeom>
-          <a:noFill/>
-        </p:spPr>
-        <p:txBody>
-          <a:bodyPr wrap="square" anchor="t" lIns="0" rIns="0" tIns="0" bIns="0">
-            <a:spAutoFit/>
-          </a:bodyPr>
-          <a:lstStyle/>
-          <a:p>
-            <a:pPr algn="l">
-              <a:lnSpc>
-                <a:spcPct val="118000"/>
-              </a:lnSpc>
-              <a:spcAft>
-                <a:spcPts val="0"/>
-              </a:spcAft>
-            </a:pPr>
-            <a:r>
-              <a:rPr sz="1050" b="0" i="0">
-                <a:solidFill>
-                  <a:srgbClr val="4C5A70"/>
-                </a:solidFill>
-                <a:latin typeface="Segoe UI"/>
-              </a:rPr>
-              <a:t>Filing documents are now far easier to</a:t>
-            </a:r>
-          </a:p>
-          <a:p>
-            <a:pPr algn="l">
-              <a:lnSpc>
-                <a:spcPct val="118000"/>
-              </a:lnSpc>
-              <a:spcAft>
-                <a:spcPts val="0"/>
-              </a:spcAft>
-            </a:pPr>
-            <a:r>
-              <a:rPr sz="1050" b="0" i="0">
-                <a:solidFill>
-                  <a:srgbClr val="4C5A70"/>
-                </a:solidFill>
-                <a:latin typeface="Segoe UI"/>
-              </a:rPr>
-              <a:t>submit, store, and review.</a:t>
-            </a:r>
-          </a:p>
-        </p:txBody>
-      </p:sp>
-      <p:sp>
-        <p:nvSpPr>
-          <p:cNvPr id="12" name="Rounded Rectangle 11"/>
-          <p:cNvSpPr/>
-          <p:nvPr/>
-        </p:nvSpPr>
-        <p:spPr>
-          <a:xfrm>
-            <a:off x="6089904" y="2084831"/>
-            <a:ext cx="2670048" cy="1298448"/>
-          </a:xfrm>
-          <a:prstGeom prst="roundRect">
-            <a:avLst>
-              <a:gd name="adj" fmla="val 7000"/>
-            </a:avLst>
-          </a:prstGeom>
-          <a:solidFill>
-            <a:srgbClr val="FFFFFF"/>
-          </a:solidFill>
-          <a:ln w="12700">
-            <a:solidFill>
-              <a:srgbClr val="D8DFE9"/>
-            </a:solidFill>
-          </a:ln>
-          <a:effectLst/>
-        </p:spPr>
-        <p:style>
-          <a:lnRef idx="1">
-            <a:schemeClr val="accent1"/>
-          </a:lnRef>
-          <a:fillRef idx="3">
-            <a:schemeClr val="accent1"/>
-          </a:fillRef>
-          <a:effectRef idx="2">
-            <a:schemeClr val="accent1"/>
-          </a:effectRef>
-          <a:fontRef idx="minor">
-            <a:schemeClr val="lt1"/>
-          </a:fontRef>
-        </p:style>
-        <p:txBody>
-          <a:bodyPr rtlCol="0" anchor="ctr"/>
-          <a:lstStyle/>
-          <a:p>
-            <a:pPr algn="ctr"/>
-          </a:p>
-        </p:txBody>
-      </p:sp>
-      <p:sp>
-        <p:nvSpPr>
-          <p:cNvPr id="13" name="TextBox 12"/>
-          <p:cNvSpPr txBox="1"/>
-          <p:nvPr/>
-        </p:nvSpPr>
-        <p:spPr>
-          <a:xfrm>
-            <a:off x="6236208" y="2212847"/>
-            <a:ext cx="2377440" cy="329184"/>
-          </a:xfrm>
-          <a:prstGeom prst="rect">
-            <a:avLst/>
-          </a:prstGeom>
-          <a:noFill/>
-        </p:spPr>
-        <p:txBody>
-          <a:bodyPr wrap="none" anchor="t" lIns="0" rIns="0" tIns="0" bIns="0">
-            <a:spAutoFit/>
-          </a:bodyPr>
-          <a:lstStyle/>
-          <a:p>
-            <a:pPr algn="l">
-              <a:lnSpc>
-                <a:spcPct val="100000"/>
-              </a:lnSpc>
-              <a:spcAft>
-                <a:spcPts val="0"/>
-              </a:spcAft>
-            </a:pPr>
-            <a:r>
-              <a:rPr sz="2000" b="1" i="0">
-                <a:solidFill>
-                  <a:srgbClr val="A8451B"/>
-                </a:solidFill>
-                <a:latin typeface="Consolas"/>
-              </a:rPr>
-              <a:t>3 Lines → 1</a:t>
-            </a:r>
-          </a:p>
-        </p:txBody>
-      </p:sp>
-      <p:sp>
-        <p:nvSpPr>
-          <p:cNvPr id="14" name="TextBox 13"/>
-          <p:cNvSpPr txBox="1"/>
-          <p:nvPr/>
-        </p:nvSpPr>
-        <p:spPr>
-          <a:xfrm>
-            <a:off x="6236208" y="2651759"/>
-            <a:ext cx="2377440" cy="658368"/>
-          </a:xfrm>
-          <a:prstGeom prst="rect">
-            <a:avLst/>
-          </a:prstGeom>
-          <a:noFill/>
-        </p:spPr>
-        <p:txBody>
-          <a:bodyPr wrap="square" anchor="t" lIns="0" rIns="0" tIns="0" bIns="0">
-            <a:spAutoFit/>
-          </a:bodyPr>
-          <a:lstStyle/>
-          <a:p>
-            <a:pPr algn="l">
-              <a:lnSpc>
-                <a:spcPct val="118000"/>
-              </a:lnSpc>
-              <a:spcAft>
-                <a:spcPts val="0"/>
-              </a:spcAft>
-            </a:pPr>
-            <a:r>
-              <a:rPr sz="1050" b="0" i="0">
-                <a:solidFill>
-                  <a:srgbClr val="4C5A70"/>
-                </a:solidFill>
-                <a:latin typeface="Segoe UI"/>
-              </a:rPr>
-              <a:t>Property, Auto, and Farm filings — once three</a:t>
-            </a:r>
-          </a:p>
-          <a:p>
-            <a:pPr algn="l">
-              <a:lnSpc>
-                <a:spcPct val="118000"/>
-              </a:lnSpc>
-              <a:spcAft>
-                <a:spcPts val="0"/>
-              </a:spcAft>
-            </a:pPr>
-            <a:r>
-              <a:rPr sz="1050" b="0" i="0">
-                <a:solidFill>
-                  <a:srgbClr val="4C5A70"/>
-                </a:solidFill>
-                <a:latin typeface="Segoe UI"/>
-              </a:rPr>
-              <a:t>separate processes — now run on one platform.</a:t>
-            </a:r>
-          </a:p>
-        </p:txBody>
-      </p:sp>
-      <p:sp>
-        <p:nvSpPr>
-          <p:cNvPr id="15" name="Rounded Rectangle 14"/>
-          <p:cNvSpPr/>
-          <p:nvPr/>
-        </p:nvSpPr>
-        <p:spPr>
-          <a:xfrm>
-            <a:off x="8883396" y="2084831"/>
-            <a:ext cx="2670048" cy="1298448"/>
-          </a:xfrm>
-          <a:prstGeom prst="roundRect">
-            <a:avLst>
-              <a:gd name="adj" fmla="val 7000"/>
-            </a:avLst>
-          </a:prstGeom>
-          <a:solidFill>
-            <a:srgbClr val="FFFFFF"/>
-          </a:solidFill>
-          <a:ln w="12700">
-            <a:solidFill>
-              <a:srgbClr val="D8DFE9"/>
-            </a:solidFill>
-          </a:ln>
-          <a:effectLst/>
-        </p:spPr>
-        <p:style>
-          <a:lnRef idx="1">
-            <a:schemeClr val="accent1"/>
-          </a:lnRef>
-          <a:fillRef idx="3">
-            <a:schemeClr val="accent1"/>
-          </a:fillRef>
-          <a:effectRef idx="2">
-            <a:schemeClr val="accent1"/>
-          </a:effectRef>
-          <a:fontRef idx="minor">
-            <a:schemeClr val="lt1"/>
-          </a:fontRef>
-        </p:style>
-        <p:txBody>
-          <a:bodyPr rtlCol="0" anchor="ctr"/>
-          <a:lstStyle/>
-          <a:p>
-            <a:pPr algn="ctr"/>
-          </a:p>
-        </p:txBody>
-      </p:sp>
-      <p:sp>
-        <p:nvSpPr>
-          <p:cNvPr id="16" name="TextBox 15"/>
-          <p:cNvSpPr txBox="1"/>
-          <p:nvPr/>
-        </p:nvSpPr>
-        <p:spPr>
-          <a:xfrm>
-            <a:off x="9029700" y="2212847"/>
-            <a:ext cx="2377440" cy="329184"/>
-          </a:xfrm>
-          <a:prstGeom prst="rect">
-            <a:avLst/>
-          </a:prstGeom>
-          <a:noFill/>
-        </p:spPr>
-        <p:txBody>
-          <a:bodyPr wrap="none" anchor="t" lIns="0" rIns="0" tIns="0" bIns="0">
-            <a:spAutoFit/>
-          </a:bodyPr>
-          <a:lstStyle/>
-          <a:p>
-            <a:pPr algn="l">
-              <a:lnSpc>
-                <a:spcPct val="100000"/>
-              </a:lnSpc>
-              <a:spcAft>
-                <a:spcPts val="0"/>
-              </a:spcAft>
-            </a:pPr>
-            <a:r>
-              <a:rPr sz="2000" b="1" i="0">
-                <a:solidFill>
-                  <a:srgbClr val="A8451B"/>
-                </a:solidFill>
-                <a:latin typeface="Consolas"/>
-              </a:rPr>
-              <a:t>10 Filings</a:t>
-            </a:r>
-          </a:p>
-        </p:txBody>
-      </p:sp>
-      <p:sp>
-        <p:nvSpPr>
-          <p:cNvPr id="17" name="TextBox 16"/>
-          <p:cNvSpPr txBox="1"/>
-          <p:nvPr/>
-        </p:nvSpPr>
-        <p:spPr>
-          <a:xfrm>
-            <a:off x="9029700" y="2651759"/>
-            <a:ext cx="2377440" cy="658368"/>
-          </a:xfrm>
-          <a:prstGeom prst="rect">
-            <a:avLst/>
-          </a:prstGeom>
-          <a:noFill/>
-        </p:spPr>
-        <p:txBody>
-          <a:bodyPr wrap="square" anchor="t" lIns="0" rIns="0" tIns="0" bIns="0">
-            <a:spAutoFit/>
-          </a:bodyPr>
-          <a:lstStyle/>
-          <a:p>
-            <a:pPr algn="l">
-              <a:lnSpc>
-                <a:spcPct val="118000"/>
-              </a:lnSpc>
-              <a:spcAft>
-                <a:spcPts val="0"/>
-              </a:spcAft>
-            </a:pPr>
-            <a:r>
-              <a:rPr sz="1050" b="0" i="0">
-                <a:solidFill>
-                  <a:srgbClr val="4C5A70"/>
-                </a:solidFill>
-                <a:latin typeface="Segoe UI"/>
-              </a:rPr>
-              <a:t>From single-state filings to multi-state</a:t>
-            </a:r>
-          </a:p>
-          <a:p>
-            <a:pPr algn="l">
-              <a:lnSpc>
-                <a:spcPct val="118000"/>
-              </a:lnSpc>
-              <a:spcAft>
-                <a:spcPts val="0"/>
-              </a:spcAft>
-            </a:pPr>
-            <a:r>
-              <a:rPr sz="1050" b="0" i="0">
-                <a:solidFill>
-                  <a:srgbClr val="4C5A70"/>
-                </a:solidFill>
-                <a:latin typeface="Segoe UI"/>
-              </a:rPr>
-              <a:t>batches to specialty markets — all automated.</a:t>
-            </a:r>
-          </a:p>
-        </p:txBody>
-      </p:sp>
-      <p:sp>
-        <p:nvSpPr>
-          <p:cNvPr id="18" name="Rectangle 17"/>
-          <p:cNvSpPr/>
-          <p:nvPr/>
-        </p:nvSpPr>
-        <p:spPr>
-          <a:xfrm>
-            <a:off x="502920" y="3639312"/>
-            <a:ext cx="11183112" cy="329184"/>
-          </a:xfrm>
-          <a:prstGeom prst="rect">
-            <a:avLst/>
-          </a:prstGeom>
-          <a:solidFill>
-            <a:srgbClr val="101B2D"/>
-          </a:solidFill>
-          <a:ln>
-            <a:noFill/>
-          </a:ln>
-          <a:effectLst/>
-        </p:spPr>
-        <p:style>
-          <a:lnRef idx="1">
-            <a:schemeClr val="accent1"/>
-          </a:lnRef>
-          <a:fillRef idx="3">
-            <a:schemeClr val="accent1"/>
-          </a:fillRef>
-          <a:effectRef idx="2">
-            <a:schemeClr val="accent1"/>
-          </a:effectRef>
-          <a:fontRef idx="minor">
-            <a:schemeClr val="lt1"/>
-          </a:fontRef>
-        </p:style>
-        <p:txBody>
-          <a:bodyPr rtlCol="0" anchor="ctr" lIns="128016" tIns="0" bIns="0"/>
-          <a:lstStyle/>
-          <a:p>
-            <a:pPr algn="ctr"/>
-            <a:r>
-              <a:rPr sz="1250" b="1">
-                <a:solidFill>
-                  <a:srgbClr val="F2F5FA"/>
-                </a:solidFill>
-                <a:latin typeface="Segoe UI"/>
-              </a:rPr>
-              <a:t>WHAT WE CHANGED</a:t>
-            </a:r>
-          </a:p>
-        </p:txBody>
-      </p:sp>
-      <p:sp>
-        <p:nvSpPr>
-          <p:cNvPr id="19" name="Rounded Rectangle 18"/>
-          <p:cNvSpPr/>
-          <p:nvPr/>
-        </p:nvSpPr>
-        <p:spPr>
-          <a:xfrm>
-            <a:off x="566928" y="4078224"/>
-            <a:ext cx="841248" cy="237744"/>
-          </a:xfrm>
-          <a:prstGeom prst="roundRect">
-            <a:avLst>
-              <a:gd name="adj" fmla="val 50000"/>
-            </a:avLst>
-          </a:prstGeom>
-          <a:solidFill>
-            <a:srgbClr val="F5DFDA"/>
-          </a:solidFill>
-          <a:ln>
-            <a:noFill/>
-          </a:ln>
-          <a:effectLst/>
-        </p:spPr>
-        <p:style>
-          <a:lnRef idx="1">
-            <a:schemeClr val="accent1"/>
-          </a:lnRef>
-          <a:fillRef idx="3">
-            <a:schemeClr val="accent1"/>
-          </a:fillRef>
-          <a:effectRef idx="2">
-            <a:schemeClr val="accent1"/>
-          </a:effectRef>
-          <a:fontRef idx="minor">
-            <a:schemeClr val="lt1"/>
-          </a:fontRef>
-        </p:style>
-        <p:txBody>
-          <a:bodyPr rtlCol="0" anchor="ctr"/>
-          <a:lstStyle/>
-          <a:p>
-            <a:pPr algn="ctr"/>
-          </a:p>
-        </p:txBody>
-      </p:sp>
-      <p:sp>
-        <p:nvSpPr>
-          <p:cNvPr id="20" name="TextBox 19"/>
-          <p:cNvSpPr txBox="1"/>
-          <p:nvPr/>
-        </p:nvSpPr>
-        <p:spPr>
-          <a:xfrm>
-            <a:off x="566928" y="4078224"/>
-            <a:ext cx="841248" cy="237744"/>
-          </a:xfrm>
-          <a:prstGeom prst="rect">
-            <a:avLst/>
-          </a:prstGeom>
-          <a:noFill/>
-        </p:spPr>
-        <p:txBody>
-          <a:bodyPr wrap="square" anchor="ctr" lIns="0" rIns="0" tIns="0" bIns="0">
-            <a:spAutoFit/>
-          </a:bodyPr>
-          <a:lstStyle/>
-          <a:p>
-            <a:pPr algn="ctr">
-              <a:lnSpc>
-                <a:spcPct val="100000"/>
-              </a:lnSpc>
-              <a:spcAft>
-                <a:spcPts val="0"/>
-              </a:spcAft>
-            </a:pPr>
-            <a:r>
-              <a:rPr sz="850" b="1" i="0">
-                <a:solidFill>
-                  <a:srgbClr val="A8341F"/>
-                </a:solidFill>
-                <a:latin typeface="Consolas"/>
-              </a:rPr>
-              <a:t>BEFORE</a:t>
-            </a:r>
-          </a:p>
-        </p:txBody>
-      </p:sp>
-      <p:sp>
-        <p:nvSpPr>
-          <p:cNvPr id="21" name="TextBox 20"/>
-          <p:cNvSpPr txBox="1"/>
-          <p:nvPr/>
-        </p:nvSpPr>
-        <p:spPr>
-          <a:xfrm>
-            <a:off x="1517904" y="4059936"/>
-            <a:ext cx="4663440" cy="749808"/>
-          </a:xfrm>
-          <a:prstGeom prst="rect">
-            <a:avLst/>
-          </a:prstGeom>
-          <a:noFill/>
-        </p:spPr>
-        <p:txBody>
-          <a:bodyPr wrap="square" anchor="t" lIns="0" rIns="0" tIns="0" bIns="0">
-            <a:spAutoFit/>
-          </a:bodyPr>
-          <a:lstStyle/>
-          <a:p>
-            <a:pPr algn="l">
-              <a:lnSpc>
-                <a:spcPct val="116000"/>
-              </a:lnSpc>
-              <a:spcAft>
-                <a:spcPts val="0"/>
-              </a:spcAft>
-            </a:pPr>
-            <a:r>
-              <a:rPr sz="1030" b="0" i="0">
-                <a:solidFill>
-                  <a:srgbClr val="22334F"/>
-                </a:solidFill>
-                <a:latin typeface="Segoe UI"/>
-              </a:rPr>
-              <a:t>Each business line kept its own manual process for building rate filings — the same work, done three separate ways.</a:t>
-            </a:r>
-          </a:p>
-        </p:txBody>
-      </p:sp>
-      <p:sp>
-        <p:nvSpPr>
-          <p:cNvPr id="22" name="Rounded Rectangle 21"/>
-          <p:cNvSpPr/>
-          <p:nvPr/>
-        </p:nvSpPr>
-        <p:spPr>
-          <a:xfrm>
-            <a:off x="6382512" y="4078224"/>
-            <a:ext cx="841248" cy="237744"/>
-          </a:xfrm>
-          <a:prstGeom prst="roundRect">
-            <a:avLst>
-              <a:gd name="adj" fmla="val 50000"/>
-            </a:avLst>
-          </a:prstGeom>
-          <a:solidFill>
-            <a:srgbClr val="F3E2D3"/>
-          </a:solidFill>
-          <a:ln>
-            <a:noFill/>
-          </a:ln>
-          <a:effectLst/>
-        </p:spPr>
-        <p:style>
-          <a:lnRef idx="1">
-            <a:schemeClr val="accent1"/>
-          </a:lnRef>
-          <a:fillRef idx="3">
-            <a:schemeClr val="accent1"/>
-          </a:fillRef>
-          <a:effectRef idx="2">
-            <a:schemeClr val="accent1"/>
-          </a:effectRef>
-          <a:fontRef idx="minor">
-            <a:schemeClr val="lt1"/>
-          </a:fontRef>
-        </p:style>
-        <p:txBody>
-          <a:bodyPr rtlCol="0" anchor="ctr"/>
-          <a:lstStyle/>
-          <a:p>
-            <a:pPr algn="ctr"/>
-          </a:p>
-        </p:txBody>
-      </p:sp>
-      <p:sp>
-        <p:nvSpPr>
-          <p:cNvPr id="23" name="TextBox 22"/>
-          <p:cNvSpPr txBox="1"/>
-          <p:nvPr/>
-        </p:nvSpPr>
-        <p:spPr>
-          <a:xfrm>
-            <a:off x="6382512" y="4078224"/>
-            <a:ext cx="841248" cy="237744"/>
-          </a:xfrm>
-          <a:prstGeom prst="rect">
-            <a:avLst/>
-          </a:prstGeom>
-          <a:noFill/>
-        </p:spPr>
-        <p:txBody>
-          <a:bodyPr wrap="square" anchor="ctr" lIns="0" rIns="0" tIns="0" bIns="0">
-            <a:spAutoFit/>
-          </a:bodyPr>
-          <a:lstStyle/>
-          <a:p>
-            <a:pPr algn="ctr">
-              <a:lnSpc>
-                <a:spcPct val="100000"/>
-              </a:lnSpc>
-              <a:spcAft>
-                <a:spcPts val="0"/>
-              </a:spcAft>
-            </a:pPr>
-            <a:r>
-              <a:rPr sz="850" b="1" i="0">
-                <a:solidFill>
-                  <a:srgbClr val="A8451B"/>
-                </a:solidFill>
-                <a:latin typeface="Consolas"/>
-              </a:rPr>
-              <a:t>AFTER</a:t>
-            </a:r>
-          </a:p>
-        </p:txBody>
-      </p:sp>
-      <p:sp>
-        <p:nvSpPr>
-          <p:cNvPr id="24" name="TextBox 23"/>
-          <p:cNvSpPr txBox="1"/>
-          <p:nvPr/>
-        </p:nvSpPr>
-        <p:spPr>
-          <a:xfrm>
-            <a:off x="7333488" y="4059936"/>
-            <a:ext cx="4663440" cy="749808"/>
-          </a:xfrm>
-          <a:prstGeom prst="rect">
-            <a:avLst/>
-          </a:prstGeom>
-          <a:noFill/>
-        </p:spPr>
-        <p:txBody>
-          <a:bodyPr wrap="square" anchor="t" lIns="0" rIns="0" tIns="0" bIns="0">
-            <a:spAutoFit/>
-          </a:bodyPr>
-          <a:lstStyle/>
-          <a:p>
-            <a:pPr algn="l">
-              <a:lnSpc>
-                <a:spcPct val="116000"/>
-              </a:lnSpc>
-              <a:spcAft>
-                <a:spcPts val="0"/>
-              </a:spcAft>
-            </a:pPr>
-            <a:r>
-              <a:rPr sz="1030" b="0" i="0">
-                <a:solidFill>
-                  <a:srgbClr val="22334F"/>
-                </a:solidFill>
-                <a:latin typeface="Segoe UI"/>
-              </a:rPr>
-              <a:t>One shared platform now builds every filing, for every line of business, from the same underlying data and rules.</a:t>
-            </a:r>
-          </a:p>
-        </p:txBody>
-      </p:sp>
-      <p:sp>
-        <p:nvSpPr>
-          <p:cNvPr id="25" name="Rounded Rectangle 24"/>
-          <p:cNvSpPr/>
-          <p:nvPr/>
-        </p:nvSpPr>
-        <p:spPr>
-          <a:xfrm>
-            <a:off x="566928" y="4910328"/>
-            <a:ext cx="841248" cy="237744"/>
-          </a:xfrm>
-          <a:prstGeom prst="roundRect">
-            <a:avLst>
-              <a:gd name="adj" fmla="val 50000"/>
-            </a:avLst>
-          </a:prstGeom>
-          <a:solidFill>
-            <a:srgbClr val="F5DFDA"/>
-          </a:solidFill>
-          <a:ln>
-            <a:noFill/>
-          </a:ln>
-          <a:effectLst/>
-        </p:spPr>
-        <p:style>
-          <a:lnRef idx="1">
-            <a:schemeClr val="accent1"/>
-          </a:lnRef>
-          <a:fillRef idx="3">
-            <a:schemeClr val="accent1"/>
-          </a:fillRef>
-          <a:effectRef idx="2">
-            <a:schemeClr val="accent1"/>
-          </a:effectRef>
-          <a:fontRef idx="minor">
-            <a:schemeClr val="lt1"/>
-          </a:fontRef>
-        </p:style>
-        <p:txBody>
-          <a:bodyPr rtlCol="0" anchor="ctr"/>
-          <a:lstStyle/>
-          <a:p>
-            <a:pPr algn="ctr"/>
-          </a:p>
-        </p:txBody>
-      </p:sp>
-      <p:sp>
-        <p:nvSpPr>
-          <p:cNvPr id="26" name="TextBox 25"/>
-          <p:cNvSpPr txBox="1"/>
-          <p:nvPr/>
-        </p:nvSpPr>
-        <p:spPr>
-          <a:xfrm>
-            <a:off x="566928" y="4910328"/>
-            <a:ext cx="841248" cy="237744"/>
-          </a:xfrm>
-          <a:prstGeom prst="rect">
-            <a:avLst/>
-          </a:prstGeom>
-          <a:noFill/>
-        </p:spPr>
-        <p:txBody>
-          <a:bodyPr wrap="square" anchor="ctr" lIns="0" rIns="0" tIns="0" bIns="0">
-            <a:spAutoFit/>
-          </a:bodyPr>
-          <a:lstStyle/>
-          <a:p>
-            <a:pPr algn="ctr">
-              <a:lnSpc>
-                <a:spcPct val="100000"/>
-              </a:lnSpc>
-              <a:spcAft>
-                <a:spcPts val="0"/>
-              </a:spcAft>
-            </a:pPr>
-            <a:r>
-              <a:rPr sz="850" b="1" i="0">
-                <a:solidFill>
-                  <a:srgbClr val="A8341F"/>
-                </a:solidFill>
-                <a:latin typeface="Consolas"/>
-              </a:rPr>
-              <a:t>BEFORE</a:t>
+              <a:t>BOP  ·  Business Auto  ·  Farm Auto  —  Rate Filing Platform</a:t>
             </a:r>
           </a:p>
         </p:txBody>
@@ -4302,480 +4526,6 @@
       <p:sp>
         <p:nvSpPr>
           <p:cNvPr id="27" name="TextBox 26"/>
-          <p:cNvSpPr txBox="1"/>
-          <p:nvPr/>
-        </p:nvSpPr>
-        <p:spPr>
-          <a:xfrm>
-            <a:off x="1517904" y="4892040"/>
-            <a:ext cx="4663440" cy="749808"/>
-          </a:xfrm>
-          <a:prstGeom prst="rect">
-            <a:avLst/>
-          </a:prstGeom>
-          <a:noFill/>
-        </p:spPr>
-        <p:txBody>
-          <a:bodyPr wrap="square" anchor="t" lIns="0" rIns="0" tIns="0" bIns="0">
-            <a:spAutoFit/>
-          </a:bodyPr>
-          <a:lstStyle/>
-          <a:p>
-            <a:pPr algn="l">
-              <a:lnSpc>
-                <a:spcPct val="116000"/>
-              </a:lnSpc>
-              <a:spcAft>
-                <a:spcPts val="0"/>
-              </a:spcAft>
-            </a:pPr>
-            <a:r>
-              <a:rPr sz="1030" b="0" i="0">
-                <a:solidFill>
-                  <a:srgbClr val="22334F"/>
-                </a:solidFill>
-                <a:latin typeface="Segoe UI"/>
-              </a:rPr>
-              <a:t>A subtle data-ordering mistake could let a generic, state-wide rate silently override a company’s own specific rate — and it happened, independently, in more than one system before anyone caught it.</a:t>
-            </a:r>
-          </a:p>
-        </p:txBody>
-      </p:sp>
-      <p:sp>
-        <p:nvSpPr>
-          <p:cNvPr id="28" name="Rounded Rectangle 27"/>
-          <p:cNvSpPr/>
-          <p:nvPr/>
-        </p:nvSpPr>
-        <p:spPr>
-          <a:xfrm>
-            <a:off x="6382512" y="4910328"/>
-            <a:ext cx="841248" cy="237744"/>
-          </a:xfrm>
-          <a:prstGeom prst="roundRect">
-            <a:avLst>
-              <a:gd name="adj" fmla="val 50000"/>
-            </a:avLst>
-          </a:prstGeom>
-          <a:solidFill>
-            <a:srgbClr val="F3E2D3"/>
-          </a:solidFill>
-          <a:ln>
-            <a:noFill/>
-          </a:ln>
-          <a:effectLst/>
-        </p:spPr>
-        <p:style>
-          <a:lnRef idx="1">
-            <a:schemeClr val="accent1"/>
-          </a:lnRef>
-          <a:fillRef idx="3">
-            <a:schemeClr val="accent1"/>
-          </a:fillRef>
-          <a:effectRef idx="2">
-            <a:schemeClr val="accent1"/>
-          </a:effectRef>
-          <a:fontRef idx="minor">
-            <a:schemeClr val="lt1"/>
-          </a:fontRef>
-        </p:style>
-        <p:txBody>
-          <a:bodyPr rtlCol="0" anchor="ctr"/>
-          <a:lstStyle/>
-          <a:p>
-            <a:pPr algn="ctr"/>
-          </a:p>
-        </p:txBody>
-      </p:sp>
-      <p:sp>
-        <p:nvSpPr>
-          <p:cNvPr id="29" name="TextBox 28"/>
-          <p:cNvSpPr txBox="1"/>
-          <p:nvPr/>
-        </p:nvSpPr>
-        <p:spPr>
-          <a:xfrm>
-            <a:off x="6382512" y="4910328"/>
-            <a:ext cx="841248" cy="237744"/>
-          </a:xfrm>
-          <a:prstGeom prst="rect">
-            <a:avLst/>
-          </a:prstGeom>
-          <a:noFill/>
-        </p:spPr>
-        <p:txBody>
-          <a:bodyPr wrap="square" anchor="ctr" lIns="0" rIns="0" tIns="0" bIns="0">
-            <a:spAutoFit/>
-          </a:bodyPr>
-          <a:lstStyle/>
-          <a:p>
-            <a:pPr algn="ctr">
-              <a:lnSpc>
-                <a:spcPct val="100000"/>
-              </a:lnSpc>
-              <a:spcAft>
-                <a:spcPts val="0"/>
-              </a:spcAft>
-            </a:pPr>
-            <a:r>
-              <a:rPr sz="850" b="1" i="0">
-                <a:solidFill>
-                  <a:srgbClr val="A8451B"/>
-                </a:solidFill>
-                <a:latin typeface="Consolas"/>
-              </a:rPr>
-              <a:t>AFTER</a:t>
-            </a:r>
-          </a:p>
-        </p:txBody>
-      </p:sp>
-      <p:sp>
-        <p:nvSpPr>
-          <p:cNvPr id="30" name="TextBox 29"/>
-          <p:cNvSpPr txBox="1"/>
-          <p:nvPr/>
-        </p:nvSpPr>
-        <p:spPr>
-          <a:xfrm>
-            <a:off x="7333488" y="4892040"/>
-            <a:ext cx="4663440" cy="749808"/>
-          </a:xfrm>
-          <a:prstGeom prst="rect">
-            <a:avLst/>
-          </a:prstGeom>
-          <a:noFill/>
-        </p:spPr>
-        <p:txBody>
-          <a:bodyPr wrap="square" anchor="t" lIns="0" rIns="0" tIns="0" bIns="0">
-            <a:spAutoFit/>
-          </a:bodyPr>
-          <a:lstStyle/>
-          <a:p>
-            <a:pPr algn="l">
-              <a:lnSpc>
-                <a:spcPct val="116000"/>
-              </a:lnSpc>
-              <a:spcAft>
-                <a:spcPts val="0"/>
-              </a:spcAft>
-            </a:pPr>
-            <a:r>
-              <a:rPr sz="1030" b="0" i="0">
-                <a:solidFill>
-                  <a:srgbClr val="22334F"/>
-                </a:solidFill>
-                <a:latin typeface="Segoe UI"/>
-              </a:rPr>
-              <a:t>We found the issue once, corrected it everywhere it existed, and every filing now runs through an automatic check that compares it to the last approved version before it goes out.</a:t>
-            </a:r>
-          </a:p>
-        </p:txBody>
-      </p:sp>
-      <p:sp>
-        <p:nvSpPr>
-          <p:cNvPr id="31" name="Rounded Rectangle 30"/>
-          <p:cNvSpPr/>
-          <p:nvPr/>
-        </p:nvSpPr>
-        <p:spPr>
-          <a:xfrm>
-            <a:off x="566928" y="5742432"/>
-            <a:ext cx="841248" cy="237744"/>
-          </a:xfrm>
-          <a:prstGeom prst="roundRect">
-            <a:avLst>
-              <a:gd name="adj" fmla="val 50000"/>
-            </a:avLst>
-          </a:prstGeom>
-          <a:solidFill>
-            <a:srgbClr val="F5DFDA"/>
-          </a:solidFill>
-          <a:ln>
-            <a:noFill/>
-          </a:ln>
-          <a:effectLst/>
-        </p:spPr>
-        <p:style>
-          <a:lnRef idx="1">
-            <a:schemeClr val="accent1"/>
-          </a:lnRef>
-          <a:fillRef idx="3">
-            <a:schemeClr val="accent1"/>
-          </a:fillRef>
-          <a:effectRef idx="2">
-            <a:schemeClr val="accent1"/>
-          </a:effectRef>
-          <a:fontRef idx="minor">
-            <a:schemeClr val="lt1"/>
-          </a:fontRef>
-        </p:style>
-        <p:txBody>
-          <a:bodyPr rtlCol="0" anchor="ctr"/>
-          <a:lstStyle/>
-          <a:p>
-            <a:pPr algn="ctr"/>
-          </a:p>
-        </p:txBody>
-      </p:sp>
-      <p:sp>
-        <p:nvSpPr>
-          <p:cNvPr id="32" name="TextBox 31"/>
-          <p:cNvSpPr txBox="1"/>
-          <p:nvPr/>
-        </p:nvSpPr>
-        <p:spPr>
-          <a:xfrm>
-            <a:off x="566928" y="5742432"/>
-            <a:ext cx="841248" cy="237744"/>
-          </a:xfrm>
-          <a:prstGeom prst="rect">
-            <a:avLst/>
-          </a:prstGeom>
-          <a:noFill/>
-        </p:spPr>
-        <p:txBody>
-          <a:bodyPr wrap="square" anchor="ctr" lIns="0" rIns="0" tIns="0" bIns="0">
-            <a:spAutoFit/>
-          </a:bodyPr>
-          <a:lstStyle/>
-          <a:p>
-            <a:pPr algn="ctr">
-              <a:lnSpc>
-                <a:spcPct val="100000"/>
-              </a:lnSpc>
-              <a:spcAft>
-                <a:spcPts val="0"/>
-              </a:spcAft>
-            </a:pPr>
-            <a:r>
-              <a:rPr sz="850" b="1" i="0">
-                <a:solidFill>
-                  <a:srgbClr val="A8341F"/>
-                </a:solidFill>
-                <a:latin typeface="Consolas"/>
-              </a:rPr>
-              <a:t>BEFORE</a:t>
-            </a:r>
-          </a:p>
-        </p:txBody>
-      </p:sp>
-      <p:sp>
-        <p:nvSpPr>
-          <p:cNvPr id="33" name="TextBox 32"/>
-          <p:cNvSpPr txBox="1"/>
-          <p:nvPr/>
-        </p:nvSpPr>
-        <p:spPr>
-          <a:xfrm>
-            <a:off x="1517904" y="5724144"/>
-            <a:ext cx="4663440" cy="749808"/>
-          </a:xfrm>
-          <a:prstGeom prst="rect">
-            <a:avLst/>
-          </a:prstGeom>
-          <a:noFill/>
-        </p:spPr>
-        <p:txBody>
-          <a:bodyPr wrap="square" anchor="t" lIns="0" rIns="0" tIns="0" bIns="0">
-            <a:spAutoFit/>
-          </a:bodyPr>
-          <a:lstStyle/>
-          <a:p>
-            <a:pPr algn="l">
-              <a:lnSpc>
-                <a:spcPct val="116000"/>
-              </a:lnSpc>
-              <a:spcAft>
-                <a:spcPts val="0"/>
-              </a:spcAft>
-            </a:pPr>
-            <a:r>
-              <a:rPr sz="1030" b="0" i="0">
-                <a:solidFill>
-                  <a:srgbClr val="22334F"/>
-                </a:solidFill>
-                <a:latin typeface="Segoe UI"/>
-              </a:rPr>
-              <a:t>Two underwriting companies were quietly missing from every small-market filing — a gap nobody had noticed because the company list was tracked in six different places that had drifted out of sync.</a:t>
-            </a:r>
-          </a:p>
-        </p:txBody>
-      </p:sp>
-      <p:sp>
-        <p:nvSpPr>
-          <p:cNvPr id="34" name="Rounded Rectangle 33"/>
-          <p:cNvSpPr/>
-          <p:nvPr/>
-        </p:nvSpPr>
-        <p:spPr>
-          <a:xfrm>
-            <a:off x="6382512" y="5742432"/>
-            <a:ext cx="841248" cy="237744"/>
-          </a:xfrm>
-          <a:prstGeom prst="roundRect">
-            <a:avLst>
-              <a:gd name="adj" fmla="val 50000"/>
-            </a:avLst>
-          </a:prstGeom>
-          <a:solidFill>
-            <a:srgbClr val="F3E2D3"/>
-          </a:solidFill>
-          <a:ln>
-            <a:noFill/>
-          </a:ln>
-          <a:effectLst/>
-        </p:spPr>
-        <p:style>
-          <a:lnRef idx="1">
-            <a:schemeClr val="accent1"/>
-          </a:lnRef>
-          <a:fillRef idx="3">
-            <a:schemeClr val="accent1"/>
-          </a:fillRef>
-          <a:effectRef idx="2">
-            <a:schemeClr val="accent1"/>
-          </a:effectRef>
-          <a:fontRef idx="minor">
-            <a:schemeClr val="lt1"/>
-          </a:fontRef>
-        </p:style>
-        <p:txBody>
-          <a:bodyPr rtlCol="0" anchor="ctr"/>
-          <a:lstStyle/>
-          <a:p>
-            <a:pPr algn="ctr"/>
-          </a:p>
-        </p:txBody>
-      </p:sp>
-      <p:sp>
-        <p:nvSpPr>
-          <p:cNvPr id="35" name="TextBox 34"/>
-          <p:cNvSpPr txBox="1"/>
-          <p:nvPr/>
-        </p:nvSpPr>
-        <p:spPr>
-          <a:xfrm>
-            <a:off x="6382512" y="5742432"/>
-            <a:ext cx="841248" cy="237744"/>
-          </a:xfrm>
-          <a:prstGeom prst="rect">
-            <a:avLst/>
-          </a:prstGeom>
-          <a:noFill/>
-        </p:spPr>
-        <p:txBody>
-          <a:bodyPr wrap="square" anchor="ctr" lIns="0" rIns="0" tIns="0" bIns="0">
-            <a:spAutoFit/>
-          </a:bodyPr>
-          <a:lstStyle/>
-          <a:p>
-            <a:pPr algn="ctr">
-              <a:lnSpc>
-                <a:spcPct val="100000"/>
-              </a:lnSpc>
-              <a:spcAft>
-                <a:spcPts val="0"/>
-              </a:spcAft>
-            </a:pPr>
-            <a:r>
-              <a:rPr sz="850" b="1" i="0">
-                <a:solidFill>
-                  <a:srgbClr val="A8451B"/>
-                </a:solidFill>
-                <a:latin typeface="Consolas"/>
-              </a:rPr>
-              <a:t>AFTER</a:t>
-            </a:r>
-          </a:p>
-        </p:txBody>
-      </p:sp>
-      <p:sp>
-        <p:nvSpPr>
-          <p:cNvPr id="36" name="TextBox 35"/>
-          <p:cNvSpPr txBox="1"/>
-          <p:nvPr/>
-        </p:nvSpPr>
-        <p:spPr>
-          <a:xfrm>
-            <a:off x="7333488" y="5724144"/>
-            <a:ext cx="4663440" cy="749808"/>
-          </a:xfrm>
-          <a:prstGeom prst="rect">
-            <a:avLst/>
-          </a:prstGeom>
-          <a:noFill/>
-        </p:spPr>
-        <p:txBody>
-          <a:bodyPr wrap="square" anchor="t" lIns="0" rIns="0" tIns="0" bIns="0">
-            <a:spAutoFit/>
-          </a:bodyPr>
-          <a:lstStyle/>
-          <a:p>
-            <a:pPr algn="l">
-              <a:lnSpc>
-                <a:spcPct val="116000"/>
-              </a:lnSpc>
-              <a:spcAft>
-                <a:spcPts val="0"/>
-              </a:spcAft>
-            </a:pPr>
-            <a:r>
-              <a:rPr sz="1030" b="0" i="0">
-                <a:solidFill>
-                  <a:srgbClr val="22334F"/>
-                </a:solidFill>
-                <a:latin typeface="Segoe UI"/>
-              </a:rPr>
-              <a:t>Both companies are included in every filing today, and the company list now lives in exactly one place, so it can’t drift out of sync again.</a:t>
-            </a:r>
-          </a:p>
-        </p:txBody>
-      </p:sp>
-      <p:sp>
-        <p:nvSpPr>
-          <p:cNvPr id="37" name="TextBox 36"/>
-          <p:cNvSpPr txBox="1"/>
-          <p:nvPr/>
-        </p:nvSpPr>
-        <p:spPr>
-          <a:xfrm>
-            <a:off x="502920" y="6528816"/>
-            <a:ext cx="7315200" cy="256032"/>
-          </a:xfrm>
-          <a:prstGeom prst="rect">
-            <a:avLst/>
-          </a:prstGeom>
-          <a:noFill/>
-        </p:spPr>
-        <p:txBody>
-          <a:bodyPr wrap="square" anchor="t" lIns="0" rIns="0" tIns="0" bIns="0">
-            <a:spAutoFit/>
-          </a:bodyPr>
-          <a:lstStyle/>
-          <a:p>
-            <a:pPr algn="l">
-              <a:lnSpc>
-                <a:spcPct val="100000"/>
-              </a:lnSpc>
-              <a:spcAft>
-                <a:spcPts val="0"/>
-              </a:spcAft>
-            </a:pPr>
-            <a:r>
-              <a:rPr sz="900" b="0" i="0">
-                <a:solidFill>
-                  <a:srgbClr val="6B7A90"/>
-                </a:solidFill>
-                <a:latin typeface="Consolas"/>
-              </a:rPr>
-              <a:t>BOP  ·  Business Auto  ·  Farm Auto  —  Rate Filing Platform</a:t>
-            </a:r>
-          </a:p>
-        </p:txBody>
-      </p:sp>
-      <p:sp>
-        <p:nvSpPr>
-          <p:cNvPr id="38" name="TextBox 37"/>
           <p:cNvSpPr txBox="1"/>
           <p:nvPr/>
         </p:nvSpPr>
@@ -4891,8 +4641,8 @@
         </p:nvSpPr>
         <p:spPr>
           <a:xfrm>
-            <a:off x="502920" y="292608"/>
-            <a:ext cx="8961120" cy="566928"/>
+            <a:off x="502920" y="274320"/>
+            <a:ext cx="9692640" cy="548640"/>
           </a:xfrm>
           <a:prstGeom prst="rect">
             <a:avLst/>
@@ -4914,13 +4664,13 @@
               </a:spcAft>
             </a:pPr>
             <a:r>
-              <a:rPr sz="3000" b="1" i="1">
+              <a:rPr sz="2800" b="1" i="1">
                 <a:solidFill>
                   <a:srgbClr val="A8451B"/>
                 </a:solidFill>
                 <a:latin typeface="Georgia"/>
               </a:rPr>
-              <a:t>How It Works — In Plain Terms</a:t>
+              <a:t>Key Benefits &amp; Impact</a:t>
             </a:r>
           </a:p>
         </p:txBody>
@@ -4933,8 +4683,8 @@
         </p:nvSpPr>
         <p:spPr>
           <a:xfrm>
-            <a:off x="502920" y="896112"/>
-            <a:ext cx="10881360" cy="566928"/>
+            <a:off x="502920" y="859536"/>
+            <a:ext cx="11155680" cy="502920"/>
           </a:xfrm>
           <a:prstGeom prst="rect">
             <a:avLst/>
@@ -4956,22 +4706,22 @@
               </a:spcAft>
             </a:pPr>
             <a:r>
-              <a:rPr sz="1350" b="0" i="0">
+              <a:rPr sz="1300" b="0" i="0">
                 <a:solidFill>
                   <a:srgbClr val="4C5A70"/>
                 </a:solidFill>
                 <a:latin typeface="Segoe UI"/>
               </a:rPr>
-              <a:t>The same automated process handles every filing, no matter the business line, state, or underwriting company. </a:t>
-            </a:r>
-            <a:r>
-              <a:rPr sz="1350" b="1" i="0">
+              <a:t>What changed for the business, and what it’s worth in practice — </a:t>
+            </a:r>
+            <a:r>
+              <a:rPr sz="1300" b="1" i="0">
                 <a:solidFill>
                   <a:srgbClr val="22334F"/>
                 </a:solidFill>
                 <a:latin typeface="Segoe UI"/>
               </a:rPr>
-              <a:t>No special cases, no separate rebuilds.</a:t>
+              <a:t>across Property, Auto, and Farm alike.</a:t>
             </a:r>
           </a:p>
         </p:txBody>
@@ -4984,8 +4734,8 @@
         </p:nvSpPr>
         <p:spPr>
           <a:xfrm>
-            <a:off x="502920" y="1627632"/>
-            <a:ext cx="11183112" cy="329184"/>
+            <a:off x="502920" y="1517904"/>
+            <a:ext cx="11183112" cy="292608"/>
           </a:xfrm>
           <a:prstGeom prst="rect">
             <a:avLst/>
@@ -5024,23 +4774,903 @@
                 </a:solidFill>
                 <a:latin typeface="Segoe UI"/>
               </a:rPr>
-              <a:t>THE PROCESS, EVERY TIME</a:t>
-            </a:r>
-          </a:p>
-        </p:txBody>
-      </p:sp>
-      <p:sp>
-        <p:nvSpPr>
-          <p:cNvPr id="6" name="Oval 5"/>
+              <a:t>KEY BENEFITS</a:t>
+            </a:r>
+          </a:p>
+        </p:txBody>
+      </p:sp>
+      <p:sp>
+        <p:nvSpPr>
+          <p:cNvPr id="6" name="Rounded Rectangle 5"/>
           <p:cNvSpPr/>
           <p:nvPr/>
         </p:nvSpPr>
         <p:spPr>
           <a:xfrm>
-            <a:off x="746607" y="2121408"/>
-            <a:ext cx="457200" cy="457200"/>
+            <a:off x="502920" y="1865376"/>
+            <a:ext cx="2134209" cy="1371600"/>
+          </a:xfrm>
+          <a:prstGeom prst="roundRect">
+            <a:avLst>
+              <a:gd name="adj" fmla="val 9000"/>
+            </a:avLst>
+          </a:prstGeom>
+          <a:solidFill>
+            <a:srgbClr val="FFFFFF"/>
+          </a:solidFill>
+          <a:ln w="12700">
+            <a:solidFill>
+              <a:srgbClr val="D8DFE9"/>
+            </a:solidFill>
+          </a:ln>
+          <a:effectLst/>
+        </p:spPr>
+        <p:style>
+          <a:lnRef idx="1">
+            <a:schemeClr val="accent1"/>
+          </a:lnRef>
+          <a:fillRef idx="3">
+            <a:schemeClr val="accent1"/>
+          </a:fillRef>
+          <a:effectRef idx="2">
+            <a:schemeClr val="accent1"/>
+          </a:effectRef>
+          <a:fontRef idx="minor">
+            <a:schemeClr val="lt1"/>
+          </a:fontRef>
+        </p:style>
+        <p:txBody>
+          <a:bodyPr rtlCol="0" anchor="ctr"/>
+          <a:lstStyle/>
+          <a:p>
+            <a:pPr algn="ctr"/>
+          </a:p>
+        </p:txBody>
+      </p:sp>
+      <p:sp>
+        <p:nvSpPr>
+          <p:cNvPr id="7" name="Oval 6"/>
+          <p:cNvSpPr/>
+          <p:nvPr/>
+        </p:nvSpPr>
+        <p:spPr>
+          <a:xfrm>
+            <a:off x="630936" y="2011680"/>
+            <a:ext cx="91440" cy="91440"/>
           </a:xfrm>
           <a:prstGeom prst="ellipse">
+            <a:avLst/>
+          </a:prstGeom>
+          <a:solidFill>
+            <a:srgbClr val="A8451B"/>
+          </a:solidFill>
+          <a:ln>
+            <a:noFill/>
+          </a:ln>
+          <a:effectLst/>
+        </p:spPr>
+        <p:style>
+          <a:lnRef idx="1">
+            <a:schemeClr val="accent1"/>
+          </a:lnRef>
+          <a:fillRef idx="3">
+            <a:schemeClr val="accent1"/>
+          </a:fillRef>
+          <a:effectRef idx="2">
+            <a:schemeClr val="accent1"/>
+          </a:effectRef>
+          <a:fontRef idx="minor">
+            <a:schemeClr val="lt1"/>
+          </a:fontRef>
+        </p:style>
+        <p:txBody>
+          <a:bodyPr rtlCol="0" anchor="ctr"/>
+          <a:lstStyle/>
+          <a:p>
+            <a:pPr algn="ctr"/>
+          </a:p>
+        </p:txBody>
+      </p:sp>
+      <p:sp>
+        <p:nvSpPr>
+          <p:cNvPr id="8" name="TextBox 7"/>
+          <p:cNvSpPr txBox="1"/>
+          <p:nvPr/>
+        </p:nvSpPr>
+        <p:spPr>
+          <a:xfrm>
+            <a:off x="795528" y="1975104"/>
+            <a:ext cx="1731873" cy="329184"/>
+          </a:xfrm>
+          <a:prstGeom prst="rect">
+            <a:avLst/>
+          </a:prstGeom>
+          <a:noFill/>
+        </p:spPr>
+        <p:txBody>
+          <a:bodyPr wrap="square" anchor="t" lIns="0" rIns="0" tIns="0" bIns="0">
+            <a:spAutoFit/>
+          </a:bodyPr>
+          <a:lstStyle/>
+          <a:p>
+            <a:pPr algn="l">
+              <a:lnSpc>
+                <a:spcPct val="105000"/>
+              </a:lnSpc>
+              <a:spcAft>
+                <a:spcPts val="0"/>
+              </a:spcAft>
+            </a:pPr>
+            <a:r>
+              <a:rPr sz="1150" b="1" i="0">
+                <a:solidFill>
+                  <a:srgbClr val="101B2D"/>
+                </a:solidFill>
+                <a:latin typeface="Segoe UI"/>
+              </a:rPr>
+              <a:t>Faster Turnaround</a:t>
+            </a:r>
+          </a:p>
+        </p:txBody>
+      </p:sp>
+      <p:sp>
+        <p:nvSpPr>
+          <p:cNvPr id="9" name="TextBox 8"/>
+          <p:cNvSpPr txBox="1"/>
+          <p:nvPr/>
+        </p:nvSpPr>
+        <p:spPr>
+          <a:xfrm>
+            <a:off x="630936" y="2322576"/>
+            <a:ext cx="1878177" cy="804672"/>
+          </a:xfrm>
+          <a:prstGeom prst="rect">
+            <a:avLst/>
+          </a:prstGeom>
+          <a:noFill/>
+        </p:spPr>
+        <p:txBody>
+          <a:bodyPr wrap="square" anchor="t" lIns="0" rIns="0" tIns="0" bIns="0">
+            <a:spAutoFit/>
+          </a:bodyPr>
+          <a:lstStyle/>
+          <a:p>
+            <a:pPr algn="l">
+              <a:lnSpc>
+                <a:spcPct val="120000"/>
+              </a:lnSpc>
+              <a:spcAft>
+                <a:spcPts val="0"/>
+              </a:spcAft>
+            </a:pPr>
+            <a:r>
+              <a:rPr sz="960" b="0" i="0">
+                <a:solidFill>
+                  <a:srgbClr val="4C5A70"/>
+                </a:solidFill>
+                <a:latin typeface="Segoe UI"/>
+              </a:rPr>
+              <a:t>Reports that took minutes now finish in seconds.</a:t>
+            </a:r>
+          </a:p>
+        </p:txBody>
+      </p:sp>
+      <p:sp>
+        <p:nvSpPr>
+          <p:cNvPr id="10" name="Rounded Rectangle 9"/>
+          <p:cNvSpPr/>
+          <p:nvPr/>
+        </p:nvSpPr>
+        <p:spPr>
+          <a:xfrm>
+            <a:off x="2765145" y="1865376"/>
+            <a:ext cx="2134209" cy="1371600"/>
+          </a:xfrm>
+          <a:prstGeom prst="roundRect">
+            <a:avLst>
+              <a:gd name="adj" fmla="val 9000"/>
+            </a:avLst>
+          </a:prstGeom>
+          <a:solidFill>
+            <a:srgbClr val="FFFFFF"/>
+          </a:solidFill>
+          <a:ln w="12700">
+            <a:solidFill>
+              <a:srgbClr val="D8DFE9"/>
+            </a:solidFill>
+          </a:ln>
+          <a:effectLst/>
+        </p:spPr>
+        <p:style>
+          <a:lnRef idx="1">
+            <a:schemeClr val="accent1"/>
+          </a:lnRef>
+          <a:fillRef idx="3">
+            <a:schemeClr val="accent1"/>
+          </a:fillRef>
+          <a:effectRef idx="2">
+            <a:schemeClr val="accent1"/>
+          </a:effectRef>
+          <a:fontRef idx="minor">
+            <a:schemeClr val="lt1"/>
+          </a:fontRef>
+        </p:style>
+        <p:txBody>
+          <a:bodyPr rtlCol="0" anchor="ctr"/>
+          <a:lstStyle/>
+          <a:p>
+            <a:pPr algn="ctr"/>
+          </a:p>
+        </p:txBody>
+      </p:sp>
+      <p:sp>
+        <p:nvSpPr>
+          <p:cNvPr id="11" name="Oval 10"/>
+          <p:cNvSpPr/>
+          <p:nvPr/>
+        </p:nvSpPr>
+        <p:spPr>
+          <a:xfrm>
+            <a:off x="2893161" y="2011680"/>
+            <a:ext cx="91440" cy="91440"/>
+          </a:xfrm>
+          <a:prstGeom prst="ellipse">
+            <a:avLst/>
+          </a:prstGeom>
+          <a:solidFill>
+            <a:srgbClr val="A8451B"/>
+          </a:solidFill>
+          <a:ln>
+            <a:noFill/>
+          </a:ln>
+          <a:effectLst/>
+        </p:spPr>
+        <p:style>
+          <a:lnRef idx="1">
+            <a:schemeClr val="accent1"/>
+          </a:lnRef>
+          <a:fillRef idx="3">
+            <a:schemeClr val="accent1"/>
+          </a:fillRef>
+          <a:effectRef idx="2">
+            <a:schemeClr val="accent1"/>
+          </a:effectRef>
+          <a:fontRef idx="minor">
+            <a:schemeClr val="lt1"/>
+          </a:fontRef>
+        </p:style>
+        <p:txBody>
+          <a:bodyPr rtlCol="0" anchor="ctr"/>
+          <a:lstStyle/>
+          <a:p>
+            <a:pPr algn="ctr"/>
+          </a:p>
+        </p:txBody>
+      </p:sp>
+      <p:sp>
+        <p:nvSpPr>
+          <p:cNvPr id="12" name="TextBox 11"/>
+          <p:cNvSpPr txBox="1"/>
+          <p:nvPr/>
+        </p:nvSpPr>
+        <p:spPr>
+          <a:xfrm>
+            <a:off x="3057753" y="1975104"/>
+            <a:ext cx="1731873" cy="329184"/>
+          </a:xfrm>
+          <a:prstGeom prst="rect">
+            <a:avLst/>
+          </a:prstGeom>
+          <a:noFill/>
+        </p:spPr>
+        <p:txBody>
+          <a:bodyPr wrap="square" anchor="t" lIns="0" rIns="0" tIns="0" bIns="0">
+            <a:spAutoFit/>
+          </a:bodyPr>
+          <a:lstStyle/>
+          <a:p>
+            <a:pPr algn="l">
+              <a:lnSpc>
+                <a:spcPct val="105000"/>
+              </a:lnSpc>
+              <a:spcAft>
+                <a:spcPts val="0"/>
+              </a:spcAft>
+            </a:pPr>
+            <a:r>
+              <a:rPr sz="1150" b="1" i="0">
+                <a:solidFill>
+                  <a:srgbClr val="101B2D"/>
+                </a:solidFill>
+                <a:latin typeface="Segoe UI"/>
+              </a:rPr>
+              <a:t>Fewer Errors</a:t>
+            </a:r>
+          </a:p>
+        </p:txBody>
+      </p:sp>
+      <p:sp>
+        <p:nvSpPr>
+          <p:cNvPr id="13" name="TextBox 12"/>
+          <p:cNvSpPr txBox="1"/>
+          <p:nvPr/>
+        </p:nvSpPr>
+        <p:spPr>
+          <a:xfrm>
+            <a:off x="2893161" y="2322576"/>
+            <a:ext cx="1878177" cy="804672"/>
+          </a:xfrm>
+          <a:prstGeom prst="rect">
+            <a:avLst/>
+          </a:prstGeom>
+          <a:noFill/>
+        </p:spPr>
+        <p:txBody>
+          <a:bodyPr wrap="square" anchor="t" lIns="0" rIns="0" tIns="0" bIns="0">
+            <a:spAutoFit/>
+          </a:bodyPr>
+          <a:lstStyle/>
+          <a:p>
+            <a:pPr algn="l">
+              <a:lnSpc>
+                <a:spcPct val="120000"/>
+              </a:lnSpc>
+              <a:spcAft>
+                <a:spcPts val="0"/>
+              </a:spcAft>
+            </a:pPr>
+            <a:r>
+              <a:rPr sz="960" b="0" i="0">
+                <a:solidFill>
+                  <a:srgbClr val="4C5A70"/>
+                </a:solidFill>
+                <a:latin typeface="Segoe UI"/>
+              </a:rPr>
+              <a:t>Every filing is checked against the last approved version.</a:t>
+            </a:r>
+          </a:p>
+        </p:txBody>
+      </p:sp>
+      <p:sp>
+        <p:nvSpPr>
+          <p:cNvPr id="14" name="Rounded Rectangle 13"/>
+          <p:cNvSpPr/>
+          <p:nvPr/>
+        </p:nvSpPr>
+        <p:spPr>
+          <a:xfrm>
+            <a:off x="5027370" y="1865376"/>
+            <a:ext cx="2134209" cy="1371600"/>
+          </a:xfrm>
+          <a:prstGeom prst="roundRect">
+            <a:avLst>
+              <a:gd name="adj" fmla="val 9000"/>
+            </a:avLst>
+          </a:prstGeom>
+          <a:solidFill>
+            <a:srgbClr val="FFFFFF"/>
+          </a:solidFill>
+          <a:ln w="12700">
+            <a:solidFill>
+              <a:srgbClr val="D8DFE9"/>
+            </a:solidFill>
+          </a:ln>
+          <a:effectLst/>
+        </p:spPr>
+        <p:style>
+          <a:lnRef idx="1">
+            <a:schemeClr val="accent1"/>
+          </a:lnRef>
+          <a:fillRef idx="3">
+            <a:schemeClr val="accent1"/>
+          </a:fillRef>
+          <a:effectRef idx="2">
+            <a:schemeClr val="accent1"/>
+          </a:effectRef>
+          <a:fontRef idx="minor">
+            <a:schemeClr val="lt1"/>
+          </a:fontRef>
+        </p:style>
+        <p:txBody>
+          <a:bodyPr rtlCol="0" anchor="ctr"/>
+          <a:lstStyle/>
+          <a:p>
+            <a:pPr algn="ctr"/>
+          </a:p>
+        </p:txBody>
+      </p:sp>
+      <p:sp>
+        <p:nvSpPr>
+          <p:cNvPr id="15" name="Oval 14"/>
+          <p:cNvSpPr/>
+          <p:nvPr/>
+        </p:nvSpPr>
+        <p:spPr>
+          <a:xfrm>
+            <a:off x="5155386" y="2011680"/>
+            <a:ext cx="91440" cy="91440"/>
+          </a:xfrm>
+          <a:prstGeom prst="ellipse">
+            <a:avLst/>
+          </a:prstGeom>
+          <a:solidFill>
+            <a:srgbClr val="A8451B"/>
+          </a:solidFill>
+          <a:ln>
+            <a:noFill/>
+          </a:ln>
+          <a:effectLst/>
+        </p:spPr>
+        <p:style>
+          <a:lnRef idx="1">
+            <a:schemeClr val="accent1"/>
+          </a:lnRef>
+          <a:fillRef idx="3">
+            <a:schemeClr val="accent1"/>
+          </a:fillRef>
+          <a:effectRef idx="2">
+            <a:schemeClr val="accent1"/>
+          </a:effectRef>
+          <a:fontRef idx="minor">
+            <a:schemeClr val="lt1"/>
+          </a:fontRef>
+        </p:style>
+        <p:txBody>
+          <a:bodyPr rtlCol="0" anchor="ctr"/>
+          <a:lstStyle/>
+          <a:p>
+            <a:pPr algn="ctr"/>
+          </a:p>
+        </p:txBody>
+      </p:sp>
+      <p:sp>
+        <p:nvSpPr>
+          <p:cNvPr id="16" name="TextBox 15"/>
+          <p:cNvSpPr txBox="1"/>
+          <p:nvPr/>
+        </p:nvSpPr>
+        <p:spPr>
+          <a:xfrm>
+            <a:off x="5319978" y="1975104"/>
+            <a:ext cx="1731873" cy="329184"/>
+          </a:xfrm>
+          <a:prstGeom prst="rect">
+            <a:avLst/>
+          </a:prstGeom>
+          <a:noFill/>
+        </p:spPr>
+        <p:txBody>
+          <a:bodyPr wrap="square" anchor="t" lIns="0" rIns="0" tIns="0" bIns="0">
+            <a:spAutoFit/>
+          </a:bodyPr>
+          <a:lstStyle/>
+          <a:p>
+            <a:pPr algn="l">
+              <a:lnSpc>
+                <a:spcPct val="105000"/>
+              </a:lnSpc>
+              <a:spcAft>
+                <a:spcPts val="0"/>
+              </a:spcAft>
+            </a:pPr>
+            <a:r>
+              <a:rPr sz="1150" b="1" i="0">
+                <a:solidFill>
+                  <a:srgbClr val="101B2D"/>
+                </a:solidFill>
+                <a:latin typeface="Segoe UI"/>
+              </a:rPr>
+              <a:t>One System</a:t>
+            </a:r>
+          </a:p>
+        </p:txBody>
+      </p:sp>
+      <p:sp>
+        <p:nvSpPr>
+          <p:cNvPr id="17" name="TextBox 16"/>
+          <p:cNvSpPr txBox="1"/>
+          <p:nvPr/>
+        </p:nvSpPr>
+        <p:spPr>
+          <a:xfrm>
+            <a:off x="5155386" y="2322576"/>
+            <a:ext cx="1878177" cy="804672"/>
+          </a:xfrm>
+          <a:prstGeom prst="rect">
+            <a:avLst/>
+          </a:prstGeom>
+          <a:noFill/>
+        </p:spPr>
+        <p:txBody>
+          <a:bodyPr wrap="square" anchor="t" lIns="0" rIns="0" tIns="0" bIns="0">
+            <a:spAutoFit/>
+          </a:bodyPr>
+          <a:lstStyle/>
+          <a:p>
+            <a:pPr algn="l">
+              <a:lnSpc>
+                <a:spcPct val="120000"/>
+              </a:lnSpc>
+              <a:spcAft>
+                <a:spcPts val="0"/>
+              </a:spcAft>
+            </a:pPr>
+            <a:r>
+              <a:rPr sz="960" b="0" i="0">
+                <a:solidFill>
+                  <a:srgbClr val="4C5A70"/>
+                </a:solidFill>
+                <a:latin typeface="Segoe UI"/>
+              </a:rPr>
+              <a:t>Property, Auto, and Farm now share the same platform.</a:t>
+            </a:r>
+          </a:p>
+        </p:txBody>
+      </p:sp>
+      <p:sp>
+        <p:nvSpPr>
+          <p:cNvPr id="18" name="Rounded Rectangle 17"/>
+          <p:cNvSpPr/>
+          <p:nvPr/>
+        </p:nvSpPr>
+        <p:spPr>
+          <a:xfrm>
+            <a:off x="7289595" y="1865376"/>
+            <a:ext cx="2134209" cy="1371600"/>
+          </a:xfrm>
+          <a:prstGeom prst="roundRect">
+            <a:avLst>
+              <a:gd name="adj" fmla="val 9000"/>
+            </a:avLst>
+          </a:prstGeom>
+          <a:solidFill>
+            <a:srgbClr val="FFFFFF"/>
+          </a:solidFill>
+          <a:ln w="12700">
+            <a:solidFill>
+              <a:srgbClr val="D8DFE9"/>
+            </a:solidFill>
+          </a:ln>
+          <a:effectLst/>
+        </p:spPr>
+        <p:style>
+          <a:lnRef idx="1">
+            <a:schemeClr val="accent1"/>
+          </a:lnRef>
+          <a:fillRef idx="3">
+            <a:schemeClr val="accent1"/>
+          </a:fillRef>
+          <a:effectRef idx="2">
+            <a:schemeClr val="accent1"/>
+          </a:effectRef>
+          <a:fontRef idx="minor">
+            <a:schemeClr val="lt1"/>
+          </a:fontRef>
+        </p:style>
+        <p:txBody>
+          <a:bodyPr rtlCol="0" anchor="ctr"/>
+          <a:lstStyle/>
+          <a:p>
+            <a:pPr algn="ctr"/>
+          </a:p>
+        </p:txBody>
+      </p:sp>
+      <p:sp>
+        <p:nvSpPr>
+          <p:cNvPr id="19" name="Oval 18"/>
+          <p:cNvSpPr/>
+          <p:nvPr/>
+        </p:nvSpPr>
+        <p:spPr>
+          <a:xfrm>
+            <a:off x="7417611" y="2011680"/>
+            <a:ext cx="91440" cy="91440"/>
+          </a:xfrm>
+          <a:prstGeom prst="ellipse">
+            <a:avLst/>
+          </a:prstGeom>
+          <a:solidFill>
+            <a:srgbClr val="A8451B"/>
+          </a:solidFill>
+          <a:ln>
+            <a:noFill/>
+          </a:ln>
+          <a:effectLst/>
+        </p:spPr>
+        <p:style>
+          <a:lnRef idx="1">
+            <a:schemeClr val="accent1"/>
+          </a:lnRef>
+          <a:fillRef idx="3">
+            <a:schemeClr val="accent1"/>
+          </a:fillRef>
+          <a:effectRef idx="2">
+            <a:schemeClr val="accent1"/>
+          </a:effectRef>
+          <a:fontRef idx="minor">
+            <a:schemeClr val="lt1"/>
+          </a:fontRef>
+        </p:style>
+        <p:txBody>
+          <a:bodyPr rtlCol="0" anchor="ctr"/>
+          <a:lstStyle/>
+          <a:p>
+            <a:pPr algn="ctr"/>
+          </a:p>
+        </p:txBody>
+      </p:sp>
+      <p:sp>
+        <p:nvSpPr>
+          <p:cNvPr id="20" name="TextBox 19"/>
+          <p:cNvSpPr txBox="1"/>
+          <p:nvPr/>
+        </p:nvSpPr>
+        <p:spPr>
+          <a:xfrm>
+            <a:off x="7582203" y="1975104"/>
+            <a:ext cx="1731873" cy="329184"/>
+          </a:xfrm>
+          <a:prstGeom prst="rect">
+            <a:avLst/>
+          </a:prstGeom>
+          <a:noFill/>
+        </p:spPr>
+        <p:txBody>
+          <a:bodyPr wrap="square" anchor="t" lIns="0" rIns="0" tIns="0" bIns="0">
+            <a:spAutoFit/>
+          </a:bodyPr>
+          <a:lstStyle/>
+          <a:p>
+            <a:pPr algn="l">
+              <a:lnSpc>
+                <a:spcPct val="105000"/>
+              </a:lnSpc>
+              <a:spcAft>
+                <a:spcPts val="0"/>
+              </a:spcAft>
+            </a:pPr>
+            <a:r>
+              <a:rPr sz="1150" b="1" i="0">
+                <a:solidFill>
+                  <a:srgbClr val="101B2D"/>
+                </a:solidFill>
+                <a:latin typeface="Segoe UI"/>
+              </a:rPr>
+              <a:t>Easier to Share</a:t>
+            </a:r>
+          </a:p>
+        </p:txBody>
+      </p:sp>
+      <p:sp>
+        <p:nvSpPr>
+          <p:cNvPr id="21" name="TextBox 20"/>
+          <p:cNvSpPr txBox="1"/>
+          <p:nvPr/>
+        </p:nvSpPr>
+        <p:spPr>
+          <a:xfrm>
+            <a:off x="7417611" y="2322576"/>
+            <a:ext cx="1878177" cy="804672"/>
+          </a:xfrm>
+          <a:prstGeom prst="rect">
+            <a:avLst/>
+          </a:prstGeom>
+          <a:noFill/>
+        </p:spPr>
+        <p:txBody>
+          <a:bodyPr wrap="square" anchor="t" lIns="0" rIns="0" tIns="0" bIns="0">
+            <a:spAutoFit/>
+          </a:bodyPr>
+          <a:lstStyle/>
+          <a:p>
+            <a:pPr algn="l">
+              <a:lnSpc>
+                <a:spcPct val="120000"/>
+              </a:lnSpc>
+              <a:spcAft>
+                <a:spcPts val="0"/>
+              </a:spcAft>
+            </a:pPr>
+            <a:r>
+              <a:rPr sz="960" b="0" i="0">
+                <a:solidFill>
+                  <a:srgbClr val="4C5A70"/>
+                </a:solidFill>
+                <a:latin typeface="Segoe UI"/>
+              </a:rPr>
+              <a:t>Filing files are far smaller, with nothing left out.</a:t>
+            </a:r>
+          </a:p>
+        </p:txBody>
+      </p:sp>
+      <p:sp>
+        <p:nvSpPr>
+          <p:cNvPr id="22" name="Rounded Rectangle 21"/>
+          <p:cNvSpPr/>
+          <p:nvPr/>
+        </p:nvSpPr>
+        <p:spPr>
+          <a:xfrm>
+            <a:off x="9551820" y="1865376"/>
+            <a:ext cx="2134209" cy="1371600"/>
+          </a:xfrm>
+          <a:prstGeom prst="roundRect">
+            <a:avLst>
+              <a:gd name="adj" fmla="val 9000"/>
+            </a:avLst>
+          </a:prstGeom>
+          <a:solidFill>
+            <a:srgbClr val="FFFFFF"/>
+          </a:solidFill>
+          <a:ln w="12700">
+            <a:solidFill>
+              <a:srgbClr val="D8DFE9"/>
+            </a:solidFill>
+          </a:ln>
+          <a:effectLst/>
+        </p:spPr>
+        <p:style>
+          <a:lnRef idx="1">
+            <a:schemeClr val="accent1"/>
+          </a:lnRef>
+          <a:fillRef idx="3">
+            <a:schemeClr val="accent1"/>
+          </a:fillRef>
+          <a:effectRef idx="2">
+            <a:schemeClr val="accent1"/>
+          </a:effectRef>
+          <a:fontRef idx="minor">
+            <a:schemeClr val="lt1"/>
+          </a:fontRef>
+        </p:style>
+        <p:txBody>
+          <a:bodyPr rtlCol="0" anchor="ctr"/>
+          <a:lstStyle/>
+          <a:p>
+            <a:pPr algn="ctr"/>
+          </a:p>
+        </p:txBody>
+      </p:sp>
+      <p:sp>
+        <p:nvSpPr>
+          <p:cNvPr id="23" name="Oval 22"/>
+          <p:cNvSpPr/>
+          <p:nvPr/>
+        </p:nvSpPr>
+        <p:spPr>
+          <a:xfrm>
+            <a:off x="9679836" y="2011680"/>
+            <a:ext cx="91440" cy="91440"/>
+          </a:xfrm>
+          <a:prstGeom prst="ellipse">
+            <a:avLst/>
+          </a:prstGeom>
+          <a:solidFill>
+            <a:srgbClr val="A8451B"/>
+          </a:solidFill>
+          <a:ln>
+            <a:noFill/>
+          </a:ln>
+          <a:effectLst/>
+        </p:spPr>
+        <p:style>
+          <a:lnRef idx="1">
+            <a:schemeClr val="accent1"/>
+          </a:lnRef>
+          <a:fillRef idx="3">
+            <a:schemeClr val="accent1"/>
+          </a:fillRef>
+          <a:effectRef idx="2">
+            <a:schemeClr val="accent1"/>
+          </a:effectRef>
+          <a:fontRef idx="minor">
+            <a:schemeClr val="lt1"/>
+          </a:fontRef>
+        </p:style>
+        <p:txBody>
+          <a:bodyPr rtlCol="0" anchor="ctr"/>
+          <a:lstStyle/>
+          <a:p>
+            <a:pPr algn="ctr"/>
+          </a:p>
+        </p:txBody>
+      </p:sp>
+      <p:sp>
+        <p:nvSpPr>
+          <p:cNvPr id="24" name="TextBox 23"/>
+          <p:cNvSpPr txBox="1"/>
+          <p:nvPr/>
+        </p:nvSpPr>
+        <p:spPr>
+          <a:xfrm>
+            <a:off x="9844428" y="1975104"/>
+            <a:ext cx="1731873" cy="329184"/>
+          </a:xfrm>
+          <a:prstGeom prst="rect">
+            <a:avLst/>
+          </a:prstGeom>
+          <a:noFill/>
+        </p:spPr>
+        <p:txBody>
+          <a:bodyPr wrap="square" anchor="t" lIns="0" rIns="0" tIns="0" bIns="0">
+            <a:spAutoFit/>
+          </a:bodyPr>
+          <a:lstStyle/>
+          <a:p>
+            <a:pPr algn="l">
+              <a:lnSpc>
+                <a:spcPct val="105000"/>
+              </a:lnSpc>
+              <a:spcAft>
+                <a:spcPts val="0"/>
+              </a:spcAft>
+            </a:pPr>
+            <a:r>
+              <a:rPr sz="1150" b="1" i="0">
+                <a:solidFill>
+                  <a:srgbClr val="101B2D"/>
+                </a:solidFill>
+                <a:latin typeface="Segoe UI"/>
+              </a:rPr>
+              <a:t>Built to Grow</a:t>
+            </a:r>
+          </a:p>
+        </p:txBody>
+      </p:sp>
+      <p:sp>
+        <p:nvSpPr>
+          <p:cNvPr id="25" name="TextBox 24"/>
+          <p:cNvSpPr txBox="1"/>
+          <p:nvPr/>
+        </p:nvSpPr>
+        <p:spPr>
+          <a:xfrm>
+            <a:off x="9679836" y="2322576"/>
+            <a:ext cx="1878177" cy="804672"/>
+          </a:xfrm>
+          <a:prstGeom prst="rect">
+            <a:avLst/>
+          </a:prstGeom>
+          <a:noFill/>
+        </p:spPr>
+        <p:txBody>
+          <a:bodyPr wrap="square" anchor="t" lIns="0" rIns="0" tIns="0" bIns="0">
+            <a:spAutoFit/>
+          </a:bodyPr>
+          <a:lstStyle/>
+          <a:p>
+            <a:pPr algn="l">
+              <a:lnSpc>
+                <a:spcPct val="120000"/>
+              </a:lnSpc>
+              <a:spcAft>
+                <a:spcPts val="0"/>
+              </a:spcAft>
+            </a:pPr>
+            <a:r>
+              <a:rPr sz="960" b="0" i="0">
+                <a:solidFill>
+                  <a:srgbClr val="4C5A70"/>
+                </a:solidFill>
+                <a:latin typeface="Segoe UI"/>
+              </a:rPr>
+              <a:t>Adding the next filing type is a setting, not a rebuild.</a:t>
+            </a:r>
+          </a:p>
+        </p:txBody>
+      </p:sp>
+      <p:sp>
+        <p:nvSpPr>
+          <p:cNvPr id="26" name="Rectangle 25"/>
+          <p:cNvSpPr/>
+          <p:nvPr/>
+        </p:nvSpPr>
+        <p:spPr>
+          <a:xfrm>
+            <a:off x="502920" y="3493008"/>
+            <a:ext cx="11183112" cy="292608"/>
+          </a:xfrm>
+          <a:prstGeom prst="rect">
             <a:avLst/>
           </a:prstGeom>
           <a:solidFill>
@@ -5066,19 +5696,1059 @@
           </a:fontRef>
         </p:style>
         <p:txBody>
-          <a:bodyPr rtlCol="0" anchor="ctr" lIns="0" rIns="0" tIns="0" bIns="0"/>
+          <a:bodyPr rtlCol="0" anchor="ctr" lIns="128016" tIns="0" bIns="0"/>
           <a:lstStyle/>
           <a:p>
             <a:pPr algn="ctr"/>
             <a:r>
-              <a:rPr sz="1600" b="1">
-                <a:solidFill>
-                  <a:srgbClr val="F3E2D3"/>
+              <a:rPr sz="1250" b="1">
+                <a:solidFill>
+                  <a:srgbClr val="F2F5FA"/>
+                </a:solidFill>
+                <a:latin typeface="Segoe UI"/>
+              </a:rPr>
+              <a:t>IMPACT</a:t>
+            </a:r>
+          </a:p>
+        </p:txBody>
+      </p:sp>
+      <p:sp>
+        <p:nvSpPr>
+          <p:cNvPr id="27" name="Rounded Rectangle 26"/>
+          <p:cNvSpPr/>
+          <p:nvPr/>
+        </p:nvSpPr>
+        <p:spPr>
+          <a:xfrm>
+            <a:off x="502920" y="3840480"/>
+            <a:ext cx="2670048" cy="1207008"/>
+          </a:xfrm>
+          <a:prstGeom prst="roundRect">
+            <a:avLst>
+              <a:gd name="adj" fmla="val 8000"/>
+            </a:avLst>
+          </a:prstGeom>
+          <a:solidFill>
+            <a:srgbClr val="FFFFFF"/>
+          </a:solidFill>
+          <a:ln w="12700">
+            <a:solidFill>
+              <a:srgbClr val="D8DFE9"/>
+            </a:solidFill>
+          </a:ln>
+          <a:effectLst/>
+        </p:spPr>
+        <p:style>
+          <a:lnRef idx="1">
+            <a:schemeClr val="accent1"/>
+          </a:lnRef>
+          <a:fillRef idx="3">
+            <a:schemeClr val="accent1"/>
+          </a:fillRef>
+          <a:effectRef idx="2">
+            <a:schemeClr val="accent1"/>
+          </a:effectRef>
+          <a:fontRef idx="minor">
+            <a:schemeClr val="lt1"/>
+          </a:fontRef>
+        </p:style>
+        <p:txBody>
+          <a:bodyPr rtlCol="0" anchor="ctr"/>
+          <a:lstStyle/>
+          <a:p>
+            <a:pPr algn="ctr"/>
+          </a:p>
+        </p:txBody>
+      </p:sp>
+      <p:sp>
+        <p:nvSpPr>
+          <p:cNvPr id="28" name="TextBox 27"/>
+          <p:cNvSpPr txBox="1"/>
+          <p:nvPr/>
+        </p:nvSpPr>
+        <p:spPr>
+          <a:xfrm>
+            <a:off x="649224" y="3959352"/>
+            <a:ext cx="2377440" cy="310896"/>
+          </a:xfrm>
+          <a:prstGeom prst="rect">
+            <a:avLst/>
+          </a:prstGeom>
+          <a:noFill/>
+        </p:spPr>
+        <p:txBody>
+          <a:bodyPr wrap="none" anchor="t" lIns="0" rIns="0" tIns="0" bIns="0">
+            <a:spAutoFit/>
+          </a:bodyPr>
+          <a:lstStyle/>
+          <a:p>
+            <a:pPr algn="l">
+              <a:lnSpc>
+                <a:spcPct val="100000"/>
+              </a:lnSpc>
+              <a:spcAft>
+                <a:spcPts val="0"/>
+              </a:spcAft>
+            </a:pPr>
+            <a:r>
+              <a:rPr sz="1900" b="1" i="0">
+                <a:solidFill>
+                  <a:srgbClr val="A8451B"/>
                 </a:solidFill>
                 <a:latin typeface="Consolas"/>
               </a:rPr>
-              <a:t>1</a:t>
-            </a:r>
+              <a:t>~6× Faster</a:t>
+            </a:r>
+          </a:p>
+        </p:txBody>
+      </p:sp>
+      <p:sp>
+        <p:nvSpPr>
+          <p:cNvPr id="29" name="TextBox 28"/>
+          <p:cNvSpPr txBox="1"/>
+          <p:nvPr/>
+        </p:nvSpPr>
+        <p:spPr>
+          <a:xfrm>
+            <a:off x="649224" y="4370832"/>
+            <a:ext cx="2377440" cy="603504"/>
+          </a:xfrm>
+          <a:prstGeom prst="rect">
+            <a:avLst/>
+          </a:prstGeom>
+          <a:noFill/>
+        </p:spPr>
+        <p:txBody>
+          <a:bodyPr wrap="square" anchor="t" lIns="0" rIns="0" tIns="0" bIns="0">
+            <a:spAutoFit/>
+          </a:bodyPr>
+          <a:lstStyle/>
+          <a:p>
+            <a:pPr algn="l">
+              <a:lnSpc>
+                <a:spcPct val="116000"/>
+              </a:lnSpc>
+              <a:spcAft>
+                <a:spcPts val="0"/>
+              </a:spcAft>
+            </a:pPr>
+            <a:r>
+              <a:rPr sz="1000" b="0" i="0">
+                <a:solidFill>
+                  <a:srgbClr val="4C5A70"/>
+                </a:solidFill>
+                <a:latin typeface="Segoe UI"/>
+              </a:rPr>
+              <a:t>Our biggest reports used to take minutes</a:t>
+            </a:r>
+          </a:p>
+          <a:p>
+            <a:pPr algn="l">
+              <a:lnSpc>
+                <a:spcPct val="116000"/>
+              </a:lnSpc>
+              <a:spcAft>
+                <a:spcPts val="0"/>
+              </a:spcAft>
+            </a:pPr>
+            <a:r>
+              <a:rPr sz="1000" b="0" i="0">
+                <a:solidFill>
+                  <a:srgbClr val="4C5A70"/>
+                </a:solidFill>
+                <a:latin typeface="Segoe UI"/>
+              </a:rPr>
+              <a:t>to produce. They now finish in seconds.</a:t>
+            </a:r>
+          </a:p>
+        </p:txBody>
+      </p:sp>
+      <p:sp>
+        <p:nvSpPr>
+          <p:cNvPr id="30" name="Rounded Rectangle 29"/>
+          <p:cNvSpPr/>
+          <p:nvPr/>
+        </p:nvSpPr>
+        <p:spPr>
+          <a:xfrm>
+            <a:off x="3296412" y="3840480"/>
+            <a:ext cx="2670048" cy="1207008"/>
+          </a:xfrm>
+          <a:prstGeom prst="roundRect">
+            <a:avLst>
+              <a:gd name="adj" fmla="val 8000"/>
+            </a:avLst>
+          </a:prstGeom>
+          <a:solidFill>
+            <a:srgbClr val="FFFFFF"/>
+          </a:solidFill>
+          <a:ln w="12700">
+            <a:solidFill>
+              <a:srgbClr val="D8DFE9"/>
+            </a:solidFill>
+          </a:ln>
+          <a:effectLst/>
+        </p:spPr>
+        <p:style>
+          <a:lnRef idx="1">
+            <a:schemeClr val="accent1"/>
+          </a:lnRef>
+          <a:fillRef idx="3">
+            <a:schemeClr val="accent1"/>
+          </a:fillRef>
+          <a:effectRef idx="2">
+            <a:schemeClr val="accent1"/>
+          </a:effectRef>
+          <a:fontRef idx="minor">
+            <a:schemeClr val="lt1"/>
+          </a:fontRef>
+        </p:style>
+        <p:txBody>
+          <a:bodyPr rtlCol="0" anchor="ctr"/>
+          <a:lstStyle/>
+          <a:p>
+            <a:pPr algn="ctr"/>
+          </a:p>
+        </p:txBody>
+      </p:sp>
+      <p:sp>
+        <p:nvSpPr>
+          <p:cNvPr id="31" name="TextBox 30"/>
+          <p:cNvSpPr txBox="1"/>
+          <p:nvPr/>
+        </p:nvSpPr>
+        <p:spPr>
+          <a:xfrm>
+            <a:off x="3442716" y="3959352"/>
+            <a:ext cx="2377440" cy="310896"/>
+          </a:xfrm>
+          <a:prstGeom prst="rect">
+            <a:avLst/>
+          </a:prstGeom>
+          <a:noFill/>
+        </p:spPr>
+        <p:txBody>
+          <a:bodyPr wrap="none" anchor="t" lIns="0" rIns="0" tIns="0" bIns="0">
+            <a:spAutoFit/>
+          </a:bodyPr>
+          <a:lstStyle/>
+          <a:p>
+            <a:pPr algn="l">
+              <a:lnSpc>
+                <a:spcPct val="100000"/>
+              </a:lnSpc>
+              <a:spcAft>
+                <a:spcPts val="0"/>
+              </a:spcAft>
+            </a:pPr>
+            <a:r>
+              <a:rPr sz="1900" b="1" i="0">
+                <a:solidFill>
+                  <a:srgbClr val="A8451B"/>
+                </a:solidFill>
+                <a:latin typeface="Consolas"/>
+              </a:rPr>
+              <a:t>~80% Smaller</a:t>
+            </a:r>
+          </a:p>
+        </p:txBody>
+      </p:sp>
+      <p:sp>
+        <p:nvSpPr>
+          <p:cNvPr id="32" name="TextBox 31"/>
+          <p:cNvSpPr txBox="1"/>
+          <p:nvPr/>
+        </p:nvSpPr>
+        <p:spPr>
+          <a:xfrm>
+            <a:off x="3442716" y="4370832"/>
+            <a:ext cx="2377440" cy="603504"/>
+          </a:xfrm>
+          <a:prstGeom prst="rect">
+            <a:avLst/>
+          </a:prstGeom>
+          <a:noFill/>
+        </p:spPr>
+        <p:txBody>
+          <a:bodyPr wrap="square" anchor="t" lIns="0" rIns="0" tIns="0" bIns="0">
+            <a:spAutoFit/>
+          </a:bodyPr>
+          <a:lstStyle/>
+          <a:p>
+            <a:pPr algn="l">
+              <a:lnSpc>
+                <a:spcPct val="116000"/>
+              </a:lnSpc>
+              <a:spcAft>
+                <a:spcPts val="0"/>
+              </a:spcAft>
+            </a:pPr>
+            <a:r>
+              <a:rPr sz="1000" b="0" i="0">
+                <a:solidFill>
+                  <a:srgbClr val="4C5A70"/>
+                </a:solidFill>
+                <a:latin typeface="Segoe UI"/>
+              </a:rPr>
+              <a:t>Filing documents are now far easier to</a:t>
+            </a:r>
+          </a:p>
+          <a:p>
+            <a:pPr algn="l">
+              <a:lnSpc>
+                <a:spcPct val="116000"/>
+              </a:lnSpc>
+              <a:spcAft>
+                <a:spcPts val="0"/>
+              </a:spcAft>
+            </a:pPr>
+            <a:r>
+              <a:rPr sz="1000" b="0" i="0">
+                <a:solidFill>
+                  <a:srgbClr val="4C5A70"/>
+                </a:solidFill>
+                <a:latin typeface="Segoe UI"/>
+              </a:rPr>
+              <a:t>submit, store, and review.</a:t>
+            </a:r>
+          </a:p>
+        </p:txBody>
+      </p:sp>
+      <p:sp>
+        <p:nvSpPr>
+          <p:cNvPr id="33" name="Rounded Rectangle 32"/>
+          <p:cNvSpPr/>
+          <p:nvPr/>
+        </p:nvSpPr>
+        <p:spPr>
+          <a:xfrm>
+            <a:off x="6089904" y="3840480"/>
+            <a:ext cx="2670048" cy="1207008"/>
+          </a:xfrm>
+          <a:prstGeom prst="roundRect">
+            <a:avLst>
+              <a:gd name="adj" fmla="val 8000"/>
+            </a:avLst>
+          </a:prstGeom>
+          <a:solidFill>
+            <a:srgbClr val="FFFFFF"/>
+          </a:solidFill>
+          <a:ln w="12700">
+            <a:solidFill>
+              <a:srgbClr val="D8DFE9"/>
+            </a:solidFill>
+          </a:ln>
+          <a:effectLst/>
+        </p:spPr>
+        <p:style>
+          <a:lnRef idx="1">
+            <a:schemeClr val="accent1"/>
+          </a:lnRef>
+          <a:fillRef idx="3">
+            <a:schemeClr val="accent1"/>
+          </a:fillRef>
+          <a:effectRef idx="2">
+            <a:schemeClr val="accent1"/>
+          </a:effectRef>
+          <a:fontRef idx="minor">
+            <a:schemeClr val="lt1"/>
+          </a:fontRef>
+        </p:style>
+        <p:txBody>
+          <a:bodyPr rtlCol="0" anchor="ctr"/>
+          <a:lstStyle/>
+          <a:p>
+            <a:pPr algn="ctr"/>
+          </a:p>
+        </p:txBody>
+      </p:sp>
+      <p:sp>
+        <p:nvSpPr>
+          <p:cNvPr id="34" name="TextBox 33"/>
+          <p:cNvSpPr txBox="1"/>
+          <p:nvPr/>
+        </p:nvSpPr>
+        <p:spPr>
+          <a:xfrm>
+            <a:off x="6236208" y="3959352"/>
+            <a:ext cx="2377440" cy="310896"/>
+          </a:xfrm>
+          <a:prstGeom prst="rect">
+            <a:avLst/>
+          </a:prstGeom>
+          <a:noFill/>
+        </p:spPr>
+        <p:txBody>
+          <a:bodyPr wrap="none" anchor="t" lIns="0" rIns="0" tIns="0" bIns="0">
+            <a:spAutoFit/>
+          </a:bodyPr>
+          <a:lstStyle/>
+          <a:p>
+            <a:pPr algn="l">
+              <a:lnSpc>
+                <a:spcPct val="100000"/>
+              </a:lnSpc>
+              <a:spcAft>
+                <a:spcPts val="0"/>
+              </a:spcAft>
+            </a:pPr>
+            <a:r>
+              <a:rPr sz="1900" b="1" i="0">
+                <a:solidFill>
+                  <a:srgbClr val="A8451B"/>
+                </a:solidFill>
+                <a:latin typeface="Consolas"/>
+              </a:rPr>
+              <a:t>3 Lines → 1</a:t>
+            </a:r>
+          </a:p>
+        </p:txBody>
+      </p:sp>
+      <p:sp>
+        <p:nvSpPr>
+          <p:cNvPr id="35" name="TextBox 34"/>
+          <p:cNvSpPr txBox="1"/>
+          <p:nvPr/>
+        </p:nvSpPr>
+        <p:spPr>
+          <a:xfrm>
+            <a:off x="6236208" y="4370832"/>
+            <a:ext cx="2377440" cy="603504"/>
+          </a:xfrm>
+          <a:prstGeom prst="rect">
+            <a:avLst/>
+          </a:prstGeom>
+          <a:noFill/>
+        </p:spPr>
+        <p:txBody>
+          <a:bodyPr wrap="square" anchor="t" lIns="0" rIns="0" tIns="0" bIns="0">
+            <a:spAutoFit/>
+          </a:bodyPr>
+          <a:lstStyle/>
+          <a:p>
+            <a:pPr algn="l">
+              <a:lnSpc>
+                <a:spcPct val="116000"/>
+              </a:lnSpc>
+              <a:spcAft>
+                <a:spcPts val="0"/>
+              </a:spcAft>
+            </a:pPr>
+            <a:r>
+              <a:rPr sz="1000" b="0" i="0">
+                <a:solidFill>
+                  <a:srgbClr val="4C5A70"/>
+                </a:solidFill>
+                <a:latin typeface="Segoe UI"/>
+              </a:rPr>
+              <a:t>Property, Auto, and Farm filings — once three</a:t>
+            </a:r>
+          </a:p>
+          <a:p>
+            <a:pPr algn="l">
+              <a:lnSpc>
+                <a:spcPct val="116000"/>
+              </a:lnSpc>
+              <a:spcAft>
+                <a:spcPts val="0"/>
+              </a:spcAft>
+            </a:pPr>
+            <a:r>
+              <a:rPr sz="1000" b="0" i="0">
+                <a:solidFill>
+                  <a:srgbClr val="4C5A70"/>
+                </a:solidFill>
+                <a:latin typeface="Segoe UI"/>
+              </a:rPr>
+              <a:t>separate processes — now run on one platform.</a:t>
+            </a:r>
+          </a:p>
+        </p:txBody>
+      </p:sp>
+      <p:sp>
+        <p:nvSpPr>
+          <p:cNvPr id="36" name="Rounded Rectangle 35"/>
+          <p:cNvSpPr/>
+          <p:nvPr/>
+        </p:nvSpPr>
+        <p:spPr>
+          <a:xfrm>
+            <a:off x="8883396" y="3840480"/>
+            <a:ext cx="2670048" cy="1207008"/>
+          </a:xfrm>
+          <a:prstGeom prst="roundRect">
+            <a:avLst>
+              <a:gd name="adj" fmla="val 8000"/>
+            </a:avLst>
+          </a:prstGeom>
+          <a:solidFill>
+            <a:srgbClr val="FFFFFF"/>
+          </a:solidFill>
+          <a:ln w="12700">
+            <a:solidFill>
+              <a:srgbClr val="D8DFE9"/>
+            </a:solidFill>
+          </a:ln>
+          <a:effectLst/>
+        </p:spPr>
+        <p:style>
+          <a:lnRef idx="1">
+            <a:schemeClr val="accent1"/>
+          </a:lnRef>
+          <a:fillRef idx="3">
+            <a:schemeClr val="accent1"/>
+          </a:fillRef>
+          <a:effectRef idx="2">
+            <a:schemeClr val="accent1"/>
+          </a:effectRef>
+          <a:fontRef idx="minor">
+            <a:schemeClr val="lt1"/>
+          </a:fontRef>
+        </p:style>
+        <p:txBody>
+          <a:bodyPr rtlCol="0" anchor="ctr"/>
+          <a:lstStyle/>
+          <a:p>
+            <a:pPr algn="ctr"/>
+          </a:p>
+        </p:txBody>
+      </p:sp>
+      <p:sp>
+        <p:nvSpPr>
+          <p:cNvPr id="37" name="TextBox 36"/>
+          <p:cNvSpPr txBox="1"/>
+          <p:nvPr/>
+        </p:nvSpPr>
+        <p:spPr>
+          <a:xfrm>
+            <a:off x="9029700" y="3959352"/>
+            <a:ext cx="2377440" cy="310896"/>
+          </a:xfrm>
+          <a:prstGeom prst="rect">
+            <a:avLst/>
+          </a:prstGeom>
+          <a:noFill/>
+        </p:spPr>
+        <p:txBody>
+          <a:bodyPr wrap="none" anchor="t" lIns="0" rIns="0" tIns="0" bIns="0">
+            <a:spAutoFit/>
+          </a:bodyPr>
+          <a:lstStyle/>
+          <a:p>
+            <a:pPr algn="l">
+              <a:lnSpc>
+                <a:spcPct val="100000"/>
+              </a:lnSpc>
+              <a:spcAft>
+                <a:spcPts val="0"/>
+              </a:spcAft>
+            </a:pPr>
+            <a:r>
+              <a:rPr sz="1900" b="1" i="0">
+                <a:solidFill>
+                  <a:srgbClr val="A8451B"/>
+                </a:solidFill>
+                <a:latin typeface="Consolas"/>
+              </a:rPr>
+              <a:t>10 Filings</a:t>
+            </a:r>
+          </a:p>
+        </p:txBody>
+      </p:sp>
+      <p:sp>
+        <p:nvSpPr>
+          <p:cNvPr id="38" name="TextBox 37"/>
+          <p:cNvSpPr txBox="1"/>
+          <p:nvPr/>
+        </p:nvSpPr>
+        <p:spPr>
+          <a:xfrm>
+            <a:off x="9029700" y="4370832"/>
+            <a:ext cx="2377440" cy="603504"/>
+          </a:xfrm>
+          <a:prstGeom prst="rect">
+            <a:avLst/>
+          </a:prstGeom>
+          <a:noFill/>
+        </p:spPr>
+        <p:txBody>
+          <a:bodyPr wrap="square" anchor="t" lIns="0" rIns="0" tIns="0" bIns="0">
+            <a:spAutoFit/>
+          </a:bodyPr>
+          <a:lstStyle/>
+          <a:p>
+            <a:pPr algn="l">
+              <a:lnSpc>
+                <a:spcPct val="116000"/>
+              </a:lnSpc>
+              <a:spcAft>
+                <a:spcPts val="0"/>
+              </a:spcAft>
+            </a:pPr>
+            <a:r>
+              <a:rPr sz="1000" b="0" i="0">
+                <a:solidFill>
+                  <a:srgbClr val="4C5A70"/>
+                </a:solidFill>
+                <a:latin typeface="Segoe UI"/>
+              </a:rPr>
+              <a:t>From single-state filings to multi-state</a:t>
+            </a:r>
+          </a:p>
+          <a:p>
+            <a:pPr algn="l">
+              <a:lnSpc>
+                <a:spcPct val="116000"/>
+              </a:lnSpc>
+              <a:spcAft>
+                <a:spcPts val="0"/>
+              </a:spcAft>
+            </a:pPr>
+            <a:r>
+              <a:rPr sz="1000" b="0" i="0">
+                <a:solidFill>
+                  <a:srgbClr val="4C5A70"/>
+                </a:solidFill>
+                <a:latin typeface="Segoe UI"/>
+              </a:rPr>
+              <a:t>batches to specialty markets — all automated.</a:t>
+            </a:r>
+          </a:p>
+        </p:txBody>
+      </p:sp>
+      <p:sp>
+        <p:nvSpPr>
+          <p:cNvPr id="39" name="Rounded Rectangle 38"/>
+          <p:cNvSpPr/>
+          <p:nvPr/>
+        </p:nvSpPr>
+        <p:spPr>
+          <a:xfrm>
+            <a:off x="502920" y="5285232"/>
+            <a:ext cx="11183112" cy="493776"/>
+          </a:xfrm>
+          <a:prstGeom prst="roundRect">
+            <a:avLst>
+              <a:gd name="adj" fmla="val 16000"/>
+            </a:avLst>
+          </a:prstGeom>
+          <a:solidFill>
+            <a:srgbClr val="F3E2D3"/>
+          </a:solidFill>
+          <a:ln w="12700">
+            <a:solidFill>
+              <a:srgbClr val="E6C7A8"/>
+            </a:solidFill>
+          </a:ln>
+          <a:effectLst/>
+        </p:spPr>
+        <p:style>
+          <a:lnRef idx="1">
+            <a:schemeClr val="accent1"/>
+          </a:lnRef>
+          <a:fillRef idx="3">
+            <a:schemeClr val="accent1"/>
+          </a:fillRef>
+          <a:effectRef idx="2">
+            <a:schemeClr val="accent1"/>
+          </a:effectRef>
+          <a:fontRef idx="minor">
+            <a:schemeClr val="lt1"/>
+          </a:fontRef>
+        </p:style>
+        <p:txBody>
+          <a:bodyPr rtlCol="0" anchor="ctr"/>
+          <a:lstStyle/>
+          <a:p>
+            <a:pPr algn="ctr"/>
+          </a:p>
+        </p:txBody>
+      </p:sp>
+      <p:sp>
+        <p:nvSpPr>
+          <p:cNvPr id="40" name="TextBox 39"/>
+          <p:cNvSpPr txBox="1"/>
+          <p:nvPr/>
+        </p:nvSpPr>
+        <p:spPr>
+          <a:xfrm>
+            <a:off x="777240" y="5285232"/>
+            <a:ext cx="10652760" cy="493776"/>
+          </a:xfrm>
+          <a:prstGeom prst="rect">
+            <a:avLst/>
+          </a:prstGeom>
+          <a:noFill/>
+        </p:spPr>
+        <p:txBody>
+          <a:bodyPr wrap="square" anchor="ctr" lIns="0" rIns="0" tIns="0" bIns="0">
+            <a:spAutoFit/>
+          </a:bodyPr>
+          <a:lstStyle/>
+          <a:p>
+            <a:pPr algn="l">
+              <a:lnSpc>
+                <a:spcPct val="100000"/>
+              </a:lnSpc>
+              <a:spcAft>
+                <a:spcPts val="0"/>
+              </a:spcAft>
+            </a:pPr>
+            <a:r>
+              <a:rPr sz="1200" b="1" i="0">
+                <a:solidFill>
+                  <a:srgbClr val="A8451B"/>
+                </a:solidFill>
+                <a:latin typeface="Segoe UI"/>
+              </a:rPr>
+              <a:t>Bottom line:  </a:t>
+            </a:r>
+            <a:r>
+              <a:rPr sz="1200" b="0" i="0">
+                <a:solidFill>
+                  <a:srgbClr val="22334F"/>
+                </a:solidFill>
+                <a:latin typeface="Segoe UI"/>
+              </a:rPr>
+              <a:t>one platform, three lines of business, faster and more accurate filings — with room to add the next program without starting over.</a:t>
+            </a:r>
+          </a:p>
+        </p:txBody>
+      </p:sp>
+      <p:sp>
+        <p:nvSpPr>
+          <p:cNvPr id="41" name="TextBox 40"/>
+          <p:cNvSpPr txBox="1"/>
+          <p:nvPr/>
+        </p:nvSpPr>
+        <p:spPr>
+          <a:xfrm>
+            <a:off x="502920" y="6528816"/>
+            <a:ext cx="7315200" cy="256032"/>
+          </a:xfrm>
+          <a:prstGeom prst="rect">
+            <a:avLst/>
+          </a:prstGeom>
+          <a:noFill/>
+        </p:spPr>
+        <p:txBody>
+          <a:bodyPr wrap="square" anchor="t" lIns="0" rIns="0" tIns="0" bIns="0">
+            <a:spAutoFit/>
+          </a:bodyPr>
+          <a:lstStyle/>
+          <a:p>
+            <a:pPr algn="l">
+              <a:lnSpc>
+                <a:spcPct val="100000"/>
+              </a:lnSpc>
+              <a:spcAft>
+                <a:spcPts val="0"/>
+              </a:spcAft>
+            </a:pPr>
+            <a:r>
+              <a:rPr sz="900" b="0" i="0">
+                <a:solidFill>
+                  <a:srgbClr val="6B7A90"/>
+                </a:solidFill>
+                <a:latin typeface="Consolas"/>
+              </a:rPr>
+              <a:t>BOP  ·  Business Auto  ·  Farm Auto  —  Rate Filing Platform</a:t>
+            </a:r>
+          </a:p>
+        </p:txBody>
+      </p:sp>
+      <p:sp>
+        <p:nvSpPr>
+          <p:cNvPr id="42" name="TextBox 41"/>
+          <p:cNvSpPr txBox="1"/>
+          <p:nvPr/>
+        </p:nvSpPr>
+        <p:spPr>
+          <a:xfrm>
+            <a:off x="11430000" y="6528816"/>
+            <a:ext cx="365760" cy="256032"/>
+          </a:xfrm>
+          <a:prstGeom prst="rect">
+            <a:avLst/>
+          </a:prstGeom>
+          <a:noFill/>
+        </p:spPr>
+        <p:txBody>
+          <a:bodyPr wrap="square" anchor="t" lIns="0" rIns="0" tIns="0" bIns="0">
+            <a:spAutoFit/>
+          </a:bodyPr>
+          <a:lstStyle/>
+          <a:p>
+            <a:pPr algn="r">
+              <a:lnSpc>
+                <a:spcPct val="100000"/>
+              </a:lnSpc>
+              <a:spcAft>
+                <a:spcPts val="0"/>
+              </a:spcAft>
+            </a:pPr>
+            <a:r>
+              <a:rPr sz="900" b="0" i="0">
+                <a:solidFill>
+                  <a:srgbClr val="6B7A90"/>
+                </a:solidFill>
+                <a:latin typeface="Consolas"/>
+              </a:rPr>
+              <a:t>02</a:t>
+            </a:r>
+          </a:p>
+        </p:txBody>
+      </p:sp>
+    </p:spTree>
+  </p:cSld>
+  <p:clrMapOvr>
+    <a:masterClrMapping/>
+  </p:clrMapOvr>
+</p:sld>
+</file>
+
+<file path=ppt/slides/slide3.xml><?xml version="1.0" encoding="utf-8"?>
+<p:sld xmlns:a="http://schemas.openxmlformats.org/drawingml/2006/main" xmlns:p="http://schemas.openxmlformats.org/presentationml/2006/main" xmlns:r="http://schemas.openxmlformats.org/officeDocument/2006/relationships">
+  <p:cSld>
+    <p:bg>
+      <p:bgPr>
+        <a:solidFill>
+          <a:srgbClr val="EEF1F6"/>
+        </a:solidFill>
+        <a:effectLst/>
+      </p:bgPr>
+    </p:bg>
+    <p:spTree>
+      <p:nvGrpSpPr>
+        <p:cNvPr id="1" name=""/>
+        <p:cNvGrpSpPr/>
+        <p:nvPr/>
+      </p:nvGrpSpPr>
+      <p:grpSpPr/>
+      <p:sp>
+        <p:nvSpPr>
+          <p:cNvPr id="2" name="TextBox 1"/>
+          <p:cNvSpPr txBox="1"/>
+          <p:nvPr/>
+        </p:nvSpPr>
+        <p:spPr>
+          <a:xfrm>
+            <a:off x="9784080" y="320040"/>
+            <a:ext cx="2011680" cy="256032"/>
+          </a:xfrm>
+          <a:prstGeom prst="rect">
+            <a:avLst/>
+          </a:prstGeom>
+          <a:noFill/>
+        </p:spPr>
+        <p:txBody>
+          <a:bodyPr wrap="square" anchor="t" lIns="0" rIns="0" tIns="0" bIns="0">
+            <a:spAutoFit/>
+          </a:bodyPr>
+          <a:lstStyle/>
+          <a:p>
+            <a:pPr algn="r">
+              <a:lnSpc>
+                <a:spcPct val="100000"/>
+              </a:lnSpc>
+              <a:spcAft>
+                <a:spcPts val="0"/>
+              </a:spcAft>
+            </a:pPr>
+            <a:r>
+              <a:rPr sz="1000" b="0" i="0">
+                <a:solidFill>
+                  <a:srgbClr val="6B7A90"/>
+                </a:solidFill>
+                <a:latin typeface="Consolas"/>
+              </a:rPr>
+              <a:t>SOLUTION DESIGN</a:t>
+            </a:r>
+          </a:p>
+        </p:txBody>
+      </p:sp>
+      <p:sp>
+        <p:nvSpPr>
+          <p:cNvPr id="3" name="TextBox 2"/>
+          <p:cNvSpPr txBox="1"/>
+          <p:nvPr/>
+        </p:nvSpPr>
+        <p:spPr>
+          <a:xfrm>
+            <a:off x="502920" y="274320"/>
+            <a:ext cx="9692640" cy="548640"/>
+          </a:xfrm>
+          <a:prstGeom prst="rect">
+            <a:avLst/>
+          </a:prstGeom>
+          <a:noFill/>
+        </p:spPr>
+        <p:txBody>
+          <a:bodyPr wrap="square" anchor="t" lIns="0" rIns="0" tIns="0" bIns="0">
+            <a:spAutoFit/>
+          </a:bodyPr>
+          <a:lstStyle/>
+          <a:p>
+            <a:pPr algn="l">
+              <a:lnSpc>
+                <a:spcPct val="100000"/>
+              </a:lnSpc>
+              <a:spcAft>
+                <a:spcPts val="0"/>
+              </a:spcAft>
+            </a:pPr>
+            <a:r>
+              <a:rPr sz="2800" b="1" i="1">
+                <a:solidFill>
+                  <a:srgbClr val="A8451B"/>
+                </a:solidFill>
+                <a:latin typeface="Georgia"/>
+              </a:rPr>
+              <a:t>Solution Design</a:t>
+            </a:r>
+          </a:p>
+        </p:txBody>
+      </p:sp>
+      <p:sp>
+        <p:nvSpPr>
+          <p:cNvPr id="4" name="TextBox 3"/>
+          <p:cNvSpPr txBox="1"/>
+          <p:nvPr/>
+        </p:nvSpPr>
+        <p:spPr>
+          <a:xfrm>
+            <a:off x="502920" y="859536"/>
+            <a:ext cx="11155680" cy="502920"/>
+          </a:xfrm>
+          <a:prstGeom prst="rect">
+            <a:avLst/>
+          </a:prstGeom>
+          <a:noFill/>
+        </p:spPr>
+        <p:txBody>
+          <a:bodyPr wrap="square" anchor="t" lIns="0" rIns="0" tIns="0" bIns="0">
+            <a:spAutoFit/>
+          </a:bodyPr>
+          <a:lstStyle/>
+          <a:p>
+            <a:pPr algn="l">
+              <a:lnSpc>
+                <a:spcPct val="115000"/>
+              </a:lnSpc>
+              <a:spcAft>
+                <a:spcPts val="0"/>
+              </a:spcAft>
+            </a:pPr>
+            <a:r>
+              <a:rPr sz="1300" b="0" i="0">
+                <a:solidFill>
+                  <a:srgbClr val="4C5A70"/>
+                </a:solidFill>
+                <a:latin typeface="Segoe UI"/>
+              </a:rPr>
+              <a:t>How ratebook data becomes a regulator-ready filing — automatically, for any line of business, state, or underwriting company.</a:t>
+            </a:r>
+          </a:p>
+        </p:txBody>
+      </p:sp>
+      <p:sp>
+        <p:nvSpPr>
+          <p:cNvPr id="5" name="Rectangle 4"/>
+          <p:cNvSpPr/>
+          <p:nvPr/>
+        </p:nvSpPr>
+        <p:spPr>
+          <a:xfrm>
+            <a:off x="502920" y="1536192"/>
+            <a:ext cx="2148840" cy="274320"/>
+          </a:xfrm>
+          <a:prstGeom prst="rect">
+            <a:avLst/>
+          </a:prstGeom>
+          <a:solidFill>
+            <a:srgbClr val="101B2D"/>
+          </a:solidFill>
+          <a:ln>
+            <a:noFill/>
+          </a:ln>
+          <a:effectLst/>
+        </p:spPr>
+        <p:style>
+          <a:lnRef idx="1">
+            <a:schemeClr val="accent1"/>
+          </a:lnRef>
+          <a:fillRef idx="3">
+            <a:schemeClr val="accent1"/>
+          </a:fillRef>
+          <a:effectRef idx="2">
+            <a:schemeClr val="accent1"/>
+          </a:effectRef>
+          <a:fontRef idx="minor">
+            <a:schemeClr val="lt1"/>
+          </a:fontRef>
+        </p:style>
+        <p:txBody>
+          <a:bodyPr rtlCol="0" anchor="ctr" lIns="128016" tIns="0" bIns="0"/>
+          <a:lstStyle/>
+          <a:p>
+            <a:pPr algn="ctr"/>
+            <a:r>
+              <a:rPr sz="1250" b="1">
+                <a:solidFill>
+                  <a:srgbClr val="F2F5FA"/>
+                </a:solidFill>
+                <a:latin typeface="Segoe UI"/>
+              </a:rPr>
+              <a:t>DATA SOURCES</a:t>
+            </a:r>
+          </a:p>
+        </p:txBody>
+      </p:sp>
+      <p:sp>
+        <p:nvSpPr>
+          <p:cNvPr id="6" name="Rounded Rectangle 5"/>
+          <p:cNvSpPr/>
+          <p:nvPr/>
+        </p:nvSpPr>
+        <p:spPr>
+          <a:xfrm>
+            <a:off x="502920" y="1920240"/>
+            <a:ext cx="2148840" cy="914400"/>
+          </a:xfrm>
+          <a:prstGeom prst="roundRect">
+            <a:avLst>
+              <a:gd name="adj" fmla="val 9000"/>
+            </a:avLst>
+          </a:prstGeom>
+          <a:solidFill>
+            <a:srgbClr val="FFFFFF"/>
+          </a:solidFill>
+          <a:ln w="12700">
+            <a:solidFill>
+              <a:srgbClr val="D8DFE9"/>
+            </a:solidFill>
+          </a:ln>
+          <a:effectLst/>
+        </p:spPr>
+        <p:style>
+          <a:lnRef idx="1">
+            <a:schemeClr val="accent1"/>
+          </a:lnRef>
+          <a:fillRef idx="3">
+            <a:schemeClr val="accent1"/>
+          </a:fillRef>
+          <a:effectRef idx="2">
+            <a:schemeClr val="accent1"/>
+          </a:effectRef>
+          <a:fontRef idx="minor">
+            <a:schemeClr val="lt1"/>
+          </a:fontRef>
+        </p:style>
+        <p:txBody>
+          <a:bodyPr rtlCol="0" anchor="ctr"/>
+          <a:lstStyle/>
+          <a:p>
+            <a:pPr algn="ctr"/>
           </a:p>
         </p:txBody>
       </p:sp>
@@ -5090,8 +6760,50 @@
         </p:nvSpPr>
         <p:spPr>
           <a:xfrm>
-            <a:off x="746607" y="2688336"/>
-            <a:ext cx="2331720" cy="329184"/>
+            <a:off x="630936" y="2066544"/>
+            <a:ext cx="1892808" cy="365760"/>
+          </a:xfrm>
+          <a:prstGeom prst="rect">
+            <a:avLst/>
+          </a:prstGeom>
+          <a:noFill/>
+        </p:spPr>
+        <p:txBody>
+          <a:bodyPr wrap="square" anchor="t" lIns="0" rIns="0" tIns="0" bIns="0">
+            <a:spAutoFit/>
+          </a:bodyPr>
+          <a:lstStyle/>
+          <a:p>
+            <a:pPr algn="l">
+              <a:lnSpc>
+                <a:spcPct val="105000"/>
+              </a:lnSpc>
+              <a:spcAft>
+                <a:spcPts val="0"/>
+              </a:spcAft>
+            </a:pPr>
+            <a:r>
+              <a:rPr sz="1150" b="1" i="0">
+                <a:solidFill>
+                  <a:srgbClr val="101B2D"/>
+                </a:solidFill>
+                <a:latin typeface="Segoe UI"/>
+              </a:rPr>
+              <a:t>Branch Ratebooks</a:t>
+            </a:r>
+          </a:p>
+        </p:txBody>
+      </p:sp>
+      <p:sp>
+        <p:nvSpPr>
+          <p:cNvPr id="8" name="TextBox 7"/>
+          <p:cNvSpPr txBox="1"/>
+          <p:nvPr/>
+        </p:nvSpPr>
+        <p:spPr>
+          <a:xfrm>
+            <a:off x="630936" y="2432304"/>
+            <a:ext cx="1892808" cy="329184"/>
           </a:xfrm>
           <a:prstGeom prst="rect">
             <a:avLst/>
@@ -5113,27 +6825,75 @@
               </a:spcAft>
             </a:pPr>
             <a:r>
-              <a:rPr sz="1250" b="1" i="0">
-                <a:solidFill>
-                  <a:srgbClr val="101B2D"/>
-                </a:solidFill>
-                <a:latin typeface="Segoe UI"/>
-              </a:rPr>
-              <a:t>Gather the data</a:t>
-            </a:r>
-          </a:p>
-        </p:txBody>
-      </p:sp>
-      <p:sp>
-        <p:nvSpPr>
-          <p:cNvPr id="8" name="TextBox 7"/>
+              <a:rPr sz="900" b="0" i="0">
+                <a:solidFill>
+                  <a:srgbClr val="6B7A90"/>
+                </a:solidFill>
+                <a:latin typeface="Consolas"/>
+              </a:rPr>
+              <a:t>NACO · NAFF · NICOF</a:t>
+            </a:r>
+          </a:p>
+        </p:txBody>
+      </p:sp>
+      <p:sp>
+        <p:nvSpPr>
+          <p:cNvPr id="9" name="Rounded Rectangle 8"/>
+          <p:cNvSpPr/>
+          <p:nvPr/>
+        </p:nvSpPr>
+        <p:spPr>
+          <a:xfrm>
+            <a:off x="502920" y="2971800"/>
+            <a:ext cx="2148840" cy="914400"/>
+          </a:xfrm>
+          <a:prstGeom prst="roundRect">
+            <a:avLst>
+              <a:gd name="adj" fmla="val 9000"/>
+            </a:avLst>
+          </a:prstGeom>
+          <a:solidFill>
+            <a:srgbClr val="FFFFFF"/>
+          </a:solidFill>
+          <a:ln w="12700">
+            <a:solidFill>
+              <a:srgbClr val="D8DFE9"/>
+            </a:solidFill>
+          </a:ln>
+          <a:effectLst/>
+        </p:spPr>
+        <p:style>
+          <a:lnRef idx="1">
+            <a:schemeClr val="accent1"/>
+          </a:lnRef>
+          <a:fillRef idx="3">
+            <a:schemeClr val="accent1"/>
+          </a:fillRef>
+          <a:effectRef idx="2">
+            <a:schemeClr val="accent1"/>
+          </a:effectRef>
+          <a:fontRef idx="minor">
+            <a:schemeClr val="lt1"/>
+          </a:fontRef>
+        </p:style>
+        <p:txBody>
+          <a:bodyPr rtlCol="0" anchor="ctr"/>
+          <a:lstStyle/>
+          <a:p>
+            <a:pPr algn="ctr"/>
+          </a:p>
+        </p:txBody>
+      </p:sp>
+      <p:sp>
+        <p:nvSpPr>
+          <p:cNvPr id="10" name="TextBox 9"/>
           <p:cNvSpPr txBox="1"/>
           <p:nvPr/>
         </p:nvSpPr>
         <p:spPr>
           <a:xfrm>
-            <a:off x="746607" y="3035808"/>
-            <a:ext cx="2331720" cy="914400"/>
+            <a:off x="630936" y="3118104"/>
+            <a:ext cx="1892808" cy="365760"/>
           </a:xfrm>
           <a:prstGeom prst="rect">
             <a:avLst/>
@@ -5148,120 +6908,20 @@
           <a:p>
             <a:pPr algn="l">
               <a:lnSpc>
-                <a:spcPct val="122000"/>
+                <a:spcPct val="105000"/>
               </a:lnSpc>
               <a:spcAft>
                 <a:spcPts val="0"/>
               </a:spcAft>
             </a:pPr>
             <a:r>
-              <a:rPr sz="1000" b="0" i="0">
-                <a:solidFill>
-                  <a:srgbClr val="4C5A70"/>
+              <a:rPr sz="1150" b="1" i="0">
+                <a:solidFill>
+                  <a:srgbClr val="101B2D"/>
                 </a:solidFill>
                 <a:latin typeface="Segoe UI"/>
               </a:rPr>
-              <a:t>Pulls together every underwriting company's rates for a state, in the right order of priority, automatically.</a:t>
-            </a:r>
-          </a:p>
-        </p:txBody>
-      </p:sp>
-      <p:sp>
-        <p:nvSpPr>
-          <p:cNvPr id="9" name="Right Arrow 8"/>
-          <p:cNvSpPr/>
-          <p:nvPr/>
-        </p:nvSpPr>
-        <p:spPr>
-          <a:xfrm>
-            <a:off x="3078327" y="2221992"/>
-            <a:ext cx="457200" cy="256032"/>
-          </a:xfrm>
-          <a:prstGeom prst="rightArrow">
-            <a:avLst>
-              <a:gd name="adj1" fmla="val 60000"/>
-              <a:gd name="adj2" fmla="val 55000"/>
-            </a:avLst>
-          </a:prstGeom>
-          <a:solidFill>
-            <a:srgbClr val="D8DFE9"/>
-          </a:solidFill>
-          <a:ln>
-            <a:noFill/>
-          </a:ln>
-          <a:effectLst/>
-        </p:spPr>
-        <p:style>
-          <a:lnRef idx="1">
-            <a:schemeClr val="accent1"/>
-          </a:lnRef>
-          <a:fillRef idx="3">
-            <a:schemeClr val="accent1"/>
-          </a:fillRef>
-          <a:effectRef idx="2">
-            <a:schemeClr val="accent1"/>
-          </a:effectRef>
-          <a:fontRef idx="minor">
-            <a:schemeClr val="lt1"/>
-          </a:fontRef>
-        </p:style>
-        <p:txBody>
-          <a:bodyPr rtlCol="0" anchor="ctr"/>
-          <a:lstStyle/>
-          <a:p>
-            <a:pPr algn="ctr"/>
-          </a:p>
-        </p:txBody>
-      </p:sp>
-      <p:sp>
-        <p:nvSpPr>
-          <p:cNvPr id="10" name="Oval 9"/>
-          <p:cNvSpPr/>
-          <p:nvPr/>
-        </p:nvSpPr>
-        <p:spPr>
-          <a:xfrm>
-            <a:off x="3535527" y="2121408"/>
-            <a:ext cx="457200" cy="457200"/>
-          </a:xfrm>
-          <a:prstGeom prst="ellipse">
-            <a:avLst/>
-          </a:prstGeom>
-          <a:solidFill>
-            <a:srgbClr val="101B2D"/>
-          </a:solidFill>
-          <a:ln>
-            <a:noFill/>
-          </a:ln>
-          <a:effectLst/>
-        </p:spPr>
-        <p:style>
-          <a:lnRef idx="1">
-            <a:schemeClr val="accent1"/>
-          </a:lnRef>
-          <a:fillRef idx="3">
-            <a:schemeClr val="accent1"/>
-          </a:fillRef>
-          <a:effectRef idx="2">
-            <a:schemeClr val="accent1"/>
-          </a:effectRef>
-          <a:fontRef idx="minor">
-            <a:schemeClr val="lt1"/>
-          </a:fontRef>
-        </p:style>
-        <p:txBody>
-          <a:bodyPr rtlCol="0" anchor="ctr" lIns="0" rIns="0" tIns="0" bIns="0"/>
-          <a:lstStyle/>
-          <a:p>
-            <a:pPr algn="ctr"/>
-            <a:r>
-              <a:rPr sz="1600" b="1">
-                <a:solidFill>
-                  <a:srgbClr val="F3E2D3"/>
-                </a:solidFill>
-                <a:latin typeface="Consolas"/>
-              </a:rPr>
-              <a:t>2</a:t>
+              <a:t>State Ratebook</a:t>
             </a:r>
           </a:p>
         </p:txBody>
@@ -5274,8 +6934,8 @@
         </p:nvSpPr>
         <p:spPr>
           <a:xfrm>
-            <a:off x="3535527" y="2688336"/>
-            <a:ext cx="2331720" cy="329184"/>
+            <a:off x="630936" y="3483864"/>
+            <a:ext cx="1892808" cy="329184"/>
           </a:xfrm>
           <a:prstGeom prst="rect">
             <a:avLst/>
@@ -5297,27 +6957,75 @@
               </a:spcAft>
             </a:pPr>
             <a:r>
-              <a:rPr sz="1250" b="1" i="0">
-                <a:solidFill>
-                  <a:srgbClr val="101B2D"/>
-                </a:solidFill>
-                <a:latin typeface="Segoe UI"/>
-              </a:rPr>
-              <a:t>Build the filing</a:t>
-            </a:r>
-          </a:p>
-        </p:txBody>
-      </p:sp>
-      <p:sp>
-        <p:nvSpPr>
-          <p:cNvPr id="12" name="TextBox 11"/>
+              <a:rPr sz="900" b="0" i="0">
+                <a:solidFill>
+                  <a:srgbClr val="6B7A90"/>
+                </a:solidFill>
+                <a:latin typeface="Consolas"/>
+              </a:rPr>
+              <a:t>NGIC — state default</a:t>
+            </a:r>
+          </a:p>
+        </p:txBody>
+      </p:sp>
+      <p:sp>
+        <p:nvSpPr>
+          <p:cNvPr id="12" name="Rounded Rectangle 11"/>
+          <p:cNvSpPr/>
+          <p:nvPr/>
+        </p:nvSpPr>
+        <p:spPr>
+          <a:xfrm>
+            <a:off x="502920" y="4023360"/>
+            <a:ext cx="2148840" cy="914400"/>
+          </a:xfrm>
+          <a:prstGeom prst="roundRect">
+            <a:avLst>
+              <a:gd name="adj" fmla="val 9000"/>
+            </a:avLst>
+          </a:prstGeom>
+          <a:solidFill>
+            <a:srgbClr val="FFFFFF"/>
+          </a:solidFill>
+          <a:ln w="12700">
+            <a:solidFill>
+              <a:srgbClr val="D8DFE9"/>
+            </a:solidFill>
+          </a:ln>
+          <a:effectLst/>
+        </p:spPr>
+        <p:style>
+          <a:lnRef idx="1">
+            <a:schemeClr val="accent1"/>
+          </a:lnRef>
+          <a:fillRef idx="3">
+            <a:schemeClr val="accent1"/>
+          </a:fillRef>
+          <a:effectRef idx="2">
+            <a:schemeClr val="accent1"/>
+          </a:effectRef>
+          <a:fontRef idx="minor">
+            <a:schemeClr val="lt1"/>
+          </a:fontRef>
+        </p:style>
+        <p:txBody>
+          <a:bodyPr rtlCol="0" anchor="ctr"/>
+          <a:lstStyle/>
+          <a:p>
+            <a:pPr algn="ctr"/>
+          </a:p>
+        </p:txBody>
+      </p:sp>
+      <p:sp>
+        <p:nvSpPr>
+          <p:cNvPr id="13" name="TextBox 12"/>
           <p:cNvSpPr txBox="1"/>
           <p:nvPr/>
         </p:nvSpPr>
         <p:spPr>
           <a:xfrm>
-            <a:off x="3535527" y="3035808"/>
-            <a:ext cx="2331720" cy="914400"/>
+            <a:off x="630936" y="4169664"/>
+            <a:ext cx="1892808" cy="365760"/>
           </a:xfrm>
           <a:prstGeom prst="rect">
             <a:avLst/>
@@ -5332,134 +7040,34 @@
           <a:p>
             <a:pPr algn="l">
               <a:lnSpc>
-                <a:spcPct val="122000"/>
+                <a:spcPct val="105000"/>
               </a:lnSpc>
               <a:spcAft>
                 <a:spcPts val="0"/>
               </a:spcAft>
             </a:pPr>
             <a:r>
-              <a:rPr sz="1000" b="0" i="0">
-                <a:solidFill>
-                  <a:srgbClr val="4C5A70"/>
+              <a:rPr sz="1150" b="1" i="0">
+                <a:solidFill>
+                  <a:srgbClr val="101B2D"/>
                 </a:solidFill>
                 <a:latin typeface="Segoe UI"/>
               </a:rPr>
-              <a:t>Formats it the way it needs to look, using one shared set of rules instead of separate code per business line.</a:t>
-            </a:r>
-          </a:p>
-        </p:txBody>
-      </p:sp>
-      <p:sp>
-        <p:nvSpPr>
-          <p:cNvPr id="13" name="Right Arrow 12"/>
-          <p:cNvSpPr/>
-          <p:nvPr/>
-        </p:nvSpPr>
-        <p:spPr>
-          <a:xfrm>
-            <a:off x="5867247" y="2221992"/>
-            <a:ext cx="457200" cy="256032"/>
-          </a:xfrm>
-          <a:prstGeom prst="rightArrow">
-            <a:avLst>
-              <a:gd name="adj1" fmla="val 60000"/>
-              <a:gd name="adj2" fmla="val 55000"/>
-            </a:avLst>
-          </a:prstGeom>
-          <a:solidFill>
-            <a:srgbClr val="D8DFE9"/>
-          </a:solidFill>
-          <a:ln>
-            <a:noFill/>
-          </a:ln>
-          <a:effectLst/>
-        </p:spPr>
-        <p:style>
-          <a:lnRef idx="1">
-            <a:schemeClr val="accent1"/>
-          </a:lnRef>
-          <a:fillRef idx="3">
-            <a:schemeClr val="accent1"/>
-          </a:fillRef>
-          <a:effectRef idx="2">
-            <a:schemeClr val="accent1"/>
-          </a:effectRef>
-          <a:fontRef idx="minor">
-            <a:schemeClr val="lt1"/>
-          </a:fontRef>
-        </p:style>
-        <p:txBody>
-          <a:bodyPr rtlCol="0" anchor="ctr"/>
-          <a:lstStyle/>
-          <a:p>
-            <a:pPr algn="ctr"/>
-          </a:p>
-        </p:txBody>
-      </p:sp>
-      <p:sp>
-        <p:nvSpPr>
-          <p:cNvPr id="14" name="Oval 13"/>
-          <p:cNvSpPr/>
-          <p:nvPr/>
-        </p:nvSpPr>
-        <p:spPr>
-          <a:xfrm>
-            <a:off x="6324447" y="2121408"/>
-            <a:ext cx="457200" cy="457200"/>
-          </a:xfrm>
-          <a:prstGeom prst="ellipse">
-            <a:avLst/>
-          </a:prstGeom>
-          <a:solidFill>
-            <a:srgbClr val="101B2D"/>
-          </a:solidFill>
-          <a:ln>
-            <a:noFill/>
-          </a:ln>
-          <a:effectLst/>
-        </p:spPr>
-        <p:style>
-          <a:lnRef idx="1">
-            <a:schemeClr val="accent1"/>
-          </a:lnRef>
-          <a:fillRef idx="3">
-            <a:schemeClr val="accent1"/>
-          </a:fillRef>
-          <a:effectRef idx="2">
-            <a:schemeClr val="accent1"/>
-          </a:effectRef>
-          <a:fontRef idx="minor">
-            <a:schemeClr val="lt1"/>
-          </a:fontRef>
-        </p:style>
-        <p:txBody>
-          <a:bodyPr rtlCol="0" anchor="ctr" lIns="0" rIns="0" tIns="0" bIns="0"/>
-          <a:lstStyle/>
-          <a:p>
-            <a:pPr algn="ctr"/>
-            <a:r>
-              <a:rPr sz="1600" b="1">
-                <a:solidFill>
-                  <a:srgbClr val="F3E2D3"/>
-                </a:solidFill>
-                <a:latin typeface="Consolas"/>
-              </a:rPr>
-              <a:t>3</a:t>
-            </a:r>
-          </a:p>
-        </p:txBody>
-      </p:sp>
-      <p:sp>
-        <p:nvSpPr>
-          <p:cNvPr id="15" name="TextBox 14"/>
+              <a:t>Countrywide Ratebook</a:t>
+            </a:r>
+          </a:p>
+        </p:txBody>
+      </p:sp>
+      <p:sp>
+        <p:nvSpPr>
+          <p:cNvPr id="14" name="TextBox 13"/>
           <p:cNvSpPr txBox="1"/>
           <p:nvPr/>
         </p:nvSpPr>
         <p:spPr>
           <a:xfrm>
-            <a:off x="6324447" y="2688336"/>
-            <a:ext cx="2331720" cy="329184"/>
+            <a:off x="630936" y="4535424"/>
+            <a:ext cx="1892808" cy="329184"/>
           </a:xfrm>
           <a:prstGeom prst="rect">
             <a:avLst/>
@@ -5481,69 +7089,27 @@
               </a:spcAft>
             </a:pPr>
             <a:r>
-              <a:rPr sz="1250" b="1" i="0">
-                <a:solidFill>
-                  <a:srgbClr val="101B2D"/>
-                </a:solidFill>
-                <a:latin typeface="Segoe UI"/>
-              </a:rPr>
-              <a:t>Lay out the pages</a:t>
-            </a:r>
-          </a:p>
-        </p:txBody>
-      </p:sp>
-      <p:sp>
-        <p:nvSpPr>
-          <p:cNvPr id="16" name="TextBox 15"/>
-          <p:cNvSpPr txBox="1"/>
-          <p:nvPr/>
-        </p:nvSpPr>
-        <p:spPr>
-          <a:xfrm>
-            <a:off x="6324447" y="3035808"/>
-            <a:ext cx="2331720" cy="914400"/>
-          </a:xfrm>
-          <a:prstGeom prst="rect">
-            <a:avLst/>
-          </a:prstGeom>
-          <a:noFill/>
-        </p:spPr>
-        <p:txBody>
-          <a:bodyPr wrap="square" anchor="t" lIns="0" rIns="0" tIns="0" bIns="0">
-            <a:spAutoFit/>
-          </a:bodyPr>
-          <a:lstStyle/>
-          <a:p>
-            <a:pPr algn="l">
-              <a:lnSpc>
-                <a:spcPct val="122000"/>
-              </a:lnSpc>
-              <a:spcAft>
-                <a:spcPts val="0"/>
-              </a:spcAft>
-            </a:pPr>
-            <a:r>
-              <a:rPr sz="1000" b="0" i="0">
-                <a:solidFill>
-                  <a:srgbClr val="4C5A70"/>
-                </a:solidFill>
-                <a:latin typeface="Segoe UI"/>
-              </a:rPr>
-              <a:t>Automatically decides where each page breaks so the filing prints and reads correctly — no manual adjustment.</a:t>
-            </a:r>
-          </a:p>
-        </p:txBody>
-      </p:sp>
-      <p:sp>
-        <p:nvSpPr>
-          <p:cNvPr id="17" name="Right Arrow 16"/>
+              <a:rPr sz="900" b="0" i="0">
+                <a:solidFill>
+                  <a:srgbClr val="6B7A90"/>
+                </a:solidFill>
+                <a:latin typeface="Consolas"/>
+              </a:rPr>
+              <a:t>CW — final fallback</a:t>
+            </a:r>
+          </a:p>
+        </p:txBody>
+      </p:sp>
+      <p:sp>
+        <p:nvSpPr>
+          <p:cNvPr id="15" name="Right Arrow 14"/>
           <p:cNvSpPr/>
           <p:nvPr/>
         </p:nvSpPr>
         <p:spPr>
           <a:xfrm>
-            <a:off x="8656167" y="2221992"/>
-            <a:ext cx="457200" cy="256032"/>
+            <a:off x="2706624" y="3300984"/>
+            <a:ext cx="256032" cy="256032"/>
           </a:xfrm>
           <a:prstGeom prst="rightArrow">
             <a:avLst>
@@ -5583,16 +7149,16 @@
       </p:sp>
       <p:sp>
         <p:nvSpPr>
-          <p:cNvPr id="18" name="Oval 17"/>
+          <p:cNvPr id="16" name="Rectangle 15"/>
           <p:cNvSpPr/>
           <p:nvPr/>
         </p:nvSpPr>
         <p:spPr>
           <a:xfrm>
-            <a:off x="9113367" y="2121408"/>
-            <a:ext cx="457200" cy="457200"/>
-          </a:xfrm>
-          <a:prstGeom prst="ellipse">
+            <a:off x="3017520" y="1536192"/>
+            <a:ext cx="6263640" cy="274320"/>
+          </a:xfrm>
+          <a:prstGeom prst="rect">
             <a:avLst/>
           </a:prstGeom>
           <a:solidFill>
@@ -5618,118 +7184,83 @@
           </a:fontRef>
         </p:style>
         <p:txBody>
-          <a:bodyPr rtlCol="0" anchor="ctr" lIns="0" rIns="0" tIns="0" bIns="0"/>
+          <a:bodyPr rtlCol="0" anchor="ctr" lIns="128016" tIns="0" bIns="0"/>
           <a:lstStyle/>
           <a:p>
             <a:pPr algn="ctr"/>
             <a:r>
-              <a:rPr sz="1600" b="1">
-                <a:solidFill>
-                  <a:srgbClr val="F3E2D3"/>
-                </a:solidFill>
-                <a:latin typeface="Consolas"/>
-              </a:rPr>
-              <a:t>4</a:t>
-            </a:r>
-          </a:p>
-        </p:txBody>
-      </p:sp>
-      <p:sp>
-        <p:nvSpPr>
-          <p:cNvPr id="19" name="TextBox 18"/>
-          <p:cNvSpPr txBox="1"/>
-          <p:nvPr/>
-        </p:nvSpPr>
-        <p:spPr>
-          <a:xfrm>
-            <a:off x="9113367" y="2688336"/>
-            <a:ext cx="2331720" cy="329184"/>
-          </a:xfrm>
-          <a:prstGeom prst="rect">
-            <a:avLst/>
-          </a:prstGeom>
-          <a:noFill/>
-        </p:spPr>
-        <p:txBody>
-          <a:bodyPr wrap="square" anchor="t" lIns="0" rIns="0" tIns="0" bIns="0">
-            <a:spAutoFit/>
-          </a:bodyPr>
-          <a:lstStyle/>
-          <a:p>
-            <a:pPr algn="l">
-              <a:lnSpc>
-                <a:spcPct val="110000"/>
-              </a:lnSpc>
-              <a:spcAft>
-                <a:spcPts val="0"/>
-              </a:spcAft>
-            </a:pPr>
-            <a:r>
-              <a:rPr sz="1250" b="1" i="0">
-                <a:solidFill>
-                  <a:srgbClr val="101B2D"/>
+              <a:rPr sz="1250" b="1">
+                <a:solidFill>
+                  <a:srgbClr val="F2F5FA"/>
                 </a:solidFill>
                 <a:latin typeface="Segoe UI"/>
               </a:rPr>
-              <a:t>Check it, then send it</a:t>
-            </a:r>
-          </a:p>
-        </p:txBody>
-      </p:sp>
-      <p:sp>
-        <p:nvSpPr>
-          <p:cNvPr id="20" name="TextBox 19"/>
-          <p:cNvSpPr txBox="1"/>
-          <p:nvPr/>
-        </p:nvSpPr>
-        <p:spPr>
-          <a:xfrm>
-            <a:off x="9113367" y="3035808"/>
-            <a:ext cx="2331720" cy="914400"/>
-          </a:xfrm>
-          <a:prstGeom prst="rect">
-            <a:avLst/>
-          </a:prstGeom>
-          <a:noFill/>
-        </p:spPr>
-        <p:txBody>
-          <a:bodyPr wrap="square" anchor="t" lIns="0" rIns="0" tIns="0" bIns="0">
-            <a:spAutoFit/>
-          </a:bodyPr>
-          <a:lstStyle/>
-          <a:p>
-            <a:pPr algn="l">
-              <a:lnSpc>
-                <a:spcPct val="122000"/>
-              </a:lnSpc>
-              <a:spcAft>
-                <a:spcPts val="0"/>
-              </a:spcAft>
-            </a:pPr>
-            <a:r>
-              <a:rPr sz="1000" b="0" i="0">
-                <a:solidFill>
-                  <a:srgbClr val="4C5A70"/>
-                </a:solidFill>
-                <a:latin typeface="Segoe UI"/>
-              </a:rPr>
-              <a:t>Compares the finished filing to the last approved version, flags anything that changed, then produces the final PDF.</a:t>
-            </a:r>
-          </a:p>
-        </p:txBody>
-      </p:sp>
-      <p:sp>
-        <p:nvSpPr>
-          <p:cNvPr id="21" name="Rectangle 20"/>
+              <a:t>UNIFIED RATE FILING ENGINE</a:t>
+            </a:r>
+          </a:p>
+        </p:txBody>
+      </p:sp>
+      <p:sp>
+        <p:nvSpPr>
+          <p:cNvPr id="17" name="Rounded Rectangle 16"/>
           <p:cNvSpPr/>
           <p:nvPr/>
         </p:nvSpPr>
         <p:spPr>
           <a:xfrm>
-            <a:off x="502920" y="4023360"/>
-            <a:ext cx="11183112" cy="310896"/>
-          </a:xfrm>
-          <a:prstGeom prst="rect">
+            <a:off x="3017520" y="1920240"/>
+            <a:ext cx="6263640" cy="3017520"/>
+          </a:xfrm>
+          <a:prstGeom prst="roundRect">
+            <a:avLst>
+              <a:gd name="adj" fmla="val 3500"/>
+            </a:avLst>
+          </a:prstGeom>
+          <a:solidFill>
+            <a:srgbClr val="FFFFFF"/>
+          </a:solidFill>
+          <a:ln w="15875">
+            <a:solidFill>
+              <a:srgbClr val="D8DFE9"/>
+            </a:solidFill>
+            <a:prstDash val="dash"/>
+          </a:ln>
+          <a:effectLst/>
+        </p:spPr>
+        <p:style>
+          <a:lnRef idx="1">
+            <a:schemeClr val="accent1"/>
+          </a:lnRef>
+          <a:fillRef idx="3">
+            <a:schemeClr val="accent1"/>
+          </a:fillRef>
+          <a:effectRef idx="2">
+            <a:schemeClr val="accent1"/>
+          </a:effectRef>
+          <a:fontRef idx="minor">
+            <a:schemeClr val="lt1"/>
+          </a:fontRef>
+        </p:style>
+        <p:txBody>
+          <a:bodyPr rtlCol="0" anchor="ctr"/>
+          <a:lstStyle/>
+          <a:p>
+            <a:pPr algn="ctr"/>
+          </a:p>
+        </p:txBody>
+      </p:sp>
+      <p:sp>
+        <p:nvSpPr>
+          <p:cNvPr id="18" name="Oval 17"/>
+          <p:cNvSpPr/>
+          <p:nvPr/>
+        </p:nvSpPr>
+        <p:spPr>
+          <a:xfrm>
+            <a:off x="3182112" y="2121408"/>
+            <a:ext cx="365760" cy="365760"/>
+          </a:xfrm>
+          <a:prstGeom prst="ellipse">
             <a:avLst/>
           </a:prstGeom>
           <a:solidFill>
@@ -5755,32 +7286,32 @@
           </a:fontRef>
         </p:style>
         <p:txBody>
-          <a:bodyPr rtlCol="0" anchor="ctr" lIns="128016" tIns="0" bIns="0"/>
+          <a:bodyPr rtlCol="0" anchor="ctr" lIns="0" rIns="0" tIns="0" bIns="0"/>
           <a:lstStyle/>
           <a:p>
             <a:pPr algn="ctr"/>
             <a:r>
-              <a:rPr sz="1250" b="1">
-                <a:solidFill>
-                  <a:srgbClr val="F2F5FA"/>
-                </a:solidFill>
-                <a:latin typeface="Segoe UI"/>
-              </a:rPr>
-              <a:t>WHAT'S COVERED TODAY</a:t>
-            </a:r>
-          </a:p>
-        </p:txBody>
-      </p:sp>
-      <p:sp>
-        <p:nvSpPr>
-          <p:cNvPr id="22" name="TextBox 21"/>
+              <a:rPr sz="1300" b="1">
+                <a:solidFill>
+                  <a:srgbClr val="F3E2D3"/>
+                </a:solidFill>
+                <a:latin typeface="Consolas"/>
+              </a:rPr>
+              <a:t>1</a:t>
+            </a:r>
+          </a:p>
+        </p:txBody>
+      </p:sp>
+      <p:sp>
+        <p:nvSpPr>
+          <p:cNvPr id="19" name="TextBox 18"/>
           <p:cNvSpPr txBox="1"/>
           <p:nvPr/>
         </p:nvSpPr>
         <p:spPr>
           <a:xfrm>
-            <a:off x="566928" y="4443984"/>
-            <a:ext cx="3657600" cy="256032"/>
+            <a:off x="3136392" y="2596896"/>
+            <a:ext cx="1410462" cy="256032"/>
           </a:xfrm>
           <a:prstGeom prst="rect">
             <a:avLst/>
@@ -5788,7 +7319,1055 @@
           <a:noFill/>
         </p:spPr>
         <p:txBody>
+          <a:bodyPr wrap="none" anchor="t" lIns="0" rIns="0" tIns="0" bIns="0">
+            <a:spAutoFit/>
+          </a:bodyPr>
+          <a:lstStyle/>
+          <a:p>
+            <a:pPr algn="ctr">
+              <a:lnSpc>
+                <a:spcPct val="100000"/>
+              </a:lnSpc>
+              <a:spcAft>
+                <a:spcPts val="0"/>
+              </a:spcAft>
+            </a:pPr>
+            <a:r>
+              <a:rPr sz="1100" b="1" i="0">
+                <a:solidFill>
+                  <a:srgbClr val="101B2D"/>
+                </a:solidFill>
+                <a:latin typeface="Segoe UI"/>
+              </a:rPr>
+              <a:t>Gather</a:t>
+            </a:r>
+          </a:p>
+        </p:txBody>
+      </p:sp>
+      <p:sp>
+        <p:nvSpPr>
+          <p:cNvPr id="20" name="TextBox 19"/>
+          <p:cNvSpPr txBox="1"/>
+          <p:nvPr/>
+        </p:nvSpPr>
+        <p:spPr>
+          <a:xfrm>
+            <a:off x="3136392" y="2871216"/>
+            <a:ext cx="1410462" cy="1417320"/>
+          </a:xfrm>
+          <a:prstGeom prst="rect">
+            <a:avLst/>
+          </a:prstGeom>
+          <a:noFill/>
+        </p:spPr>
+        <p:txBody>
           <a:bodyPr wrap="square" anchor="t" lIns="0" rIns="0" tIns="0" bIns="0">
+            <a:spAutoFit/>
+          </a:bodyPr>
+          <a:lstStyle/>
+          <a:p>
+            <a:pPr algn="ctr">
+              <a:lnSpc>
+                <a:spcPct val="120000"/>
+              </a:lnSpc>
+              <a:spcAft>
+                <a:spcPts val="0"/>
+              </a:spcAft>
+            </a:pPr>
+            <a:r>
+              <a:rPr sz="880" b="0" i="0">
+                <a:solidFill>
+                  <a:srgbClr val="4C5A70"/>
+                </a:solidFill>
+                <a:latin typeface="Segoe UI"/>
+              </a:rPr>
+              <a:t>Pulls every company's rates for a state, in priority order, automatically.</a:t>
+            </a:r>
+          </a:p>
+        </p:txBody>
+      </p:sp>
+      <p:sp>
+        <p:nvSpPr>
+          <p:cNvPr id="21" name="Right Arrow 20"/>
+          <p:cNvSpPr/>
+          <p:nvPr/>
+        </p:nvSpPr>
+        <p:spPr>
+          <a:xfrm>
+            <a:off x="4501134" y="2212848"/>
+            <a:ext cx="219456" cy="182880"/>
+          </a:xfrm>
+          <a:prstGeom prst="rightArrow">
+            <a:avLst>
+              <a:gd name="adj1" fmla="val 60000"/>
+              <a:gd name="adj2" fmla="val 55000"/>
+            </a:avLst>
+          </a:prstGeom>
+          <a:solidFill>
+            <a:srgbClr val="D8DFE9"/>
+          </a:solidFill>
+          <a:ln>
+            <a:noFill/>
+          </a:ln>
+          <a:effectLst/>
+        </p:spPr>
+        <p:style>
+          <a:lnRef idx="1">
+            <a:schemeClr val="accent1"/>
+          </a:lnRef>
+          <a:fillRef idx="3">
+            <a:schemeClr val="accent1"/>
+          </a:fillRef>
+          <a:effectRef idx="2">
+            <a:schemeClr val="accent1"/>
+          </a:effectRef>
+          <a:fontRef idx="minor">
+            <a:schemeClr val="lt1"/>
+          </a:fontRef>
+        </p:style>
+        <p:txBody>
+          <a:bodyPr rtlCol="0" anchor="ctr"/>
+          <a:lstStyle/>
+          <a:p>
+            <a:pPr algn="ctr"/>
+          </a:p>
+        </p:txBody>
+      </p:sp>
+      <p:sp>
+        <p:nvSpPr>
+          <p:cNvPr id="22" name="Oval 21"/>
+          <p:cNvSpPr/>
+          <p:nvPr/>
+        </p:nvSpPr>
+        <p:spPr>
+          <a:xfrm>
+            <a:off x="4720590" y="2121408"/>
+            <a:ext cx="365760" cy="365760"/>
+          </a:xfrm>
+          <a:prstGeom prst="ellipse">
+            <a:avLst/>
+          </a:prstGeom>
+          <a:solidFill>
+            <a:srgbClr val="101B2D"/>
+          </a:solidFill>
+          <a:ln>
+            <a:noFill/>
+          </a:ln>
+          <a:effectLst/>
+        </p:spPr>
+        <p:style>
+          <a:lnRef idx="1">
+            <a:schemeClr val="accent1"/>
+          </a:lnRef>
+          <a:fillRef idx="3">
+            <a:schemeClr val="accent1"/>
+          </a:fillRef>
+          <a:effectRef idx="2">
+            <a:schemeClr val="accent1"/>
+          </a:effectRef>
+          <a:fontRef idx="minor">
+            <a:schemeClr val="lt1"/>
+          </a:fontRef>
+        </p:style>
+        <p:txBody>
+          <a:bodyPr rtlCol="0" anchor="ctr" lIns="0" rIns="0" tIns="0" bIns="0"/>
+          <a:lstStyle/>
+          <a:p>
+            <a:pPr algn="ctr"/>
+            <a:r>
+              <a:rPr sz="1300" b="1">
+                <a:solidFill>
+                  <a:srgbClr val="F3E2D3"/>
+                </a:solidFill>
+                <a:latin typeface="Consolas"/>
+              </a:rPr>
+              <a:t>2</a:t>
+            </a:r>
+          </a:p>
+        </p:txBody>
+      </p:sp>
+      <p:sp>
+        <p:nvSpPr>
+          <p:cNvPr id="23" name="TextBox 22"/>
+          <p:cNvSpPr txBox="1"/>
+          <p:nvPr/>
+        </p:nvSpPr>
+        <p:spPr>
+          <a:xfrm>
+            <a:off x="4674870" y="2596896"/>
+            <a:ext cx="1410462" cy="256032"/>
+          </a:xfrm>
+          <a:prstGeom prst="rect">
+            <a:avLst/>
+          </a:prstGeom>
+          <a:noFill/>
+        </p:spPr>
+        <p:txBody>
+          <a:bodyPr wrap="none" anchor="t" lIns="0" rIns="0" tIns="0" bIns="0">
+            <a:spAutoFit/>
+          </a:bodyPr>
+          <a:lstStyle/>
+          <a:p>
+            <a:pPr algn="ctr">
+              <a:lnSpc>
+                <a:spcPct val="100000"/>
+              </a:lnSpc>
+              <a:spcAft>
+                <a:spcPts val="0"/>
+              </a:spcAft>
+            </a:pPr>
+            <a:r>
+              <a:rPr sz="1100" b="1" i="0">
+                <a:solidFill>
+                  <a:srgbClr val="101B2D"/>
+                </a:solidFill>
+                <a:latin typeface="Segoe UI"/>
+              </a:rPr>
+              <a:t>Build</a:t>
+            </a:r>
+          </a:p>
+        </p:txBody>
+      </p:sp>
+      <p:sp>
+        <p:nvSpPr>
+          <p:cNvPr id="24" name="TextBox 23"/>
+          <p:cNvSpPr txBox="1"/>
+          <p:nvPr/>
+        </p:nvSpPr>
+        <p:spPr>
+          <a:xfrm>
+            <a:off x="4674870" y="2871216"/>
+            <a:ext cx="1410462" cy="1417320"/>
+          </a:xfrm>
+          <a:prstGeom prst="rect">
+            <a:avLst/>
+          </a:prstGeom>
+          <a:noFill/>
+        </p:spPr>
+        <p:txBody>
+          <a:bodyPr wrap="square" anchor="t" lIns="0" rIns="0" tIns="0" bIns="0">
+            <a:spAutoFit/>
+          </a:bodyPr>
+          <a:lstStyle/>
+          <a:p>
+            <a:pPr algn="ctr">
+              <a:lnSpc>
+                <a:spcPct val="120000"/>
+              </a:lnSpc>
+              <a:spcAft>
+                <a:spcPts val="0"/>
+              </a:spcAft>
+            </a:pPr>
+            <a:r>
+              <a:rPr sz="880" b="0" i="0">
+                <a:solidFill>
+                  <a:srgbClr val="4C5A70"/>
+                </a:solidFill>
+                <a:latin typeface="Segoe UI"/>
+              </a:rPr>
+              <a:t>Formats the filing using one shared set of rules — not separate code per line.</a:t>
+            </a:r>
+          </a:p>
+        </p:txBody>
+      </p:sp>
+      <p:sp>
+        <p:nvSpPr>
+          <p:cNvPr id="25" name="Right Arrow 24"/>
+          <p:cNvSpPr/>
+          <p:nvPr/>
+        </p:nvSpPr>
+        <p:spPr>
+          <a:xfrm>
+            <a:off x="6039612" y="2212848"/>
+            <a:ext cx="219456" cy="182880"/>
+          </a:xfrm>
+          <a:prstGeom prst="rightArrow">
+            <a:avLst>
+              <a:gd name="adj1" fmla="val 60000"/>
+              <a:gd name="adj2" fmla="val 55000"/>
+            </a:avLst>
+          </a:prstGeom>
+          <a:solidFill>
+            <a:srgbClr val="D8DFE9"/>
+          </a:solidFill>
+          <a:ln>
+            <a:noFill/>
+          </a:ln>
+          <a:effectLst/>
+        </p:spPr>
+        <p:style>
+          <a:lnRef idx="1">
+            <a:schemeClr val="accent1"/>
+          </a:lnRef>
+          <a:fillRef idx="3">
+            <a:schemeClr val="accent1"/>
+          </a:fillRef>
+          <a:effectRef idx="2">
+            <a:schemeClr val="accent1"/>
+          </a:effectRef>
+          <a:fontRef idx="minor">
+            <a:schemeClr val="lt1"/>
+          </a:fontRef>
+        </p:style>
+        <p:txBody>
+          <a:bodyPr rtlCol="0" anchor="ctr"/>
+          <a:lstStyle/>
+          <a:p>
+            <a:pPr algn="ctr"/>
+          </a:p>
+        </p:txBody>
+      </p:sp>
+      <p:sp>
+        <p:nvSpPr>
+          <p:cNvPr id="26" name="Oval 25"/>
+          <p:cNvSpPr/>
+          <p:nvPr/>
+        </p:nvSpPr>
+        <p:spPr>
+          <a:xfrm>
+            <a:off x="6259068" y="2121408"/>
+            <a:ext cx="365760" cy="365760"/>
+          </a:xfrm>
+          <a:prstGeom prst="ellipse">
+            <a:avLst/>
+          </a:prstGeom>
+          <a:solidFill>
+            <a:srgbClr val="101B2D"/>
+          </a:solidFill>
+          <a:ln>
+            <a:noFill/>
+          </a:ln>
+          <a:effectLst/>
+        </p:spPr>
+        <p:style>
+          <a:lnRef idx="1">
+            <a:schemeClr val="accent1"/>
+          </a:lnRef>
+          <a:fillRef idx="3">
+            <a:schemeClr val="accent1"/>
+          </a:fillRef>
+          <a:effectRef idx="2">
+            <a:schemeClr val="accent1"/>
+          </a:effectRef>
+          <a:fontRef idx="minor">
+            <a:schemeClr val="lt1"/>
+          </a:fontRef>
+        </p:style>
+        <p:txBody>
+          <a:bodyPr rtlCol="0" anchor="ctr" lIns="0" rIns="0" tIns="0" bIns="0"/>
+          <a:lstStyle/>
+          <a:p>
+            <a:pPr algn="ctr"/>
+            <a:r>
+              <a:rPr sz="1300" b="1">
+                <a:solidFill>
+                  <a:srgbClr val="F3E2D3"/>
+                </a:solidFill>
+                <a:latin typeface="Consolas"/>
+              </a:rPr>
+              <a:t>3</a:t>
+            </a:r>
+          </a:p>
+        </p:txBody>
+      </p:sp>
+      <p:sp>
+        <p:nvSpPr>
+          <p:cNvPr id="27" name="TextBox 26"/>
+          <p:cNvSpPr txBox="1"/>
+          <p:nvPr/>
+        </p:nvSpPr>
+        <p:spPr>
+          <a:xfrm>
+            <a:off x="6213348" y="2596896"/>
+            <a:ext cx="1410462" cy="256032"/>
+          </a:xfrm>
+          <a:prstGeom prst="rect">
+            <a:avLst/>
+          </a:prstGeom>
+          <a:noFill/>
+        </p:spPr>
+        <p:txBody>
+          <a:bodyPr wrap="none" anchor="t" lIns="0" rIns="0" tIns="0" bIns="0">
+            <a:spAutoFit/>
+          </a:bodyPr>
+          <a:lstStyle/>
+          <a:p>
+            <a:pPr algn="ctr">
+              <a:lnSpc>
+                <a:spcPct val="100000"/>
+              </a:lnSpc>
+              <a:spcAft>
+                <a:spcPts val="0"/>
+              </a:spcAft>
+            </a:pPr>
+            <a:r>
+              <a:rPr sz="1100" b="1" i="0">
+                <a:solidFill>
+                  <a:srgbClr val="101B2D"/>
+                </a:solidFill>
+                <a:latin typeface="Segoe UI"/>
+              </a:rPr>
+              <a:t>Lay Out</a:t>
+            </a:r>
+          </a:p>
+        </p:txBody>
+      </p:sp>
+      <p:sp>
+        <p:nvSpPr>
+          <p:cNvPr id="28" name="TextBox 27"/>
+          <p:cNvSpPr txBox="1"/>
+          <p:nvPr/>
+        </p:nvSpPr>
+        <p:spPr>
+          <a:xfrm>
+            <a:off x="6213348" y="2871216"/>
+            <a:ext cx="1410462" cy="1417320"/>
+          </a:xfrm>
+          <a:prstGeom prst="rect">
+            <a:avLst/>
+          </a:prstGeom>
+          <a:noFill/>
+        </p:spPr>
+        <p:txBody>
+          <a:bodyPr wrap="square" anchor="t" lIns="0" rIns="0" tIns="0" bIns="0">
+            <a:spAutoFit/>
+          </a:bodyPr>
+          <a:lstStyle/>
+          <a:p>
+            <a:pPr algn="ctr">
+              <a:lnSpc>
+                <a:spcPct val="120000"/>
+              </a:lnSpc>
+              <a:spcAft>
+                <a:spcPts val="0"/>
+              </a:spcAft>
+            </a:pPr>
+            <a:r>
+              <a:rPr sz="880" b="0" i="0">
+                <a:solidFill>
+                  <a:srgbClr val="4C5A70"/>
+                </a:solidFill>
+                <a:latin typeface="Segoe UI"/>
+              </a:rPr>
+              <a:t>Decides page breaks automatically so every filing prints and reads correctly.</a:t>
+            </a:r>
+          </a:p>
+        </p:txBody>
+      </p:sp>
+      <p:sp>
+        <p:nvSpPr>
+          <p:cNvPr id="29" name="Right Arrow 28"/>
+          <p:cNvSpPr/>
+          <p:nvPr/>
+        </p:nvSpPr>
+        <p:spPr>
+          <a:xfrm>
+            <a:off x="7578090" y="2212848"/>
+            <a:ext cx="219456" cy="182880"/>
+          </a:xfrm>
+          <a:prstGeom prst="rightArrow">
+            <a:avLst>
+              <a:gd name="adj1" fmla="val 60000"/>
+              <a:gd name="adj2" fmla="val 55000"/>
+            </a:avLst>
+          </a:prstGeom>
+          <a:solidFill>
+            <a:srgbClr val="D8DFE9"/>
+          </a:solidFill>
+          <a:ln>
+            <a:noFill/>
+          </a:ln>
+          <a:effectLst/>
+        </p:spPr>
+        <p:style>
+          <a:lnRef idx="1">
+            <a:schemeClr val="accent1"/>
+          </a:lnRef>
+          <a:fillRef idx="3">
+            <a:schemeClr val="accent1"/>
+          </a:fillRef>
+          <a:effectRef idx="2">
+            <a:schemeClr val="accent1"/>
+          </a:effectRef>
+          <a:fontRef idx="minor">
+            <a:schemeClr val="lt1"/>
+          </a:fontRef>
+        </p:style>
+        <p:txBody>
+          <a:bodyPr rtlCol="0" anchor="ctr"/>
+          <a:lstStyle/>
+          <a:p>
+            <a:pPr algn="ctr"/>
+          </a:p>
+        </p:txBody>
+      </p:sp>
+      <p:sp>
+        <p:nvSpPr>
+          <p:cNvPr id="30" name="Oval 29"/>
+          <p:cNvSpPr/>
+          <p:nvPr/>
+        </p:nvSpPr>
+        <p:spPr>
+          <a:xfrm>
+            <a:off x="7797546" y="2121408"/>
+            <a:ext cx="365760" cy="365760"/>
+          </a:xfrm>
+          <a:prstGeom prst="ellipse">
+            <a:avLst/>
+          </a:prstGeom>
+          <a:solidFill>
+            <a:srgbClr val="101B2D"/>
+          </a:solidFill>
+          <a:ln>
+            <a:noFill/>
+          </a:ln>
+          <a:effectLst/>
+        </p:spPr>
+        <p:style>
+          <a:lnRef idx="1">
+            <a:schemeClr val="accent1"/>
+          </a:lnRef>
+          <a:fillRef idx="3">
+            <a:schemeClr val="accent1"/>
+          </a:fillRef>
+          <a:effectRef idx="2">
+            <a:schemeClr val="accent1"/>
+          </a:effectRef>
+          <a:fontRef idx="minor">
+            <a:schemeClr val="lt1"/>
+          </a:fontRef>
+        </p:style>
+        <p:txBody>
+          <a:bodyPr rtlCol="0" anchor="ctr" lIns="0" rIns="0" tIns="0" bIns="0"/>
+          <a:lstStyle/>
+          <a:p>
+            <a:pPr algn="ctr"/>
+            <a:r>
+              <a:rPr sz="1300" b="1">
+                <a:solidFill>
+                  <a:srgbClr val="F3E2D3"/>
+                </a:solidFill>
+                <a:latin typeface="Consolas"/>
+              </a:rPr>
+              <a:t>4</a:t>
+            </a:r>
+          </a:p>
+        </p:txBody>
+      </p:sp>
+      <p:sp>
+        <p:nvSpPr>
+          <p:cNvPr id="31" name="TextBox 30"/>
+          <p:cNvSpPr txBox="1"/>
+          <p:nvPr/>
+        </p:nvSpPr>
+        <p:spPr>
+          <a:xfrm>
+            <a:off x="7751826" y="2596896"/>
+            <a:ext cx="1410462" cy="256032"/>
+          </a:xfrm>
+          <a:prstGeom prst="rect">
+            <a:avLst/>
+          </a:prstGeom>
+          <a:noFill/>
+        </p:spPr>
+        <p:txBody>
+          <a:bodyPr wrap="none" anchor="t" lIns="0" rIns="0" tIns="0" bIns="0">
+            <a:spAutoFit/>
+          </a:bodyPr>
+          <a:lstStyle/>
+          <a:p>
+            <a:pPr algn="ctr">
+              <a:lnSpc>
+                <a:spcPct val="100000"/>
+              </a:lnSpc>
+              <a:spcAft>
+                <a:spcPts val="0"/>
+              </a:spcAft>
+            </a:pPr>
+            <a:r>
+              <a:rPr sz="1100" b="1" i="0">
+                <a:solidFill>
+                  <a:srgbClr val="101B2D"/>
+                </a:solidFill>
+                <a:latin typeface="Segoe UI"/>
+              </a:rPr>
+              <a:t>Check &amp; Send</a:t>
+            </a:r>
+          </a:p>
+        </p:txBody>
+      </p:sp>
+      <p:sp>
+        <p:nvSpPr>
+          <p:cNvPr id="32" name="TextBox 31"/>
+          <p:cNvSpPr txBox="1"/>
+          <p:nvPr/>
+        </p:nvSpPr>
+        <p:spPr>
+          <a:xfrm>
+            <a:off x="7751826" y="2871216"/>
+            <a:ext cx="1410462" cy="1417320"/>
+          </a:xfrm>
+          <a:prstGeom prst="rect">
+            <a:avLst/>
+          </a:prstGeom>
+          <a:noFill/>
+        </p:spPr>
+        <p:txBody>
+          <a:bodyPr wrap="square" anchor="t" lIns="0" rIns="0" tIns="0" bIns="0">
+            <a:spAutoFit/>
+          </a:bodyPr>
+          <a:lstStyle/>
+          <a:p>
+            <a:pPr algn="ctr">
+              <a:lnSpc>
+                <a:spcPct val="120000"/>
+              </a:lnSpc>
+              <a:spcAft>
+                <a:spcPts val="0"/>
+              </a:spcAft>
+            </a:pPr>
+            <a:r>
+              <a:rPr sz="880" b="0" i="0">
+                <a:solidFill>
+                  <a:srgbClr val="4C5A70"/>
+                </a:solidFill>
+                <a:latin typeface="Segoe UI"/>
+              </a:rPr>
+              <a:t>Compares to the last approved version, flags changes, produces the final PDF.</a:t>
+            </a:r>
+          </a:p>
+        </p:txBody>
+      </p:sp>
+      <p:sp>
+        <p:nvSpPr>
+          <p:cNvPr id="33" name="Right Arrow 32"/>
+          <p:cNvSpPr/>
+          <p:nvPr/>
+        </p:nvSpPr>
+        <p:spPr>
+          <a:xfrm>
+            <a:off x="9336024" y="3300984"/>
+            <a:ext cx="256032" cy="256032"/>
+          </a:xfrm>
+          <a:prstGeom prst="rightArrow">
+            <a:avLst>
+              <a:gd name="adj1" fmla="val 60000"/>
+              <a:gd name="adj2" fmla="val 55000"/>
+            </a:avLst>
+          </a:prstGeom>
+          <a:solidFill>
+            <a:srgbClr val="D8DFE9"/>
+          </a:solidFill>
+          <a:ln>
+            <a:noFill/>
+          </a:ln>
+          <a:effectLst/>
+        </p:spPr>
+        <p:style>
+          <a:lnRef idx="1">
+            <a:schemeClr val="accent1"/>
+          </a:lnRef>
+          <a:fillRef idx="3">
+            <a:schemeClr val="accent1"/>
+          </a:fillRef>
+          <a:effectRef idx="2">
+            <a:schemeClr val="accent1"/>
+          </a:effectRef>
+          <a:fontRef idx="minor">
+            <a:schemeClr val="lt1"/>
+          </a:fontRef>
+        </p:style>
+        <p:txBody>
+          <a:bodyPr rtlCol="0" anchor="ctr"/>
+          <a:lstStyle/>
+          <a:p>
+            <a:pPr algn="ctr"/>
+          </a:p>
+        </p:txBody>
+      </p:sp>
+      <p:sp>
+        <p:nvSpPr>
+          <p:cNvPr id="34" name="Rectangle 33"/>
+          <p:cNvSpPr/>
+          <p:nvPr/>
+        </p:nvSpPr>
+        <p:spPr>
+          <a:xfrm>
+            <a:off x="9646920" y="1536192"/>
+            <a:ext cx="2039112" cy="274320"/>
+          </a:xfrm>
+          <a:prstGeom prst="rect">
+            <a:avLst/>
+          </a:prstGeom>
+          <a:solidFill>
+            <a:srgbClr val="101B2D"/>
+          </a:solidFill>
+          <a:ln>
+            <a:noFill/>
+          </a:ln>
+          <a:effectLst/>
+        </p:spPr>
+        <p:style>
+          <a:lnRef idx="1">
+            <a:schemeClr val="accent1"/>
+          </a:lnRef>
+          <a:fillRef idx="3">
+            <a:schemeClr val="accent1"/>
+          </a:fillRef>
+          <a:effectRef idx="2">
+            <a:schemeClr val="accent1"/>
+          </a:effectRef>
+          <a:fontRef idx="minor">
+            <a:schemeClr val="lt1"/>
+          </a:fontRef>
+        </p:style>
+        <p:txBody>
+          <a:bodyPr rtlCol="0" anchor="ctr" lIns="128016" tIns="0" bIns="0"/>
+          <a:lstStyle/>
+          <a:p>
+            <a:pPr algn="ctr"/>
+            <a:r>
+              <a:rPr sz="1250" b="1">
+                <a:solidFill>
+                  <a:srgbClr val="F2F5FA"/>
+                </a:solidFill>
+                <a:latin typeface="Segoe UI"/>
+              </a:rPr>
+              <a:t>FILING OUTPUT</a:t>
+            </a:r>
+          </a:p>
+        </p:txBody>
+      </p:sp>
+      <p:sp>
+        <p:nvSpPr>
+          <p:cNvPr id="35" name="Rounded Rectangle 34"/>
+          <p:cNvSpPr/>
+          <p:nvPr/>
+        </p:nvSpPr>
+        <p:spPr>
+          <a:xfrm>
+            <a:off x="9646920" y="1920240"/>
+            <a:ext cx="2039112" cy="1417320"/>
+          </a:xfrm>
+          <a:prstGeom prst="roundRect">
+            <a:avLst>
+              <a:gd name="adj" fmla="val 10000"/>
+            </a:avLst>
+          </a:prstGeom>
+          <a:solidFill>
+            <a:srgbClr val="F3E2D3"/>
+          </a:solidFill>
+          <a:ln w="13970">
+            <a:solidFill>
+              <a:srgbClr val="E6C7A8"/>
+            </a:solidFill>
+          </a:ln>
+          <a:effectLst/>
+        </p:spPr>
+        <p:style>
+          <a:lnRef idx="1">
+            <a:schemeClr val="accent1"/>
+          </a:lnRef>
+          <a:fillRef idx="3">
+            <a:schemeClr val="accent1"/>
+          </a:fillRef>
+          <a:effectRef idx="2">
+            <a:schemeClr val="accent1"/>
+          </a:effectRef>
+          <a:fontRef idx="minor">
+            <a:schemeClr val="lt1"/>
+          </a:fontRef>
+        </p:style>
+        <p:txBody>
+          <a:bodyPr rtlCol="0" anchor="ctr"/>
+          <a:lstStyle/>
+          <a:p>
+            <a:pPr algn="ctr"/>
+          </a:p>
+        </p:txBody>
+      </p:sp>
+      <p:sp>
+        <p:nvSpPr>
+          <p:cNvPr id="36" name="TextBox 35"/>
+          <p:cNvSpPr txBox="1"/>
+          <p:nvPr/>
+        </p:nvSpPr>
+        <p:spPr>
+          <a:xfrm>
+            <a:off x="9784080" y="2084832"/>
+            <a:ext cx="1764792" cy="502920"/>
+          </a:xfrm>
+          <a:prstGeom prst="rect">
+            <a:avLst/>
+          </a:prstGeom>
+          <a:noFill/>
+        </p:spPr>
+        <p:txBody>
+          <a:bodyPr wrap="square" anchor="t" lIns="0" rIns="0" tIns="0" bIns="0">
+            <a:spAutoFit/>
+          </a:bodyPr>
+          <a:lstStyle/>
+          <a:p>
+            <a:pPr algn="l">
+              <a:lnSpc>
+                <a:spcPct val="105000"/>
+              </a:lnSpc>
+              <a:spcAft>
+                <a:spcPts val="0"/>
+              </a:spcAft>
+            </a:pPr>
+            <a:r>
+              <a:rPr sz="1250" b="1" i="0">
+                <a:solidFill>
+                  <a:srgbClr val="A8451B"/>
+                </a:solidFill>
+                <a:latin typeface="Segoe UI"/>
+              </a:rPr>
+              <a:t>Excel Rate Pages</a:t>
+            </a:r>
+          </a:p>
+        </p:txBody>
+      </p:sp>
+      <p:sp>
+        <p:nvSpPr>
+          <p:cNvPr id="37" name="TextBox 36"/>
+          <p:cNvSpPr txBox="1"/>
+          <p:nvPr/>
+        </p:nvSpPr>
+        <p:spPr>
+          <a:xfrm>
+            <a:off x="9784080" y="2633472"/>
+            <a:ext cx="1764792" cy="548640"/>
+          </a:xfrm>
+          <a:prstGeom prst="rect">
+            <a:avLst/>
+          </a:prstGeom>
+          <a:noFill/>
+        </p:spPr>
+        <p:txBody>
+          <a:bodyPr wrap="square" anchor="t" lIns="0" rIns="0" tIns="0" bIns="0">
+            <a:spAutoFit/>
+          </a:bodyPr>
+          <a:lstStyle/>
+          <a:p>
+            <a:pPr algn="l">
+              <a:lnSpc>
+                <a:spcPct val="115000"/>
+              </a:lnSpc>
+              <a:spcAft>
+                <a:spcPts val="0"/>
+              </a:spcAft>
+            </a:pPr>
+            <a:r>
+              <a:rPr sz="960" b="0" i="0">
+                <a:solidFill>
+                  <a:srgbClr val="22334F"/>
+                </a:solidFill>
+                <a:latin typeface="Segoe UI"/>
+              </a:rPr>
+              <a:t>Every table, formatted and paginated</a:t>
+            </a:r>
+          </a:p>
+        </p:txBody>
+      </p:sp>
+      <p:sp>
+        <p:nvSpPr>
+          <p:cNvPr id="38" name="Rounded Rectangle 37"/>
+          <p:cNvSpPr/>
+          <p:nvPr/>
+        </p:nvSpPr>
+        <p:spPr>
+          <a:xfrm>
+            <a:off x="9646920" y="3520440"/>
+            <a:ext cx="2039112" cy="1417320"/>
+          </a:xfrm>
+          <a:prstGeom prst="roundRect">
+            <a:avLst>
+              <a:gd name="adj" fmla="val 10000"/>
+            </a:avLst>
+          </a:prstGeom>
+          <a:solidFill>
+            <a:srgbClr val="F3E2D3"/>
+          </a:solidFill>
+          <a:ln w="13970">
+            <a:solidFill>
+              <a:srgbClr val="E6C7A8"/>
+            </a:solidFill>
+          </a:ln>
+          <a:effectLst/>
+        </p:spPr>
+        <p:style>
+          <a:lnRef idx="1">
+            <a:schemeClr val="accent1"/>
+          </a:lnRef>
+          <a:fillRef idx="3">
+            <a:schemeClr val="accent1"/>
+          </a:fillRef>
+          <a:effectRef idx="2">
+            <a:schemeClr val="accent1"/>
+          </a:effectRef>
+          <a:fontRef idx="minor">
+            <a:schemeClr val="lt1"/>
+          </a:fontRef>
+        </p:style>
+        <p:txBody>
+          <a:bodyPr rtlCol="0" anchor="ctr"/>
+          <a:lstStyle/>
+          <a:p>
+            <a:pPr algn="ctr"/>
+          </a:p>
+        </p:txBody>
+      </p:sp>
+      <p:sp>
+        <p:nvSpPr>
+          <p:cNvPr id="39" name="TextBox 38"/>
+          <p:cNvSpPr txBox="1"/>
+          <p:nvPr/>
+        </p:nvSpPr>
+        <p:spPr>
+          <a:xfrm>
+            <a:off x="9784080" y="3685032"/>
+            <a:ext cx="1764792" cy="502920"/>
+          </a:xfrm>
+          <a:prstGeom prst="rect">
+            <a:avLst/>
+          </a:prstGeom>
+          <a:noFill/>
+        </p:spPr>
+        <p:txBody>
+          <a:bodyPr wrap="square" anchor="t" lIns="0" rIns="0" tIns="0" bIns="0">
+            <a:spAutoFit/>
+          </a:bodyPr>
+          <a:lstStyle/>
+          <a:p>
+            <a:pPr algn="l">
+              <a:lnSpc>
+                <a:spcPct val="105000"/>
+              </a:lnSpc>
+              <a:spcAft>
+                <a:spcPts val="0"/>
+              </a:spcAft>
+            </a:pPr>
+            <a:r>
+              <a:rPr sz="1250" b="1" i="0">
+                <a:solidFill>
+                  <a:srgbClr val="A8451B"/>
+                </a:solidFill>
+                <a:latin typeface="Segoe UI"/>
+              </a:rPr>
+              <a:t>Regulator-Ready PDF</a:t>
+            </a:r>
+          </a:p>
+        </p:txBody>
+      </p:sp>
+      <p:sp>
+        <p:nvSpPr>
+          <p:cNvPr id="40" name="TextBox 39"/>
+          <p:cNvSpPr txBox="1"/>
+          <p:nvPr/>
+        </p:nvSpPr>
+        <p:spPr>
+          <a:xfrm>
+            <a:off x="9784080" y="4233672"/>
+            <a:ext cx="1764792" cy="548640"/>
+          </a:xfrm>
+          <a:prstGeom prst="rect">
+            <a:avLst/>
+          </a:prstGeom>
+          <a:noFill/>
+        </p:spPr>
+        <p:txBody>
+          <a:bodyPr wrap="square" anchor="t" lIns="0" rIns="0" tIns="0" bIns="0">
+            <a:spAutoFit/>
+          </a:bodyPr>
+          <a:lstStyle/>
+          <a:p>
+            <a:pPr algn="l">
+              <a:lnSpc>
+                <a:spcPct val="115000"/>
+              </a:lnSpc>
+              <a:spcAft>
+                <a:spcPts val="0"/>
+              </a:spcAft>
+            </a:pPr>
+            <a:r>
+              <a:rPr sz="960" b="0" i="0">
+                <a:solidFill>
+                  <a:srgbClr val="22334F"/>
+                </a:solidFill>
+                <a:latin typeface="Segoe UI"/>
+              </a:rPr>
+              <a:t>Compressed and ready to file</a:t>
+            </a:r>
+          </a:p>
+        </p:txBody>
+      </p:sp>
+      <p:sp>
+        <p:nvSpPr>
+          <p:cNvPr id="41" name="Rounded Rectangle 40"/>
+          <p:cNvSpPr/>
+          <p:nvPr/>
+        </p:nvSpPr>
+        <p:spPr>
+          <a:xfrm>
+            <a:off x="502920" y="5120640"/>
+            <a:ext cx="11183112" cy="457200"/>
+          </a:xfrm>
+          <a:prstGeom prst="roundRect">
+            <a:avLst>
+              <a:gd name="adj" fmla="val 16000"/>
+            </a:avLst>
+          </a:prstGeom>
+          <a:solidFill>
+            <a:srgbClr val="FFFFFF"/>
+          </a:solidFill>
+          <a:ln w="12700">
+            <a:solidFill>
+              <a:srgbClr val="D8DFE9"/>
+            </a:solidFill>
+          </a:ln>
+          <a:effectLst/>
+        </p:spPr>
+        <p:style>
+          <a:lnRef idx="1">
+            <a:schemeClr val="accent1"/>
+          </a:lnRef>
+          <a:fillRef idx="3">
+            <a:schemeClr val="accent1"/>
+          </a:fillRef>
+          <a:effectRef idx="2">
+            <a:schemeClr val="accent1"/>
+          </a:effectRef>
+          <a:fontRef idx="minor">
+            <a:schemeClr val="lt1"/>
+          </a:fontRef>
+        </p:style>
+        <p:txBody>
+          <a:bodyPr rtlCol="0" anchor="ctr"/>
+          <a:lstStyle/>
+          <a:p>
+            <a:pPr algn="ctr"/>
+          </a:p>
+        </p:txBody>
+      </p:sp>
+      <p:sp>
+        <p:nvSpPr>
+          <p:cNvPr id="42" name="TextBox 41"/>
+          <p:cNvSpPr txBox="1"/>
+          <p:nvPr/>
+        </p:nvSpPr>
+        <p:spPr>
+          <a:xfrm>
+            <a:off x="777240" y="5120640"/>
+            <a:ext cx="10652760" cy="457200"/>
+          </a:xfrm>
+          <a:prstGeom prst="rect">
+            <a:avLst/>
+          </a:prstGeom>
+          <a:noFill/>
+        </p:spPr>
+        <p:txBody>
+          <a:bodyPr wrap="square" anchor="ctr" lIns="0" rIns="0" tIns="0" bIns="0">
             <a:spAutoFit/>
           </a:bodyPr>
           <a:lstStyle/>
@@ -5802,321 +8381,27 @@
               </a:spcAft>
             </a:pPr>
             <a:r>
-              <a:rPr sz="1250" b="1" i="0">
-                <a:solidFill>
-                  <a:srgbClr val="101B2D"/>
+              <a:rPr sz="1150" b="0" i="0">
+                <a:solidFill>
+                  <a:srgbClr val="22334F"/>
                 </a:solidFill>
                 <a:latin typeface="Segoe UI"/>
               </a:rPr>
-              <a:t>Business Owners Policy   </a:t>
-            </a:r>
-            <a:r>
-              <a:rPr sz="1000" b="0" i="0">
-                <a:solidFill>
-                  <a:srgbClr val="6B7A90"/>
-                </a:solidFill>
-                <a:latin typeface="Consolas"/>
-              </a:rPr>
-              <a:t>5 filing types</a:t>
-            </a:r>
-          </a:p>
-        </p:txBody>
-      </p:sp>
-      <p:sp>
-        <p:nvSpPr>
-          <p:cNvPr id="23" name="Rounded Rectangle 22"/>
-          <p:cNvSpPr/>
-          <p:nvPr/>
-        </p:nvSpPr>
-        <p:spPr>
-          <a:xfrm>
-            <a:off x="566928" y="4754880"/>
-            <a:ext cx="1426464" cy="292608"/>
-          </a:xfrm>
-          <a:prstGeom prst="roundRect">
-            <a:avLst>
-              <a:gd name="adj" fmla="val 50000"/>
-            </a:avLst>
-          </a:prstGeom>
-          <a:solidFill>
-            <a:srgbClr val="F3E2D3"/>
-          </a:solidFill>
-          <a:ln w="9525">
-            <a:solidFill>
-              <a:srgbClr val="E6C7A8"/>
-            </a:solidFill>
-          </a:ln>
-          <a:effectLst/>
-        </p:spPr>
-        <p:style>
-          <a:lnRef idx="1">
-            <a:schemeClr val="accent1"/>
-          </a:lnRef>
-          <a:fillRef idx="3">
-            <a:schemeClr val="accent1"/>
-          </a:fillRef>
-          <a:effectRef idx="2">
-            <a:schemeClr val="accent1"/>
-          </a:effectRef>
-          <a:fontRef idx="minor">
-            <a:schemeClr val="lt1"/>
-          </a:fontRef>
-        </p:style>
-        <p:txBody>
-          <a:bodyPr rtlCol="0" anchor="ctr" wrap="none" lIns="82296" rIns="82296" tIns="0" bIns="0"/>
-          <a:lstStyle/>
-          <a:p>
-            <a:pPr algn="ctr"/>
-            <a:r>
-              <a:rPr sz="950" b="1">
-                <a:solidFill>
-                  <a:srgbClr val="A8451B"/>
-                </a:solidFill>
-                <a:latin typeface="Consolas"/>
-              </a:rPr>
-              <a:t>All Programs</a:t>
-            </a:r>
-          </a:p>
-        </p:txBody>
-      </p:sp>
-      <p:sp>
-        <p:nvSpPr>
-          <p:cNvPr id="24" name="Rounded Rectangle 23"/>
-          <p:cNvSpPr/>
-          <p:nvPr/>
-        </p:nvSpPr>
-        <p:spPr>
-          <a:xfrm>
-            <a:off x="2084832" y="4754880"/>
-            <a:ext cx="1138428" cy="292608"/>
-          </a:xfrm>
-          <a:prstGeom prst="roundRect">
-            <a:avLst>
-              <a:gd name="adj" fmla="val 50000"/>
-            </a:avLst>
-          </a:prstGeom>
-          <a:solidFill>
-            <a:srgbClr val="F3E2D3"/>
-          </a:solidFill>
-          <a:ln w="9525">
-            <a:solidFill>
-              <a:srgbClr val="E6C7A8"/>
-            </a:solidFill>
-          </a:ln>
-          <a:effectLst/>
-        </p:spPr>
-        <p:style>
-          <a:lnRef idx="1">
-            <a:schemeClr val="accent1"/>
-          </a:lnRef>
-          <a:fillRef idx="3">
-            <a:schemeClr val="accent1"/>
-          </a:fillRef>
-          <a:effectRef idx="2">
-            <a:schemeClr val="accent1"/>
-          </a:effectRef>
-          <a:fontRef idx="minor">
-            <a:schemeClr val="lt1"/>
-          </a:fontRef>
-        </p:style>
-        <p:txBody>
-          <a:bodyPr rtlCol="0" anchor="ctr" wrap="none" lIns="82296" rIns="82296" tIns="0" bIns="0"/>
-          <a:lstStyle/>
-          <a:p>
-            <a:pPr algn="ctr"/>
-            <a:r>
-              <a:rPr sz="950" b="1">
-                <a:solidFill>
-                  <a:srgbClr val="A8451B"/>
-                </a:solidFill>
-                <a:latin typeface="Consolas"/>
-              </a:rPr>
-              <a:t>All Peril</a:t>
-            </a:r>
-          </a:p>
-        </p:txBody>
-      </p:sp>
-      <p:sp>
-        <p:nvSpPr>
-          <p:cNvPr id="25" name="Rounded Rectangle 24"/>
-          <p:cNvSpPr/>
-          <p:nvPr/>
-        </p:nvSpPr>
-        <p:spPr>
-          <a:xfrm>
-            <a:off x="3314700" y="4754880"/>
-            <a:ext cx="1426464" cy="292608"/>
-          </a:xfrm>
-          <a:prstGeom prst="roundRect">
-            <a:avLst>
-              <a:gd name="adj" fmla="val 50000"/>
-            </a:avLst>
-          </a:prstGeom>
-          <a:solidFill>
-            <a:srgbClr val="F3E2D3"/>
-          </a:solidFill>
-          <a:ln w="9525">
-            <a:solidFill>
-              <a:srgbClr val="E6C7A8"/>
-            </a:solidFill>
-          </a:ln>
-          <a:effectLst/>
-        </p:spPr>
-        <p:style>
-          <a:lnRef idx="1">
-            <a:schemeClr val="accent1"/>
-          </a:lnRef>
-          <a:fillRef idx="3">
-            <a:schemeClr val="accent1"/>
-          </a:fillRef>
-          <a:effectRef idx="2">
-            <a:schemeClr val="accent1"/>
-          </a:effectRef>
-          <a:fontRef idx="minor">
-            <a:schemeClr val="lt1"/>
-          </a:fontRef>
-        </p:style>
-        <p:txBody>
-          <a:bodyPr rtlCol="0" anchor="ctr" wrap="none" lIns="82296" rIns="82296" tIns="0" bIns="0"/>
-          <a:lstStyle/>
-          <a:p>
-            <a:pPr algn="ctr"/>
-            <a:r>
-              <a:rPr sz="950" b="1">
-                <a:solidFill>
-                  <a:srgbClr val="A8451B"/>
-                </a:solidFill>
-                <a:latin typeface="Consolas"/>
-              </a:rPr>
-              <a:t>Habitational</a:t>
-            </a:r>
-          </a:p>
-        </p:txBody>
-      </p:sp>
-      <p:sp>
-        <p:nvSpPr>
-          <p:cNvPr id="26" name="Rounded Rectangle 25"/>
-          <p:cNvSpPr/>
-          <p:nvPr/>
-        </p:nvSpPr>
-        <p:spPr>
-          <a:xfrm>
-            <a:off x="4832604" y="4754880"/>
-            <a:ext cx="1426464" cy="292608"/>
-          </a:xfrm>
-          <a:prstGeom prst="roundRect">
-            <a:avLst>
-              <a:gd name="adj" fmla="val 50000"/>
-            </a:avLst>
-          </a:prstGeom>
-          <a:solidFill>
-            <a:srgbClr val="F3E2D3"/>
-          </a:solidFill>
-          <a:ln w="9525">
-            <a:solidFill>
-              <a:srgbClr val="E6C7A8"/>
-            </a:solidFill>
-          </a:ln>
-          <a:effectLst/>
-        </p:spPr>
-        <p:style>
-          <a:lnRef idx="1">
-            <a:schemeClr val="accent1"/>
-          </a:lnRef>
-          <a:fillRef idx="3">
-            <a:schemeClr val="accent1"/>
-          </a:fillRef>
-          <a:effectRef idx="2">
-            <a:schemeClr val="accent1"/>
-          </a:effectRef>
-          <a:fontRef idx="minor">
-            <a:schemeClr val="lt1"/>
-          </a:fontRef>
-        </p:style>
-        <p:txBody>
-          <a:bodyPr rtlCol="0" anchor="ctr" wrap="none" lIns="82296" rIns="82296" tIns="0" bIns="0"/>
-          <a:lstStyle/>
-          <a:p>
-            <a:pPr algn="ctr"/>
-            <a:r>
-              <a:rPr sz="950" b="1">
-                <a:solidFill>
-                  <a:srgbClr val="A8451B"/>
-                </a:solidFill>
-                <a:latin typeface="Consolas"/>
-              </a:rPr>
-              <a:t>Auto Service</a:t>
-            </a:r>
-          </a:p>
-        </p:txBody>
-      </p:sp>
-      <p:sp>
-        <p:nvSpPr>
-          <p:cNvPr id="27" name="Rounded Rectangle 26"/>
-          <p:cNvSpPr/>
-          <p:nvPr/>
-        </p:nvSpPr>
-        <p:spPr>
-          <a:xfrm>
-            <a:off x="6350508" y="4754880"/>
-            <a:ext cx="850392" cy="292608"/>
-          </a:xfrm>
-          <a:prstGeom prst="roundRect">
-            <a:avLst>
-              <a:gd name="adj" fmla="val 50000"/>
-            </a:avLst>
-          </a:prstGeom>
-          <a:solidFill>
-            <a:srgbClr val="F3E2D3"/>
-          </a:solidFill>
-          <a:ln w="9525">
-            <a:solidFill>
-              <a:srgbClr val="E6C7A8"/>
-            </a:solidFill>
-          </a:ln>
-          <a:effectLst/>
-        </p:spPr>
-        <p:style>
-          <a:lnRef idx="1">
-            <a:schemeClr val="accent1"/>
-          </a:lnRef>
-          <a:fillRef idx="3">
-            <a:schemeClr val="accent1"/>
-          </a:fillRef>
-          <a:effectRef idx="2">
-            <a:schemeClr val="accent1"/>
-          </a:effectRef>
-          <a:fontRef idx="minor">
-            <a:schemeClr val="lt1"/>
-          </a:fontRef>
-        </p:style>
-        <p:txBody>
-          <a:bodyPr rtlCol="0" anchor="ctr" wrap="none" lIns="82296" rIns="82296" tIns="0" bIns="0"/>
-          <a:lstStyle/>
-          <a:p>
-            <a:pPr algn="ctr"/>
-            <a:r>
-              <a:rPr sz="950" b="1">
-                <a:solidFill>
-                  <a:srgbClr val="A8451B"/>
-                </a:solidFill>
-                <a:latin typeface="Consolas"/>
-              </a:rPr>
-              <a:t>Retail</a:t>
-            </a:r>
-          </a:p>
-        </p:txBody>
-      </p:sp>
-      <p:sp>
-        <p:nvSpPr>
-          <p:cNvPr id="28" name="TextBox 27"/>
+              <a:t>Runs the same way, end to end, for every program, every state, and every underwriting company — no special cases.</a:t>
+            </a:r>
+          </a:p>
+        </p:txBody>
+      </p:sp>
+      <p:sp>
+        <p:nvSpPr>
+          <p:cNvPr id="43" name="TextBox 42"/>
           <p:cNvSpPr txBox="1"/>
           <p:nvPr/>
         </p:nvSpPr>
         <p:spPr>
           <a:xfrm>
-            <a:off x="566928" y="5120640"/>
-            <a:ext cx="3657600" cy="256032"/>
+            <a:off x="502920" y="6528816"/>
+            <a:ext cx="7315200" cy="256032"/>
           </a:xfrm>
           <a:prstGeom prst="rect">
             <a:avLst/>
@@ -6138,399 +8423,12 @@
               </a:spcAft>
             </a:pPr>
             <a:r>
-              <a:rPr sz="1250" b="1" i="0">
-                <a:solidFill>
-                  <a:srgbClr val="101B2D"/>
-                </a:solidFill>
-                <a:latin typeface="Segoe UI"/>
-              </a:rPr>
-              <a:t>Business Auto   </a:t>
-            </a:r>
-            <a:r>
-              <a:rPr sz="1000" b="0" i="0">
+              <a:rPr sz="900" b="0" i="0">
                 <a:solidFill>
                   <a:srgbClr val="6B7A90"/>
                 </a:solidFill>
                 <a:latin typeface="Consolas"/>
               </a:rPr>
-              <a:t>3 filing modes</a:t>
-            </a:r>
-          </a:p>
-        </p:txBody>
-      </p:sp>
-      <p:sp>
-        <p:nvSpPr>
-          <p:cNvPr id="29" name="Rounded Rectangle 28"/>
-          <p:cNvSpPr/>
-          <p:nvPr/>
-        </p:nvSpPr>
-        <p:spPr>
-          <a:xfrm>
-            <a:off x="566928" y="5431536"/>
-            <a:ext cx="1426464" cy="292608"/>
-          </a:xfrm>
-          <a:prstGeom prst="roundRect">
-            <a:avLst>
-              <a:gd name="adj" fmla="val 50000"/>
-            </a:avLst>
-          </a:prstGeom>
-          <a:solidFill>
-            <a:srgbClr val="F3E2D3"/>
-          </a:solidFill>
-          <a:ln w="9525">
-            <a:solidFill>
-              <a:srgbClr val="E6C7A8"/>
-            </a:solidFill>
-          </a:ln>
-          <a:effectLst/>
-        </p:spPr>
-        <p:style>
-          <a:lnRef idx="1">
-            <a:schemeClr val="accent1"/>
-          </a:lnRef>
-          <a:fillRef idx="3">
-            <a:schemeClr val="accent1"/>
-          </a:fillRef>
-          <a:effectRef idx="2">
-            <a:schemeClr val="accent1"/>
-          </a:effectRef>
-          <a:fontRef idx="minor">
-            <a:schemeClr val="lt1"/>
-          </a:fontRef>
-        </p:style>
-        <p:txBody>
-          <a:bodyPr rtlCol="0" anchor="ctr" wrap="none" lIns="82296" rIns="82296" tIns="0" bIns="0"/>
-          <a:lstStyle/>
-          <a:p>
-            <a:pPr algn="ctr"/>
-            <a:r>
-              <a:rPr sz="950" b="1">
-                <a:solidFill>
-                  <a:srgbClr val="A8451B"/>
-                </a:solidFill>
-                <a:latin typeface="Consolas"/>
-              </a:rPr>
-              <a:t>Single State</a:t>
-            </a:r>
-          </a:p>
-        </p:txBody>
-      </p:sp>
-      <p:sp>
-        <p:nvSpPr>
-          <p:cNvPr id="30" name="Rounded Rectangle 29"/>
-          <p:cNvSpPr/>
-          <p:nvPr/>
-        </p:nvSpPr>
-        <p:spPr>
-          <a:xfrm>
-            <a:off x="2084832" y="5431536"/>
-            <a:ext cx="1714500" cy="292608"/>
-          </a:xfrm>
-          <a:prstGeom prst="roundRect">
-            <a:avLst>
-              <a:gd name="adj" fmla="val 50000"/>
-            </a:avLst>
-          </a:prstGeom>
-          <a:solidFill>
-            <a:srgbClr val="F3E2D3"/>
-          </a:solidFill>
-          <a:ln w="9525">
-            <a:solidFill>
-              <a:srgbClr val="E6C7A8"/>
-            </a:solidFill>
-          </a:ln>
-          <a:effectLst/>
-        </p:spPr>
-        <p:style>
-          <a:lnRef idx="1">
-            <a:schemeClr val="accent1"/>
-          </a:lnRef>
-          <a:fillRef idx="3">
-            <a:schemeClr val="accent1"/>
-          </a:fillRef>
-          <a:effectRef idx="2">
-            <a:schemeClr val="accent1"/>
-          </a:effectRef>
-          <a:fontRef idx="minor">
-            <a:schemeClr val="lt1"/>
-          </a:fontRef>
-        </p:style>
-        <p:txBody>
-          <a:bodyPr rtlCol="0" anchor="ctr" wrap="none" lIns="82296" rIns="82296" tIns="0" bIns="0"/>
-          <a:lstStyle/>
-          <a:p>
-            <a:pPr algn="ctr"/>
-            <a:r>
-              <a:rPr sz="950" b="1">
-                <a:solidFill>
-                  <a:srgbClr val="A8451B"/>
-                </a:solidFill>
-                <a:latin typeface="Consolas"/>
-              </a:rPr>
-              <a:t>Multiple States</a:t>
-            </a:r>
-          </a:p>
-        </p:txBody>
-      </p:sp>
-      <p:sp>
-        <p:nvSpPr>
-          <p:cNvPr id="31" name="Rounded Rectangle 30"/>
-          <p:cNvSpPr/>
-          <p:nvPr/>
-        </p:nvSpPr>
-        <p:spPr>
-          <a:xfrm>
-            <a:off x="3890772" y="5431536"/>
-            <a:ext cx="2290572" cy="292608"/>
-          </a:xfrm>
-          <a:prstGeom prst="roundRect">
-            <a:avLst>
-              <a:gd name="adj" fmla="val 50000"/>
-            </a:avLst>
-          </a:prstGeom>
-          <a:solidFill>
-            <a:srgbClr val="F3E2D3"/>
-          </a:solidFill>
-          <a:ln w="9525">
-            <a:solidFill>
-              <a:srgbClr val="E6C7A8"/>
-            </a:solidFill>
-          </a:ln>
-          <a:effectLst/>
-        </p:spPr>
-        <p:style>
-          <a:lnRef idx="1">
-            <a:schemeClr val="accent1"/>
-          </a:lnRef>
-          <a:fillRef idx="3">
-            <a:schemeClr val="accent1"/>
-          </a:fillRef>
-          <a:effectRef idx="2">
-            <a:schemeClr val="accent1"/>
-          </a:effectRef>
-          <a:fontRef idx="minor">
-            <a:schemeClr val="lt1"/>
-          </a:fontRef>
-        </p:style>
-        <p:txBody>
-          <a:bodyPr rtlCol="0" anchor="ctr" wrap="none" lIns="82296" rIns="82296" tIns="0" bIns="0"/>
-          <a:lstStyle/>
-          <a:p>
-            <a:pPr algn="ctr"/>
-            <a:r>
-              <a:rPr sz="950" b="1">
-                <a:solidFill>
-                  <a:srgbClr val="A8451B"/>
-                </a:solidFill>
-                <a:latin typeface="Consolas"/>
-              </a:rPr>
-              <a:t>Small &amp; Middle Market</a:t>
-            </a:r>
-          </a:p>
-        </p:txBody>
-      </p:sp>
-      <p:sp>
-        <p:nvSpPr>
-          <p:cNvPr id="32" name="TextBox 31"/>
-          <p:cNvSpPr txBox="1"/>
-          <p:nvPr/>
-        </p:nvSpPr>
-        <p:spPr>
-          <a:xfrm>
-            <a:off x="566928" y="5797296"/>
-            <a:ext cx="3657600" cy="256032"/>
-          </a:xfrm>
-          <a:prstGeom prst="rect">
-            <a:avLst/>
-          </a:prstGeom>
-          <a:noFill/>
-        </p:spPr>
-        <p:txBody>
-          <a:bodyPr wrap="square" anchor="t" lIns="0" rIns="0" tIns="0" bIns="0">
-            <a:spAutoFit/>
-          </a:bodyPr>
-          <a:lstStyle/>
-          <a:p>
-            <a:pPr algn="l">
-              <a:lnSpc>
-                <a:spcPct val="100000"/>
-              </a:lnSpc>
-              <a:spcAft>
-                <a:spcPts val="0"/>
-              </a:spcAft>
-            </a:pPr>
-            <a:r>
-              <a:rPr sz="1250" b="1" i="0">
-                <a:solidFill>
-                  <a:srgbClr val="101B2D"/>
-                </a:solidFill>
-                <a:latin typeface="Segoe UI"/>
-              </a:rPr>
-              <a:t>Farm Auto   </a:t>
-            </a:r>
-            <a:r>
-              <a:rPr sz="1000" b="0" i="0">
-                <a:solidFill>
-                  <a:srgbClr val="6B7A90"/>
-                </a:solidFill>
-                <a:latin typeface="Consolas"/>
-              </a:rPr>
-              <a:t>2 filing modes</a:t>
-            </a:r>
-          </a:p>
-        </p:txBody>
-      </p:sp>
-      <p:sp>
-        <p:nvSpPr>
-          <p:cNvPr id="33" name="Rounded Rectangle 32"/>
-          <p:cNvSpPr/>
-          <p:nvPr/>
-        </p:nvSpPr>
-        <p:spPr>
-          <a:xfrm>
-            <a:off x="566928" y="6108192"/>
-            <a:ext cx="1426464" cy="292608"/>
-          </a:xfrm>
-          <a:prstGeom prst="roundRect">
-            <a:avLst>
-              <a:gd name="adj" fmla="val 50000"/>
-            </a:avLst>
-          </a:prstGeom>
-          <a:solidFill>
-            <a:srgbClr val="F3E2D3"/>
-          </a:solidFill>
-          <a:ln w="9525">
-            <a:solidFill>
-              <a:srgbClr val="E6C7A8"/>
-            </a:solidFill>
-          </a:ln>
-          <a:effectLst/>
-        </p:spPr>
-        <p:style>
-          <a:lnRef idx="1">
-            <a:schemeClr val="accent1"/>
-          </a:lnRef>
-          <a:fillRef idx="3">
-            <a:schemeClr val="accent1"/>
-          </a:fillRef>
-          <a:effectRef idx="2">
-            <a:schemeClr val="accent1"/>
-          </a:effectRef>
-          <a:fontRef idx="minor">
-            <a:schemeClr val="lt1"/>
-          </a:fontRef>
-        </p:style>
-        <p:txBody>
-          <a:bodyPr rtlCol="0" anchor="ctr" wrap="none" lIns="82296" rIns="82296" tIns="0" bIns="0"/>
-          <a:lstStyle/>
-          <a:p>
-            <a:pPr algn="ctr"/>
-            <a:r>
-              <a:rPr sz="950" b="1">
-                <a:solidFill>
-                  <a:srgbClr val="A8451B"/>
-                </a:solidFill>
-                <a:latin typeface="Consolas"/>
-              </a:rPr>
-              <a:t>Single State</a:t>
-            </a:r>
-          </a:p>
-        </p:txBody>
-      </p:sp>
-      <p:sp>
-        <p:nvSpPr>
-          <p:cNvPr id="34" name="Rounded Rectangle 33"/>
-          <p:cNvSpPr/>
-          <p:nvPr/>
-        </p:nvSpPr>
-        <p:spPr>
-          <a:xfrm>
-            <a:off x="2084832" y="6108192"/>
-            <a:ext cx="1714500" cy="292608"/>
-          </a:xfrm>
-          <a:prstGeom prst="roundRect">
-            <a:avLst>
-              <a:gd name="adj" fmla="val 50000"/>
-            </a:avLst>
-          </a:prstGeom>
-          <a:solidFill>
-            <a:srgbClr val="F3E2D3"/>
-          </a:solidFill>
-          <a:ln w="9525">
-            <a:solidFill>
-              <a:srgbClr val="E6C7A8"/>
-            </a:solidFill>
-          </a:ln>
-          <a:effectLst/>
-        </p:spPr>
-        <p:style>
-          <a:lnRef idx="1">
-            <a:schemeClr val="accent1"/>
-          </a:lnRef>
-          <a:fillRef idx="3">
-            <a:schemeClr val="accent1"/>
-          </a:fillRef>
-          <a:effectRef idx="2">
-            <a:schemeClr val="accent1"/>
-          </a:effectRef>
-          <a:fontRef idx="minor">
-            <a:schemeClr val="lt1"/>
-          </a:fontRef>
-        </p:style>
-        <p:txBody>
-          <a:bodyPr rtlCol="0" anchor="ctr" wrap="none" lIns="82296" rIns="82296" tIns="0" bIns="0"/>
-          <a:lstStyle/>
-          <a:p>
-            <a:pPr algn="ctr"/>
-            <a:r>
-              <a:rPr sz="950" b="1">
-                <a:solidFill>
-                  <a:srgbClr val="A8451B"/>
-                </a:solidFill>
-                <a:latin typeface="Consolas"/>
-              </a:rPr>
-              <a:t>Multiple States</a:t>
-            </a:r>
-          </a:p>
-        </p:txBody>
-      </p:sp>
-      <p:sp>
-        <p:nvSpPr>
-          <p:cNvPr id="35" name="TextBox 34"/>
-          <p:cNvSpPr txBox="1"/>
-          <p:nvPr/>
-        </p:nvSpPr>
-        <p:spPr>
-          <a:xfrm>
-            <a:off x="502920" y="6528816"/>
-            <a:ext cx="7315200" cy="256032"/>
-          </a:xfrm>
-          <a:prstGeom prst="rect">
-            <a:avLst/>
-          </a:prstGeom>
-          <a:noFill/>
-        </p:spPr>
-        <p:txBody>
-          <a:bodyPr wrap="square" anchor="t" lIns="0" rIns="0" tIns="0" bIns="0">
-            <a:spAutoFit/>
-          </a:bodyPr>
-          <a:lstStyle/>
-          <a:p>
-            <a:pPr algn="l">
-              <a:lnSpc>
-                <a:spcPct val="100000"/>
-              </a:lnSpc>
-              <a:spcAft>
-                <a:spcPts val="0"/>
-              </a:spcAft>
-            </a:pPr>
-            <a:r>
-              <a:rPr sz="900" b="0" i="0">
-                <a:solidFill>
-                  <a:srgbClr val="6B7A90"/>
-                </a:solidFill>
-                <a:latin typeface="Consolas"/>
-              </a:rPr>
               <a:t>BOP  ·  Business Auto  ·  Farm Auto  —  Rate Filing Platform</a:t>
             </a:r>
           </a:p>
@@ -6538,7 +8436,7 @@
       </p:sp>
       <p:sp>
         <p:nvSpPr>
-          <p:cNvPr id="36" name="TextBox 35"/>
+          <p:cNvPr id="44" name="TextBox 43"/>
           <p:cNvSpPr txBox="1"/>
           <p:nvPr/>
         </p:nvSpPr>
@@ -6573,7 +8471,7 @@
                 </a:solidFill>
                 <a:latin typeface="Consolas"/>
               </a:rPr>
-              <a:t>02</a:t>
+              <a:t>03</a:t>
             </a:r>
           </a:p>
         </p:txBody>
